--- a/Report/Global Hotels and Resorts Revenue Analysis - Cancellation Analysis.pptx
+++ b/Report/Global Hotels and Resorts Revenue Analysis - Cancellation Analysis.pptx
@@ -16,18 +16,18 @@
     <p:sldId id="264" r:id="rId7"/>
     <p:sldId id="267" r:id="rId8"/>
     <p:sldId id="270" r:id="rId9"/>
-    <p:sldId id="276" r:id="rId10"/>
+    <p:sldId id="281" r:id="rId10"/>
     <p:sldId id="279" r:id="rId11"/>
     <p:sldId id="278" r:id="rId12"/>
     <p:sldId id="280" r:id="rId13"/>
-    <p:sldId id="260" r:id="rId14"/>
-    <p:sldId id="269" r:id="rId15"/>
-    <p:sldId id="275" r:id="rId16"/>
-    <p:sldId id="274" r:id="rId17"/>
-    <p:sldId id="259" r:id="rId18"/>
-    <p:sldId id="273" r:id="rId19"/>
-    <p:sldId id="272" r:id="rId20"/>
-    <p:sldId id="277" r:id="rId21"/>
+    <p:sldId id="282" r:id="rId14"/>
+    <p:sldId id="260" r:id="rId15"/>
+    <p:sldId id="269" r:id="rId16"/>
+    <p:sldId id="275" r:id="rId17"/>
+    <p:sldId id="274" r:id="rId18"/>
+    <p:sldId id="259" r:id="rId19"/>
+    <p:sldId id="273" r:id="rId20"/>
+    <p:sldId id="272" r:id="rId21"/>
     <p:sldId id="265" r:id="rId22"/>
   </p:sldIdLst>
   <p:sldSz cx="12192000" cy="6858000"/>
@@ -217,7 +217,7 @@
           <a:p>
             <a:fld id="{C538133C-08E5-9D42-B4EB-37568A016D91}" type="datetimeFigureOut">
               <a:rPr lang="en-US" smtClean="0"/>
-              <a:t>9/24/25</a:t>
+              <a:t>10/23/2025</a:t>
             </a:fld>
             <a:endParaRPr lang="en-US"/>
           </a:p>
@@ -715,7 +715,7 @@
           <a:p>
             <a:fld id="{EED1C14C-A143-42F5-B247-D0E800131009}" type="datetimeFigureOut">
               <a:rPr lang="en-US" smtClean="0"/>
-              <a:t>9/24/25</a:t>
+              <a:t>10/23/2025</a:t>
             </a:fld>
             <a:endParaRPr lang="en-US"/>
           </a:p>
@@ -913,7 +913,7 @@
           <a:p>
             <a:fld id="{EED1C14C-A143-42F5-B247-D0E800131009}" type="datetimeFigureOut">
               <a:rPr lang="en-US" smtClean="0"/>
-              <a:t>9/24/25</a:t>
+              <a:t>10/23/2025</a:t>
             </a:fld>
             <a:endParaRPr lang="en-US"/>
           </a:p>
@@ -1121,7 +1121,7 @@
           <a:p>
             <a:fld id="{EED1C14C-A143-42F5-B247-D0E800131009}" type="datetimeFigureOut">
               <a:rPr lang="en-US" smtClean="0"/>
-              <a:t>9/24/25</a:t>
+              <a:t>10/23/2025</a:t>
             </a:fld>
             <a:endParaRPr lang="en-US"/>
           </a:p>
@@ -1319,7 +1319,7 @@
           <a:p>
             <a:fld id="{EED1C14C-A143-42F5-B247-D0E800131009}" type="datetimeFigureOut">
               <a:rPr lang="en-US" smtClean="0"/>
-              <a:t>9/24/25</a:t>
+              <a:t>10/23/2025</a:t>
             </a:fld>
             <a:endParaRPr lang="en-US"/>
           </a:p>
@@ -1594,7 +1594,7 @@
           <a:p>
             <a:fld id="{EED1C14C-A143-42F5-B247-D0E800131009}" type="datetimeFigureOut">
               <a:rPr lang="en-US" smtClean="0"/>
-              <a:t>9/24/25</a:t>
+              <a:t>10/23/2025</a:t>
             </a:fld>
             <a:endParaRPr lang="en-US"/>
           </a:p>
@@ -1859,7 +1859,7 @@
           <a:p>
             <a:fld id="{EED1C14C-A143-42F5-B247-D0E800131009}" type="datetimeFigureOut">
               <a:rPr lang="en-US" smtClean="0"/>
-              <a:t>9/24/25</a:t>
+              <a:t>10/23/2025</a:t>
             </a:fld>
             <a:endParaRPr lang="en-US"/>
           </a:p>
@@ -2271,7 +2271,7 @@
           <a:p>
             <a:fld id="{EED1C14C-A143-42F5-B247-D0E800131009}" type="datetimeFigureOut">
               <a:rPr lang="en-US" smtClean="0"/>
-              <a:t>9/24/25</a:t>
+              <a:t>10/23/2025</a:t>
             </a:fld>
             <a:endParaRPr lang="en-US"/>
           </a:p>
@@ -2412,7 +2412,7 @@
           <a:p>
             <a:fld id="{EED1C14C-A143-42F5-B247-D0E800131009}" type="datetimeFigureOut">
               <a:rPr lang="en-US" smtClean="0"/>
-              <a:t>9/24/25</a:t>
+              <a:t>10/23/2025</a:t>
             </a:fld>
             <a:endParaRPr lang="en-US"/>
           </a:p>
@@ -2525,7 +2525,7 @@
           <a:p>
             <a:fld id="{EED1C14C-A143-42F5-B247-D0E800131009}" type="datetimeFigureOut">
               <a:rPr lang="en-US" smtClean="0"/>
-              <a:t>9/24/25</a:t>
+              <a:t>10/23/2025</a:t>
             </a:fld>
             <a:endParaRPr lang="en-US"/>
           </a:p>
@@ -2836,7 +2836,7 @@
           <a:p>
             <a:fld id="{EED1C14C-A143-42F5-B247-D0E800131009}" type="datetimeFigureOut">
               <a:rPr lang="en-US" smtClean="0"/>
-              <a:t>9/24/25</a:t>
+              <a:t>10/23/2025</a:t>
             </a:fld>
             <a:endParaRPr lang="en-US"/>
           </a:p>
@@ -3124,7 +3124,7 @@
           <a:p>
             <a:fld id="{EED1C14C-A143-42F5-B247-D0E800131009}" type="datetimeFigureOut">
               <a:rPr lang="en-US" smtClean="0"/>
-              <a:t>9/24/25</a:t>
+              <a:t>10/23/2025</a:t>
             </a:fld>
             <a:endParaRPr lang="en-US"/>
           </a:p>
@@ -3365,7 +3365,7 @@
           <a:p>
             <a:fld id="{EED1C14C-A143-42F5-B247-D0E800131009}" type="datetimeFigureOut">
               <a:rPr lang="en-US" smtClean="0"/>
-              <a:t>9/24/25</a:t>
+              <a:t>10/23/2025</a:t>
             </a:fld>
             <a:endParaRPr lang="en-US"/>
           </a:p>
@@ -3817,25 +3817,39 @@
             </a:pPr>
             <a:r>
               <a:rPr b="1" dirty="0">
-                <a:latin typeface="Times New Roman" panose="02020603050405020304" pitchFamily="18" charset="0"/>
+                <a:latin typeface="Microsoft JhengHei UI" panose="020B0604030504040204" pitchFamily="34" charset="-120"/>
+                <a:ea typeface="Microsoft JhengHei UI" panose="020B0604030504040204" pitchFamily="34" charset="-120"/>
                 <a:cs typeface="Times New Roman" panose="02020603050405020304" pitchFamily="18" charset="0"/>
               </a:rPr>
               <a:t>Global Hotels and Resorts</a:t>
             </a:r>
             <a:br>
               <a:rPr lang="en-US" b="1" dirty="0">
-                <a:latin typeface="Times New Roman" panose="02020603050405020304" pitchFamily="18" charset="0"/>
+                <a:latin typeface="Microsoft JhengHei UI" panose="020B0604030504040204" pitchFamily="34" charset="-120"/>
+                <a:ea typeface="Microsoft JhengHei UI" panose="020B0604030504040204" pitchFamily="34" charset="-120"/>
                 <a:cs typeface="Times New Roman" panose="02020603050405020304" pitchFamily="18" charset="0"/>
               </a:rPr>
             </a:br>
             <a:r>
+              <a:rPr lang="zh-TW" altLang="en-US" b="1" dirty="0">
+                <a:latin typeface="Microsoft JhengHei UI" panose="020B0604030504040204" pitchFamily="34" charset="-120"/>
+                <a:ea typeface="Microsoft JhengHei UI" panose="020B0604030504040204" pitchFamily="34" charset="-120"/>
+                <a:cs typeface="Times New Roman" panose="02020603050405020304" pitchFamily="18" charset="0"/>
+              </a:rPr>
+              <a:t>訂房取消</a:t>
+            </a:r>
+            <a:r>
               <a:rPr lang="en-US" b="1" dirty="0" err="1">
-                <a:latin typeface="Times New Roman" panose="02020603050405020304" pitchFamily="18" charset="0"/>
+                <a:latin typeface="Microsoft JhengHei UI" panose="020B0604030504040204" pitchFamily="34" charset="-120"/>
+                <a:ea typeface="Microsoft JhengHei UI" panose="020B0604030504040204" pitchFamily="34" charset="-120"/>
                 <a:cs typeface="Times New Roman" panose="02020603050405020304" pitchFamily="18" charset="0"/>
               </a:rPr>
-              <a:t>取消訂房分析</a:t>
-            </a:r>
-            <a:endParaRPr b="1" dirty="0"/>
+              <a:t>分析</a:t>
+            </a:r>
+            <a:endParaRPr b="1" dirty="0">
+              <a:latin typeface="Microsoft JhengHei UI" panose="020B0604030504040204" pitchFamily="34" charset="-120"/>
+              <a:ea typeface="Microsoft JhengHei UI" panose="020B0604030504040204" pitchFamily="34" charset="-120"/>
+            </a:endParaRPr>
           </a:p>
         </p:txBody>
       </p:sp>
@@ -3897,14 +3911,37 @@
           <a:p>
             <a:pPr algn="ctr"/>
             <a:r>
-              <a:rPr lang="en-US" altLang="zh-TW" dirty="0"/>
-              <a:t>Python</a:t>
-            </a:r>
-            <a:r>
-              <a:rPr lang="zh-TW" altLang="en-US" dirty="0"/>
-              <a:t> 分群</a:t>
-            </a:r>
-            <a:endParaRPr lang="en-US" dirty="0"/>
+              <a:rPr lang="en-US" altLang="zh-TW" dirty="0">
+                <a:latin typeface="Microsoft JhengHei UI" panose="020B0604030504040204" pitchFamily="34" charset="-120"/>
+                <a:ea typeface="Microsoft JhengHei UI" panose="020B0604030504040204" pitchFamily="34" charset="-120"/>
+              </a:rPr>
+              <a:t>K-means Clustering</a:t>
+            </a:r>
+            <a:r>
+              <a:rPr lang="zh-TW" altLang="en-US" dirty="0">
+                <a:latin typeface="Microsoft JhengHei UI" panose="020B0604030504040204" pitchFamily="34" charset="-120"/>
+                <a:ea typeface="Microsoft JhengHei UI" panose="020B0604030504040204" pitchFamily="34" charset="-120"/>
+              </a:rPr>
+              <a:t> </a:t>
+            </a:r>
+            <a:r>
+              <a:rPr lang="en-US" altLang="zh-TW" dirty="0">
+                <a:latin typeface="Microsoft JhengHei UI" panose="020B0604030504040204" pitchFamily="34" charset="-120"/>
+                <a:ea typeface="Microsoft JhengHei UI" panose="020B0604030504040204" pitchFamily="34" charset="-120"/>
+              </a:rPr>
+              <a:t>Tableau</a:t>
+            </a:r>
+            <a:r>
+              <a:rPr lang="zh-TW" altLang="en-US" dirty="0">
+                <a:latin typeface="Microsoft JhengHei UI" panose="020B0604030504040204" pitchFamily="34" charset="-120"/>
+                <a:ea typeface="Microsoft JhengHei UI" panose="020B0604030504040204" pitchFamily="34" charset="-120"/>
+              </a:rPr>
+              <a:t> 分析</a:t>
+            </a:r>
+            <a:endParaRPr lang="en-US" dirty="0">
+              <a:latin typeface="Microsoft JhengHei UI" panose="020B0604030504040204" pitchFamily="34" charset="-120"/>
+              <a:ea typeface="Microsoft JhengHei UI" panose="020B0604030504040204" pitchFamily="34" charset="-120"/>
+            </a:endParaRPr>
           </a:p>
         </p:txBody>
       </p:sp>
@@ -4021,8 +4058,8 @@
         </p:nvSpPr>
         <p:spPr>
           <a:xfrm>
-            <a:off x="1052420" y="367162"/>
-            <a:ext cx="4347716" cy="3355975"/>
+            <a:off x="812319" y="1552166"/>
+            <a:ext cx="4433449" cy="2472397"/>
           </a:xfrm>
         </p:spPr>
         <p:txBody>
@@ -4041,24 +4078,27 @@
               <a:buNone/>
             </a:pPr>
             <a:r>
-              <a:rPr lang="en-US" sz="1800" dirty="0">
+              <a:rPr lang="en-US" sz="1400" dirty="0">
                 <a:effectLst/>
-                <a:ea typeface="PMingLiU" panose="02020500000000000000" pitchFamily="18" charset="-120"/>
+                <a:latin typeface="Microsoft JhengHei UI" panose="020B0604030504040204" pitchFamily="34" charset="-120"/>
+                <a:ea typeface="Microsoft JhengHei UI" panose="020B0604030504040204" pitchFamily="34" charset="-120"/>
                 <a:cs typeface="Times New Roman" panose="02020603050405020304" pitchFamily="18" charset="0"/>
               </a:rPr>
               <a:t>Cluster </a:t>
             </a:r>
             <a:r>
-              <a:rPr lang="en-US" altLang="zh-TW" sz="1800" dirty="0">
+              <a:rPr lang="en-US" altLang="zh-TW" sz="1400" dirty="0">
                 <a:effectLst/>
-                <a:ea typeface="PMingLiU" panose="02020500000000000000" pitchFamily="18" charset="-120"/>
+                <a:latin typeface="Microsoft JhengHei UI" panose="020B0604030504040204" pitchFamily="34" charset="-120"/>
+                <a:ea typeface="Microsoft JhengHei UI" panose="020B0604030504040204" pitchFamily="34" charset="-120"/>
                 <a:cs typeface="Times New Roman" panose="02020603050405020304" pitchFamily="18" charset="0"/>
               </a:rPr>
               <a:t>0</a:t>
             </a:r>
-            <a:endParaRPr lang="en-US" sz="1800" dirty="0">
+            <a:endParaRPr lang="en-US" sz="1400" dirty="0">
               <a:effectLst/>
-              <a:ea typeface="PMingLiU" panose="02020500000000000000" pitchFamily="18" charset="-120"/>
+              <a:latin typeface="Microsoft JhengHei UI" panose="020B0604030504040204" pitchFamily="34" charset="-120"/>
+              <a:ea typeface="Microsoft JhengHei UI" panose="020B0604030504040204" pitchFamily="34" charset="-120"/>
               <a:cs typeface="Times New Roman" panose="02020603050405020304" pitchFamily="18" charset="0"/>
             </a:endParaRPr>
           </a:p>
@@ -4072,29 +4112,37 @@
               </a:spcAft>
             </a:pPr>
             <a:r>
-              <a:rPr lang="zh-TW" sz="1800" dirty="0">
+              <a:rPr lang="zh-TW" sz="1400" dirty="0">
                 <a:effectLst/>
+                <a:latin typeface="Microsoft JhengHei UI" panose="020B0604030504040204" pitchFamily="34" charset="-120"/>
+                <a:ea typeface="Microsoft JhengHei UI" panose="020B0604030504040204" pitchFamily="34" charset="-120"/>
                 <a:cs typeface="Times New Roman" panose="02020603050405020304" pitchFamily="18" charset="0"/>
               </a:rPr>
               <a:t>平均房價</a:t>
             </a:r>
             <a:r>
-              <a:rPr lang="en-US" sz="1800" dirty="0">
+              <a:rPr lang="en-US" sz="1400" dirty="0">
                 <a:effectLst/>
+                <a:latin typeface="Microsoft JhengHei UI" panose="020B0604030504040204" pitchFamily="34" charset="-120"/>
+                <a:ea typeface="Microsoft JhengHei UI" panose="020B0604030504040204" pitchFamily="34" charset="-120"/>
                 <a:cs typeface="Times New Roman" panose="02020603050405020304" pitchFamily="18" charset="0"/>
               </a:rPr>
               <a:t> (ADR)</a:t>
             </a:r>
             <a:r>
-              <a:rPr lang="zh-TW" sz="1800" dirty="0">
+              <a:rPr lang="zh-TW" sz="1400" dirty="0">
                 <a:effectLst/>
+                <a:latin typeface="Microsoft JhengHei UI" panose="020B0604030504040204" pitchFamily="34" charset="-120"/>
+                <a:ea typeface="Microsoft JhengHei UI" panose="020B0604030504040204" pitchFamily="34" charset="-120"/>
                 <a:cs typeface="Times New Roman" panose="02020603050405020304" pitchFamily="18" charset="0"/>
               </a:rPr>
               <a:t>：</a:t>
             </a:r>
             <a:r>
-              <a:rPr lang="en-US" sz="1800" dirty="0">
+              <a:rPr lang="en-US" sz="1400" dirty="0">
                 <a:effectLst/>
+                <a:latin typeface="Microsoft JhengHei UI" panose="020B0604030504040204" pitchFamily="34" charset="-120"/>
+                <a:ea typeface="Microsoft JhengHei UI" panose="020B0604030504040204" pitchFamily="34" charset="-120"/>
                 <a:cs typeface="Times New Roman" panose="02020603050405020304" pitchFamily="18" charset="0"/>
               </a:rPr>
               <a:t> $92.6</a:t>
@@ -4110,28 +4158,36 @@
               </a:spcAft>
             </a:pPr>
             <a:r>
-              <a:rPr lang="zh-TW" sz="1800" dirty="0">
+              <a:rPr lang="zh-TW" sz="1400" dirty="0">
                 <a:effectLst/>
+                <a:latin typeface="Microsoft JhengHei UI" panose="020B0604030504040204" pitchFamily="34" charset="-120"/>
+                <a:ea typeface="Microsoft JhengHei UI" panose="020B0604030504040204" pitchFamily="34" charset="-120"/>
                 <a:cs typeface="Times New Roman" panose="02020603050405020304" pitchFamily="18" charset="0"/>
               </a:rPr>
               <a:t>平均入住夜數：</a:t>
             </a:r>
             <a:r>
-              <a:rPr lang="en-US" sz="1800" dirty="0">
+              <a:rPr lang="en-US" sz="1400" dirty="0">
                 <a:effectLst/>
+                <a:latin typeface="Microsoft JhengHei UI" panose="020B0604030504040204" pitchFamily="34" charset="-120"/>
+                <a:ea typeface="Microsoft JhengHei UI" panose="020B0604030504040204" pitchFamily="34" charset="-120"/>
                 <a:cs typeface="Times New Roman" panose="02020603050405020304" pitchFamily="18" charset="0"/>
               </a:rPr>
               <a:t> 3 </a:t>
             </a:r>
             <a:r>
-              <a:rPr lang="zh-TW" sz="1800" dirty="0">
+              <a:rPr lang="zh-TW" sz="1400" dirty="0">
                 <a:effectLst/>
+                <a:latin typeface="Microsoft JhengHei UI" panose="020B0604030504040204" pitchFamily="34" charset="-120"/>
+                <a:ea typeface="Microsoft JhengHei UI" panose="020B0604030504040204" pitchFamily="34" charset="-120"/>
                 <a:cs typeface="Times New Roman" panose="02020603050405020304" pitchFamily="18" charset="0"/>
               </a:rPr>
               <a:t>晚</a:t>
             </a:r>
-            <a:endParaRPr lang="en-US" sz="1800" dirty="0">
+            <a:endParaRPr lang="en-US" sz="1400" dirty="0">
               <a:effectLst/>
+              <a:latin typeface="Microsoft JhengHei UI" panose="020B0604030504040204" pitchFamily="34" charset="-120"/>
+              <a:ea typeface="Microsoft JhengHei UI" panose="020B0604030504040204" pitchFamily="34" charset="-120"/>
               <a:cs typeface="Times New Roman" panose="02020603050405020304" pitchFamily="18" charset="0"/>
             </a:endParaRPr>
           </a:p>
@@ -4145,42 +4201,54 @@
               </a:spcAft>
             </a:pPr>
             <a:r>
-              <a:rPr lang="zh-TW" sz="1800" dirty="0">
+              <a:rPr lang="zh-TW" sz="1400" dirty="0">
                 <a:effectLst/>
+                <a:latin typeface="Microsoft JhengHei UI" panose="020B0604030504040204" pitchFamily="34" charset="-120"/>
+                <a:ea typeface="Microsoft JhengHei UI" panose="020B0604030504040204" pitchFamily="34" charset="-120"/>
                 <a:cs typeface="Times New Roman" panose="02020603050405020304" pitchFamily="18" charset="0"/>
               </a:rPr>
               <a:t>主要旅客：</a:t>
             </a:r>
             <a:r>
-              <a:rPr lang="en-US" sz="1800" dirty="0">
+              <a:rPr lang="en-US" sz="1400" dirty="0">
                 <a:effectLst/>
+                <a:latin typeface="Microsoft JhengHei UI" panose="020B0604030504040204" pitchFamily="34" charset="-120"/>
+                <a:ea typeface="Microsoft JhengHei UI" panose="020B0604030504040204" pitchFamily="34" charset="-120"/>
                 <a:cs typeface="Times New Roman" panose="02020603050405020304" pitchFamily="18" charset="0"/>
               </a:rPr>
               <a:t> 1</a:t>
             </a:r>
             <a:r>
-              <a:rPr lang="zh-TW" sz="1800" dirty="0">
+              <a:rPr lang="zh-TW" sz="1400" dirty="0">
                 <a:effectLst/>
+                <a:latin typeface="Microsoft JhengHei UI" panose="020B0604030504040204" pitchFamily="34" charset="-120"/>
+                <a:ea typeface="Microsoft JhengHei UI" panose="020B0604030504040204" pitchFamily="34" charset="-120"/>
                 <a:cs typeface="Times New Roman" panose="02020603050405020304" pitchFamily="18" charset="0"/>
               </a:rPr>
               <a:t>–</a:t>
             </a:r>
             <a:r>
-              <a:rPr lang="en-US" sz="1800" dirty="0">
+              <a:rPr lang="en-US" sz="1400" dirty="0">
                 <a:effectLst/>
+                <a:latin typeface="Microsoft JhengHei UI" panose="020B0604030504040204" pitchFamily="34" charset="-120"/>
+                <a:ea typeface="Microsoft JhengHei UI" panose="020B0604030504040204" pitchFamily="34" charset="-120"/>
                 <a:cs typeface="Times New Roman" panose="02020603050405020304" pitchFamily="18" charset="0"/>
               </a:rPr>
               <a:t>2 </a:t>
             </a:r>
             <a:r>
-              <a:rPr lang="zh-TW" sz="1800" dirty="0">
+              <a:rPr lang="zh-TW" sz="1400" dirty="0">
                 <a:effectLst/>
+                <a:latin typeface="Microsoft JhengHei UI" panose="020B0604030504040204" pitchFamily="34" charset="-120"/>
+                <a:ea typeface="Microsoft JhengHei UI" panose="020B0604030504040204" pitchFamily="34" charset="-120"/>
                 <a:cs typeface="Times New Roman" panose="02020603050405020304" pitchFamily="18" charset="0"/>
               </a:rPr>
               <a:t>位成人，幾乎沒有小孩</a:t>
             </a:r>
-            <a:endParaRPr lang="en-US" sz="1800" dirty="0">
+            <a:endParaRPr lang="en-US" sz="1400" dirty="0">
               <a:effectLst/>
+              <a:latin typeface="Microsoft JhengHei UI" panose="020B0604030504040204" pitchFamily="34" charset="-120"/>
+              <a:ea typeface="Microsoft JhengHei UI" panose="020B0604030504040204" pitchFamily="34" charset="-120"/>
               <a:cs typeface="Times New Roman" panose="02020603050405020304" pitchFamily="18" charset="0"/>
             </a:endParaRPr>
           </a:p>
@@ -4194,13 +4262,17 @@
               </a:spcAft>
             </a:pPr>
             <a:r>
-              <a:rPr lang="zh-TW" sz="1800" dirty="0">
+              <a:rPr lang="zh-TW" sz="1400" dirty="0">
                 <a:effectLst/>
+                <a:latin typeface="Microsoft JhengHei UI" panose="020B0604030504040204" pitchFamily="34" charset="-120"/>
+                <a:ea typeface="Microsoft JhengHei UI" panose="020B0604030504040204" pitchFamily="34" charset="-120"/>
                 <a:cs typeface="Times New Roman" panose="02020603050405020304" pitchFamily="18" charset="0"/>
               </a:rPr>
               <a:t>家庭比例： 幾乎不是家庭</a:t>
             </a:r>
-            <a:endParaRPr lang="en-US" altLang="zh-TW" sz="1800" dirty="0">
+            <a:endParaRPr lang="en-US" altLang="zh-TW" sz="1400" dirty="0">
+              <a:latin typeface="Microsoft JhengHei UI" panose="020B0604030504040204" pitchFamily="34" charset="-120"/>
+              <a:ea typeface="Microsoft JhengHei UI" panose="020B0604030504040204" pitchFamily="34" charset="-120"/>
               <a:cs typeface="Times New Roman" panose="02020603050405020304" pitchFamily="18" charset="0"/>
             </a:endParaRPr>
           </a:p>
@@ -4214,15 +4286,19 @@
               </a:spcAft>
             </a:pPr>
             <a:r>
-              <a:rPr lang="zh-TW" sz="1800" dirty="0">
+              <a:rPr lang="zh-TW" sz="1400" dirty="0">
                 <a:effectLst/>
+                <a:latin typeface="Microsoft JhengHei UI" panose="020B0604030504040204" pitchFamily="34" charset="-120"/>
+                <a:ea typeface="Microsoft JhengHei UI" panose="020B0604030504040204" pitchFamily="34" charset="-120"/>
                 <a:cs typeface="Times New Roman" panose="02020603050405020304" pitchFamily="18" charset="0"/>
               </a:rPr>
               <a:t>週末入住： 幾乎都是週末</a:t>
             </a:r>
             <a:r>
-              <a:rPr lang="en-US" sz="1800" dirty="0">
+              <a:rPr lang="en-US" sz="1400" dirty="0">
                 <a:effectLst/>
+                <a:latin typeface="Microsoft JhengHei UI" panose="020B0604030504040204" pitchFamily="34" charset="-120"/>
+                <a:ea typeface="Microsoft JhengHei UI" panose="020B0604030504040204" pitchFamily="34" charset="-120"/>
                 <a:cs typeface="Times New Roman" panose="02020603050405020304" pitchFamily="18" charset="0"/>
               </a:rPr>
               <a:t> (100%)</a:t>
@@ -4238,15 +4314,19 @@
               </a:spcAft>
             </a:pPr>
             <a:r>
-              <a:rPr lang="zh-TW" sz="1800" dirty="0">
+              <a:rPr lang="zh-TW" sz="1400" dirty="0">
                 <a:effectLst/>
+                <a:latin typeface="Microsoft JhengHei UI" panose="020B0604030504040204" pitchFamily="34" charset="-120"/>
+                <a:ea typeface="Microsoft JhengHei UI" panose="020B0604030504040204" pitchFamily="34" charset="-120"/>
                 <a:cs typeface="Times New Roman" panose="02020603050405020304" pitchFamily="18" charset="0"/>
               </a:rPr>
               <a:t>特殊需求： 少</a:t>
             </a:r>
             <a:r>
-              <a:rPr lang="en-US" sz="1800" dirty="0">
+              <a:rPr lang="en-US" sz="1400" dirty="0">
                 <a:effectLst/>
+                <a:latin typeface="Microsoft JhengHei UI" panose="020B0604030504040204" pitchFamily="34" charset="-120"/>
+                <a:ea typeface="Microsoft JhengHei UI" panose="020B0604030504040204" pitchFamily="34" charset="-120"/>
                 <a:cs typeface="Times New Roman" panose="02020603050405020304" pitchFamily="18" charset="0"/>
               </a:rPr>
               <a:t> (0.42)</a:t>
@@ -4262,19 +4342,44 @@
               </a:spcAft>
             </a:pPr>
             <a:r>
-              <a:rPr lang="zh-TW" sz="1800" dirty="0">
+              <a:rPr lang="zh-TW" sz="1400" dirty="0">
                 <a:effectLst/>
+                <a:latin typeface="Microsoft JhengHei UI" panose="020B0604030504040204" pitchFamily="34" charset="-120"/>
+                <a:ea typeface="Microsoft JhengHei UI" panose="020B0604030504040204" pitchFamily="34" charset="-120"/>
                 <a:cs typeface="Times New Roman" panose="02020603050405020304" pitchFamily="18" charset="0"/>
               </a:rPr>
               <a:t>平均營收：</a:t>
             </a:r>
             <a:r>
-              <a:rPr lang="en-US" sz="1800" dirty="0">
+              <a:rPr lang="en-US" sz="1400" dirty="0">
                 <a:effectLst/>
+                <a:latin typeface="Microsoft JhengHei UI" panose="020B0604030504040204" pitchFamily="34" charset="-120"/>
+                <a:ea typeface="Microsoft JhengHei UI" panose="020B0604030504040204" pitchFamily="34" charset="-120"/>
                 <a:cs typeface="Times New Roman" panose="02020603050405020304" pitchFamily="18" charset="0"/>
               </a:rPr>
               <a:t> $270 </a:t>
             </a:r>
+          </a:p>
+          <a:p>
+            <a:pPr marL="0">
+              <a:spcBef>
+                <a:spcPts val="0"/>
+              </a:spcBef>
+            </a:pPr>
+            <a:r>
+              <a:rPr lang="zh-TW" altLang="en-US" sz="1400" dirty="0">
+                <a:latin typeface="Microsoft JhengHei UI" panose="020B0604030504040204" pitchFamily="34" charset="-120"/>
+                <a:ea typeface="Microsoft JhengHei UI" panose="020B0604030504040204" pitchFamily="34" charset="-120"/>
+                <a:cs typeface="Times New Roman" panose="02020603050405020304" pitchFamily="18" charset="0"/>
+              </a:rPr>
+              <a:t>通常是情侶或單人，訂房很早，週末度假，需求簡單。</a:t>
+            </a:r>
+            <a:endParaRPr lang="en-US" sz="1400" dirty="0">
+              <a:effectLst/>
+              <a:latin typeface="Microsoft JhengHei UI" panose="020B0604030504040204" pitchFamily="34" charset="-120"/>
+              <a:ea typeface="Microsoft JhengHei UI" panose="020B0604030504040204" pitchFamily="34" charset="-120"/>
+              <a:cs typeface="Times New Roman" panose="02020603050405020304" pitchFamily="18" charset="0"/>
+            </a:endParaRPr>
           </a:p>
           <a:p>
             <a:pPr marL="0" marR="0" indent="0">
@@ -4286,8 +4391,10 @@
               </a:spcAft>
               <a:buNone/>
             </a:pPr>
-            <a:endParaRPr lang="en-US" altLang="zh-TW" sz="1800" dirty="0">
+            <a:endParaRPr lang="en-US" altLang="zh-TW" sz="1400" dirty="0">
               <a:effectLst/>
+              <a:latin typeface="Microsoft JhengHei UI" panose="020B0604030504040204" pitchFamily="34" charset="-120"/>
+              <a:ea typeface="Microsoft JhengHei UI" panose="020B0604030504040204" pitchFamily="34" charset="-120"/>
               <a:cs typeface="Times New Roman" panose="02020603050405020304" pitchFamily="18" charset="0"/>
             </a:endParaRPr>
           </a:p>
@@ -4302,53 +4409,38 @@
               <a:buNone/>
             </a:pPr>
             <a:r>
-              <a:rPr lang="zh-TW" sz="1800" dirty="0">
+              <a:rPr lang="zh-TW" sz="1400" b="1" dirty="0">
                 <a:effectLst/>
+                <a:latin typeface="Microsoft JhengHei UI" panose="020B0604030504040204" pitchFamily="34" charset="-120"/>
+                <a:ea typeface="Microsoft JhengHei UI" panose="020B0604030504040204" pitchFamily="34" charset="-120"/>
                 <a:cs typeface="Times New Roman" panose="02020603050405020304" pitchFamily="18" charset="0"/>
               </a:rPr>
               <a:t>解讀：</a:t>
             </a:r>
             <a:r>
-              <a:rPr lang="zh-TW" sz="1800" b="1" dirty="0">
+              <a:rPr lang="zh-TW" sz="1400" b="1" dirty="0">
                 <a:solidFill>
                   <a:srgbClr val="FF0000"/>
                 </a:solidFill>
                 <a:effectLst/>
+                <a:latin typeface="Microsoft JhengHei UI" panose="020B0604030504040204" pitchFamily="34" charset="-120"/>
+                <a:ea typeface="Microsoft JhengHei UI" panose="020B0604030504040204" pitchFamily="34" charset="-120"/>
                 <a:cs typeface="Times New Roman" panose="02020603050405020304" pitchFamily="18" charset="0"/>
               </a:rPr>
               <a:t>短期、週末休閒旅客</a:t>
             </a:r>
-            <a:endParaRPr lang="en-US" sz="1800" b="1" dirty="0">
-              <a:solidFill>
-                <a:srgbClr val="FF0000"/>
-              </a:solidFill>
+            <a:endParaRPr lang="en-US" sz="1400" b="1" dirty="0">
               <a:effectLst/>
+              <a:latin typeface="Microsoft JhengHei UI" panose="020B0604030504040204" pitchFamily="34" charset="-120"/>
+              <a:ea typeface="Microsoft JhengHei UI" panose="020B0604030504040204" pitchFamily="34" charset="-120"/>
               <a:cs typeface="Times New Roman" panose="02020603050405020304" pitchFamily="18" charset="0"/>
             </a:endParaRPr>
           </a:p>
           <a:p>
-            <a:pPr marL="0" marR="0">
-              <a:spcBef>
-                <a:spcPts val="0"/>
-              </a:spcBef>
-              <a:spcAft>
-                <a:spcPts val="0"/>
-              </a:spcAft>
-            </a:pPr>
-            <a:r>
-              <a:rPr lang="zh-TW" sz="1800" dirty="0">
-                <a:effectLst/>
-                <a:cs typeface="Times New Roman" panose="02020603050405020304" pitchFamily="18" charset="0"/>
-              </a:rPr>
-              <a:t>通常是情侶或單人，訂房很早，週末度假，需求簡單。</a:t>
-            </a:r>
-            <a:endParaRPr lang="en-US" sz="1800" dirty="0">
-              <a:effectLst/>
-              <a:cs typeface="Times New Roman" panose="02020603050405020304" pitchFamily="18" charset="0"/>
+            <a:endParaRPr lang="en-US" sz="1400" dirty="0">
+              <a:latin typeface="Microsoft JhengHei UI" panose="020B0604030504040204" pitchFamily="34" charset="-120"/>
+              <a:ea typeface="Microsoft JhengHei UI" panose="020B0604030504040204" pitchFamily="34" charset="-120"/>
             </a:endParaRPr>
-          </a:p>
-          <a:p>
-            <a:endParaRPr lang="en-US" dirty="0"/>
           </a:p>
         </p:txBody>
       </p:sp>
@@ -4368,8 +4460,8 @@
         </p:nvSpPr>
         <p:spPr>
           <a:xfrm>
-            <a:off x="7031967" y="367162"/>
-            <a:ext cx="4107611" cy="3355975"/>
+            <a:off x="7031966" y="1552166"/>
+            <a:ext cx="4789060" cy="2472397"/>
           </a:xfrm>
           <a:prstGeom prst="rect">
             <a:avLst/>
@@ -4554,9 +4646,10 @@
               <a:buNone/>
             </a:pPr>
             <a:r>
-              <a:rPr lang="en-US" sz="1800" dirty="0">
+              <a:rPr lang="en-US" sz="1400" dirty="0">
                 <a:effectLst/>
-                <a:ea typeface="PMingLiU" panose="02020500000000000000" pitchFamily="18" charset="-120"/>
+                <a:latin typeface="Microsoft JhengHei UI" panose="020B0604030504040204" pitchFamily="34" charset="-120"/>
+                <a:ea typeface="Microsoft JhengHei UI" panose="020B0604030504040204" pitchFamily="34" charset="-120"/>
                 <a:cs typeface="Times New Roman" panose="02020603050405020304" pitchFamily="18" charset="0"/>
               </a:rPr>
               <a:t>Cluster 1</a:t>
@@ -4572,25 +4665,28 @@
               </a:spcAft>
             </a:pPr>
             <a:r>
-              <a:rPr lang="en-US" sz="1800" dirty="0">
+              <a:rPr lang="en-US" sz="1400" dirty="0">
                 <a:effectLst/>
-                <a:ea typeface="PMingLiU" panose="02020500000000000000" pitchFamily="18" charset="-120"/>
+                <a:latin typeface="Microsoft JhengHei UI" panose="020B0604030504040204" pitchFamily="34" charset="-120"/>
+                <a:ea typeface="Microsoft JhengHei UI" panose="020B0604030504040204" pitchFamily="34" charset="-120"/>
                 <a:cs typeface="Times New Roman" panose="02020603050405020304" pitchFamily="18" charset="0"/>
               </a:rPr>
               <a:t>ADR</a:t>
             </a:r>
             <a:r>
-              <a:rPr lang="zh-TW" sz="1800" dirty="0">
+              <a:rPr lang="zh-TW" sz="1400" dirty="0">
                 <a:effectLst/>
-                <a:ea typeface="PMingLiU" panose="02020500000000000000" pitchFamily="18" charset="-120"/>
+                <a:latin typeface="Microsoft JhengHei UI" panose="020B0604030504040204" pitchFamily="34" charset="-120"/>
+                <a:ea typeface="Microsoft JhengHei UI" panose="020B0604030504040204" pitchFamily="34" charset="-120"/>
                 <a:cs typeface="Times New Roman" panose="02020603050405020304" pitchFamily="18" charset="0"/>
               </a:rPr>
               <a:t>：</a:t>
             </a:r>
             <a:r>
-              <a:rPr lang="en-US" sz="1800" dirty="0">
+              <a:rPr lang="en-US" sz="1400" dirty="0">
                 <a:effectLst/>
-                <a:ea typeface="PMingLiU" panose="02020500000000000000" pitchFamily="18" charset="-120"/>
+                <a:latin typeface="Microsoft JhengHei UI" panose="020B0604030504040204" pitchFamily="34" charset="-120"/>
+                <a:ea typeface="Microsoft JhengHei UI" panose="020B0604030504040204" pitchFamily="34" charset="-120"/>
                 <a:cs typeface="Times New Roman" panose="02020603050405020304" pitchFamily="18" charset="0"/>
               </a:rPr>
               <a:t> $135.3</a:t>
@@ -4606,32 +4702,36 @@
               </a:spcAft>
             </a:pPr>
             <a:r>
-              <a:rPr lang="zh-TW" sz="1800" dirty="0">
+              <a:rPr lang="zh-TW" sz="1400" dirty="0">
                 <a:effectLst/>
-                <a:ea typeface="PMingLiU" panose="02020500000000000000" pitchFamily="18" charset="-120"/>
+                <a:latin typeface="Microsoft JhengHei UI" panose="020B0604030504040204" pitchFamily="34" charset="-120"/>
+                <a:ea typeface="Microsoft JhengHei UI" panose="020B0604030504040204" pitchFamily="34" charset="-120"/>
                 <a:cs typeface="Times New Roman" panose="02020603050405020304" pitchFamily="18" charset="0"/>
               </a:rPr>
               <a:t>平均入住夜數：</a:t>
             </a:r>
             <a:r>
-              <a:rPr lang="en-US" sz="1800" dirty="0">
+              <a:rPr lang="en-US" sz="1400" dirty="0">
                 <a:effectLst/>
-                <a:ea typeface="PMingLiU" panose="02020500000000000000" pitchFamily="18" charset="-120"/>
+                <a:latin typeface="Microsoft JhengHei UI" panose="020B0604030504040204" pitchFamily="34" charset="-120"/>
+                <a:ea typeface="Microsoft JhengHei UI" panose="020B0604030504040204" pitchFamily="34" charset="-120"/>
                 <a:cs typeface="Times New Roman" panose="02020603050405020304" pitchFamily="18" charset="0"/>
               </a:rPr>
               <a:t> 5 </a:t>
             </a:r>
             <a:r>
-              <a:rPr lang="zh-TW" sz="1800" dirty="0">
+              <a:rPr lang="zh-TW" sz="1400" dirty="0">
                 <a:effectLst/>
-                <a:ea typeface="PMingLiU" panose="02020500000000000000" pitchFamily="18" charset="-120"/>
+                <a:latin typeface="Microsoft JhengHei UI" panose="020B0604030504040204" pitchFamily="34" charset="-120"/>
+                <a:ea typeface="Microsoft JhengHei UI" panose="020B0604030504040204" pitchFamily="34" charset="-120"/>
                 <a:cs typeface="Times New Roman" panose="02020603050405020304" pitchFamily="18" charset="0"/>
               </a:rPr>
               <a:t>晚</a:t>
             </a:r>
-            <a:endParaRPr lang="en-US" sz="1800" dirty="0">
+            <a:endParaRPr lang="en-US" sz="1400" dirty="0">
               <a:effectLst/>
-              <a:ea typeface="PMingLiU" panose="02020500000000000000" pitchFamily="18" charset="-120"/>
+              <a:latin typeface="Microsoft JhengHei UI" panose="020B0604030504040204" pitchFamily="34" charset="-120"/>
+              <a:ea typeface="Microsoft JhengHei UI" panose="020B0604030504040204" pitchFamily="34" charset="-120"/>
               <a:cs typeface="Times New Roman" panose="02020603050405020304" pitchFamily="18" charset="0"/>
             </a:endParaRPr>
           </a:p>
@@ -4645,32 +4745,36 @@
               </a:spcAft>
             </a:pPr>
             <a:r>
-              <a:rPr lang="zh-TW" sz="1800" dirty="0">
+              <a:rPr lang="zh-TW" sz="1400" dirty="0">
                 <a:effectLst/>
-                <a:ea typeface="PMingLiU" panose="02020500000000000000" pitchFamily="18" charset="-120"/>
+                <a:latin typeface="Microsoft JhengHei UI" panose="020B0604030504040204" pitchFamily="34" charset="-120"/>
+                <a:ea typeface="Microsoft JhengHei UI" panose="020B0604030504040204" pitchFamily="34" charset="-120"/>
                 <a:cs typeface="Times New Roman" panose="02020603050405020304" pitchFamily="18" charset="0"/>
               </a:rPr>
               <a:t>主要旅客：</a:t>
             </a:r>
             <a:r>
-              <a:rPr lang="en-US" sz="1800" dirty="0">
+              <a:rPr lang="en-US" sz="1400" dirty="0">
                 <a:effectLst/>
-                <a:ea typeface="PMingLiU" panose="02020500000000000000" pitchFamily="18" charset="-120"/>
+                <a:latin typeface="Microsoft JhengHei UI" panose="020B0604030504040204" pitchFamily="34" charset="-120"/>
+                <a:ea typeface="Microsoft JhengHei UI" panose="020B0604030504040204" pitchFamily="34" charset="-120"/>
                 <a:cs typeface="Times New Roman" panose="02020603050405020304" pitchFamily="18" charset="0"/>
               </a:rPr>
               <a:t> 2 </a:t>
             </a:r>
             <a:r>
-              <a:rPr lang="zh-TW" sz="1800" dirty="0">
+              <a:rPr lang="zh-TW" sz="1400" dirty="0">
                 <a:effectLst/>
-                <a:ea typeface="PMingLiU" panose="02020500000000000000" pitchFamily="18" charset="-120"/>
+                <a:latin typeface="Microsoft JhengHei UI" panose="020B0604030504040204" pitchFamily="34" charset="-120"/>
+                <a:ea typeface="Microsoft JhengHei UI" panose="020B0604030504040204" pitchFamily="34" charset="-120"/>
                 <a:cs typeface="Times New Roman" panose="02020603050405020304" pitchFamily="18" charset="0"/>
               </a:rPr>
               <a:t>位成人，無小孩</a:t>
             </a:r>
-            <a:endParaRPr lang="en-US" sz="1800" dirty="0">
+            <a:endParaRPr lang="en-US" sz="1400" dirty="0">
               <a:effectLst/>
-              <a:ea typeface="PMingLiU" panose="02020500000000000000" pitchFamily="18" charset="-120"/>
+              <a:latin typeface="Microsoft JhengHei UI" panose="020B0604030504040204" pitchFamily="34" charset="-120"/>
+              <a:ea typeface="Microsoft JhengHei UI" panose="020B0604030504040204" pitchFamily="34" charset="-120"/>
               <a:cs typeface="Times New Roman" panose="02020603050405020304" pitchFamily="18" charset="0"/>
             </a:endParaRPr>
           </a:p>
@@ -4684,16 +4788,18 @@
               </a:spcAft>
             </a:pPr>
             <a:r>
-              <a:rPr lang="zh-TW" sz="1800" dirty="0">
+              <a:rPr lang="zh-TW" sz="1400" dirty="0">
                 <a:effectLst/>
-                <a:ea typeface="PMingLiU" panose="02020500000000000000" pitchFamily="18" charset="-120"/>
+                <a:latin typeface="Microsoft JhengHei UI" panose="020B0604030504040204" pitchFamily="34" charset="-120"/>
+                <a:ea typeface="Microsoft JhengHei UI" panose="020B0604030504040204" pitchFamily="34" charset="-120"/>
                 <a:cs typeface="Times New Roman" panose="02020603050405020304" pitchFamily="18" charset="0"/>
               </a:rPr>
               <a:t>家庭比例： 幾乎不是家庭</a:t>
             </a:r>
-            <a:endParaRPr lang="en-US" sz="1800" dirty="0">
+            <a:endParaRPr lang="en-US" sz="1400" dirty="0">
               <a:effectLst/>
-              <a:ea typeface="PMingLiU" panose="02020500000000000000" pitchFamily="18" charset="-120"/>
+              <a:latin typeface="Microsoft JhengHei UI" panose="020B0604030504040204" pitchFamily="34" charset="-120"/>
+              <a:ea typeface="Microsoft JhengHei UI" panose="020B0604030504040204" pitchFamily="34" charset="-120"/>
               <a:cs typeface="Times New Roman" panose="02020603050405020304" pitchFamily="18" charset="0"/>
             </a:endParaRPr>
           </a:p>
@@ -4707,17 +4813,19 @@
               </a:spcAft>
             </a:pPr>
             <a:r>
-              <a:rPr lang="zh-TW" sz="1800" dirty="0">
+              <a:rPr lang="zh-TW" sz="1400" dirty="0">
                 <a:effectLst/>
-                <a:ea typeface="PMingLiU" panose="02020500000000000000" pitchFamily="18" charset="-120"/>
+                <a:latin typeface="Microsoft JhengHei UI" panose="020B0604030504040204" pitchFamily="34" charset="-120"/>
+                <a:ea typeface="Microsoft JhengHei UI" panose="020B0604030504040204" pitchFamily="34" charset="-120"/>
                 <a:cs typeface="Times New Roman" panose="02020603050405020304" pitchFamily="18" charset="0"/>
               </a:rPr>
               <a:t>週末入住： 偏高</a:t>
             </a:r>
             <a:r>
-              <a:rPr lang="en-US" sz="1800" dirty="0">
+              <a:rPr lang="en-US" sz="1400" dirty="0">
                 <a:effectLst/>
-                <a:ea typeface="PMingLiU" panose="02020500000000000000" pitchFamily="18" charset="-120"/>
+                <a:latin typeface="Microsoft JhengHei UI" panose="020B0604030504040204" pitchFamily="34" charset="-120"/>
+                <a:ea typeface="Microsoft JhengHei UI" panose="020B0604030504040204" pitchFamily="34" charset="-120"/>
                 <a:cs typeface="Times New Roman" panose="02020603050405020304" pitchFamily="18" charset="0"/>
               </a:rPr>
               <a:t> (86%)</a:t>
@@ -4733,17 +4841,19 @@
               </a:spcAft>
             </a:pPr>
             <a:r>
-              <a:rPr lang="zh-TW" sz="1800" dirty="0">
+              <a:rPr lang="zh-TW" sz="1400" dirty="0">
                 <a:effectLst/>
-                <a:ea typeface="PMingLiU" panose="02020500000000000000" pitchFamily="18" charset="-120"/>
+                <a:latin typeface="Microsoft JhengHei UI" panose="020B0604030504040204" pitchFamily="34" charset="-120"/>
+                <a:ea typeface="Microsoft JhengHei UI" panose="020B0604030504040204" pitchFamily="34" charset="-120"/>
                 <a:cs typeface="Times New Roman" panose="02020603050405020304" pitchFamily="18" charset="0"/>
               </a:rPr>
               <a:t>特殊需求： 中高</a:t>
             </a:r>
             <a:r>
-              <a:rPr lang="en-US" sz="1800" dirty="0">
+              <a:rPr lang="en-US" sz="1400" dirty="0">
                 <a:effectLst/>
-                <a:ea typeface="PMingLiU" panose="02020500000000000000" pitchFamily="18" charset="-120"/>
+                <a:latin typeface="Microsoft JhengHei UI" panose="020B0604030504040204" pitchFamily="34" charset="-120"/>
+                <a:ea typeface="Microsoft JhengHei UI" panose="020B0604030504040204" pitchFamily="34" charset="-120"/>
                 <a:cs typeface="Times New Roman" panose="02020603050405020304" pitchFamily="18" charset="0"/>
               </a:rPr>
               <a:t> (1.14)</a:t>
@@ -4759,21 +4869,43 @@
               </a:spcAft>
             </a:pPr>
             <a:r>
-              <a:rPr lang="zh-TW" sz="1800" dirty="0">
+              <a:rPr lang="zh-TW" sz="1400" dirty="0">
                 <a:effectLst/>
-                <a:ea typeface="PMingLiU" panose="02020500000000000000" pitchFamily="18" charset="-120"/>
+                <a:latin typeface="Microsoft JhengHei UI" panose="020B0604030504040204" pitchFamily="34" charset="-120"/>
+                <a:ea typeface="Microsoft JhengHei UI" panose="020B0604030504040204" pitchFamily="34" charset="-120"/>
                 <a:cs typeface="Times New Roman" panose="02020603050405020304" pitchFamily="18" charset="0"/>
               </a:rPr>
               <a:t>平均營收：</a:t>
             </a:r>
             <a:r>
-              <a:rPr lang="en-US" sz="1800" dirty="0">
+              <a:rPr lang="en-US" sz="1400" dirty="0">
                 <a:effectLst/>
-                <a:ea typeface="PMingLiU" panose="02020500000000000000" pitchFamily="18" charset="-120"/>
+                <a:latin typeface="Microsoft JhengHei UI" panose="020B0604030504040204" pitchFamily="34" charset="-120"/>
+                <a:ea typeface="Microsoft JhengHei UI" panose="020B0604030504040204" pitchFamily="34" charset="-120"/>
                 <a:cs typeface="Times New Roman" panose="02020603050405020304" pitchFamily="18" charset="0"/>
               </a:rPr>
               <a:t> $643</a:t>
             </a:r>
+          </a:p>
+          <a:p>
+            <a:pPr marL="0">
+              <a:spcBef>
+                <a:spcPts val="0"/>
+              </a:spcBef>
+            </a:pPr>
+            <a:r>
+              <a:rPr lang="zh-TW" altLang="en-US" sz="1400" dirty="0">
+                <a:latin typeface="Microsoft JhengHei UI" panose="020B0604030504040204" pitchFamily="34" charset="-120"/>
+                <a:ea typeface="Microsoft JhengHei UI" panose="020B0604030504040204" pitchFamily="34" charset="-120"/>
+                <a:cs typeface="Times New Roman" panose="02020603050405020304" pitchFamily="18" charset="0"/>
+              </a:rPr>
+              <a:t>多是雙人長住，對設施或服務有要求，屬於「高消費長住型」。</a:t>
+            </a:r>
+            <a:endParaRPr lang="en-US" sz="1400" dirty="0">
+              <a:latin typeface="Microsoft JhengHei UI" panose="020B0604030504040204" pitchFamily="34" charset="-120"/>
+              <a:ea typeface="Microsoft JhengHei UI" panose="020B0604030504040204" pitchFamily="34" charset="-120"/>
+              <a:cs typeface="Times New Roman" panose="02020603050405020304" pitchFamily="18" charset="0"/>
+            </a:endParaRPr>
           </a:p>
           <a:p>
             <a:pPr marL="0" marR="0" indent="0">
@@ -4785,9 +4917,9 @@
               </a:spcAft>
               <a:buNone/>
             </a:pPr>
-            <a:endParaRPr lang="en-US" altLang="zh-TW" sz="1800" dirty="0">
-              <a:effectLst/>
-              <a:ea typeface="PMingLiU" panose="02020500000000000000" pitchFamily="18" charset="-120"/>
+            <a:endParaRPr lang="en-US" altLang="zh-TW" sz="1400" dirty="0">
+              <a:latin typeface="Microsoft JhengHei UI" panose="020B0604030504040204" pitchFamily="34" charset="-120"/>
+              <a:ea typeface="Microsoft JhengHei UI" panose="020B0604030504040204" pitchFamily="34" charset="-120"/>
               <a:cs typeface="Times New Roman" panose="02020603050405020304" pitchFamily="18" charset="0"/>
             </a:endParaRPr>
           </a:p>
@@ -4802,58 +4934,50 @@
               <a:buNone/>
             </a:pPr>
             <a:r>
-              <a:rPr lang="zh-TW" sz="1800" dirty="0">
+              <a:rPr lang="zh-TW" sz="1400" b="1" dirty="0">
                 <a:effectLst/>
-                <a:ea typeface="PMingLiU" panose="02020500000000000000" pitchFamily="18" charset="-120"/>
+                <a:latin typeface="Microsoft JhengHei UI" panose="020B0604030504040204" pitchFamily="34" charset="-120"/>
+                <a:ea typeface="Microsoft JhengHei UI" panose="020B0604030504040204" pitchFamily="34" charset="-120"/>
                 <a:cs typeface="Times New Roman" panose="02020603050405020304" pitchFamily="18" charset="0"/>
               </a:rPr>
-              <a:t>解讀：</a:t>
-            </a:r>
-            <a:r>
-              <a:rPr lang="zh-TW" sz="1800" b="1" dirty="0">
+              <a:t>解讀</a:t>
+            </a:r>
+            <a:r>
+              <a:rPr lang="zh-TW" sz="1400" dirty="0">
+                <a:effectLst/>
+                <a:latin typeface="Microsoft JhengHei UI" panose="020B0604030504040204" pitchFamily="34" charset="-120"/>
+                <a:ea typeface="Microsoft JhengHei UI" panose="020B0604030504040204" pitchFamily="34" charset="-120"/>
+                <a:cs typeface="Times New Roman" panose="02020603050405020304" pitchFamily="18" charset="0"/>
+              </a:rPr>
+              <a:t>：</a:t>
+            </a:r>
+            <a:r>
+              <a:rPr lang="zh-TW" sz="1400" b="1" dirty="0">
                 <a:solidFill>
                   <a:srgbClr val="FF0000"/>
                 </a:solidFill>
                 <a:effectLst/>
-                <a:ea typeface="PMingLiU" panose="02020500000000000000" pitchFamily="18" charset="-120"/>
+                <a:latin typeface="Microsoft JhengHei UI" panose="020B0604030504040204" pitchFamily="34" charset="-120"/>
+                <a:ea typeface="Microsoft JhengHei UI" panose="020B0604030504040204" pitchFamily="34" charset="-120"/>
                 <a:cs typeface="Times New Roman" panose="02020603050405020304" pitchFamily="18" charset="0"/>
               </a:rPr>
               <a:t>長住、高價旅客</a:t>
             </a:r>
-            <a:endParaRPr lang="en-US" sz="1800" b="1" dirty="0">
+            <a:endParaRPr lang="en-US" sz="1400" b="1" dirty="0">
               <a:solidFill>
                 <a:srgbClr val="FF0000"/>
               </a:solidFill>
               <a:effectLst/>
-              <a:ea typeface="PMingLiU" panose="02020500000000000000" pitchFamily="18" charset="-120"/>
+              <a:latin typeface="Microsoft JhengHei UI" panose="020B0604030504040204" pitchFamily="34" charset="-120"/>
+              <a:ea typeface="Microsoft JhengHei UI" panose="020B0604030504040204" pitchFamily="34" charset="-120"/>
               <a:cs typeface="Times New Roman" panose="02020603050405020304" pitchFamily="18" charset="0"/>
             </a:endParaRPr>
           </a:p>
           <a:p>
-            <a:pPr marL="0" marR="0">
-              <a:spcBef>
-                <a:spcPts val="0"/>
-              </a:spcBef>
-              <a:spcAft>
-                <a:spcPts val="0"/>
-              </a:spcAft>
-            </a:pPr>
-            <a:r>
-              <a:rPr lang="zh-TW" sz="1800" dirty="0">
-                <a:effectLst/>
-                <a:ea typeface="PMingLiU" panose="02020500000000000000" pitchFamily="18" charset="-120"/>
-                <a:cs typeface="Times New Roman" panose="02020603050405020304" pitchFamily="18" charset="0"/>
-              </a:rPr>
-              <a:t>多是雙人長住，對設施或服務有要求，屬於「高消費長住型」。</a:t>
-            </a:r>
-            <a:endParaRPr lang="en-US" sz="1800" dirty="0">
-              <a:effectLst/>
-              <a:ea typeface="PMingLiU" panose="02020500000000000000" pitchFamily="18" charset="-120"/>
-              <a:cs typeface="Times New Roman" panose="02020603050405020304" pitchFamily="18" charset="0"/>
+            <a:endParaRPr lang="en-US" sz="1400" dirty="0">
+              <a:latin typeface="Microsoft JhengHei UI" panose="020B0604030504040204" pitchFamily="34" charset="-120"/>
+              <a:ea typeface="Microsoft JhengHei UI" panose="020B0604030504040204" pitchFamily="34" charset="-120"/>
             </a:endParaRPr>
-          </a:p>
-          <a:p>
-            <a:endParaRPr lang="en-US" dirty="0"/>
           </a:p>
         </p:txBody>
       </p:sp>
@@ -4873,8 +4997,8 @@
         </p:nvSpPr>
         <p:spPr>
           <a:xfrm>
-            <a:off x="1052420" y="3512929"/>
-            <a:ext cx="4107611" cy="3355975"/>
+            <a:off x="812319" y="4294982"/>
+            <a:ext cx="4433449" cy="3355975"/>
           </a:xfrm>
           <a:prstGeom prst="rect">
             <a:avLst/>
@@ -5059,9 +5183,10 @@
               <a:buNone/>
             </a:pPr>
             <a:r>
-              <a:rPr lang="en-US" sz="1800" dirty="0">
+              <a:rPr lang="en-US" sz="1400" dirty="0">
                 <a:effectLst/>
-                <a:ea typeface="PMingLiU" panose="02020500000000000000" pitchFamily="18" charset="-120"/>
+                <a:latin typeface="Microsoft JhengHei UI" panose="020B0604030504040204" pitchFamily="34" charset="-120"/>
+                <a:ea typeface="Microsoft JhengHei UI" panose="020B0604030504040204" pitchFamily="34" charset="-120"/>
                 <a:cs typeface="Times New Roman" panose="02020603050405020304" pitchFamily="18" charset="0"/>
               </a:rPr>
               <a:t>Cluster 2</a:t>
@@ -5077,25 +5202,28 @@
               </a:spcAft>
             </a:pPr>
             <a:r>
-              <a:rPr lang="en-US" sz="1800" dirty="0">
+              <a:rPr lang="en-US" sz="1400" dirty="0">
                 <a:effectLst/>
-                <a:ea typeface="PMingLiU" panose="02020500000000000000" pitchFamily="18" charset="-120"/>
+                <a:latin typeface="Microsoft JhengHei UI" panose="020B0604030504040204" pitchFamily="34" charset="-120"/>
+                <a:ea typeface="Microsoft JhengHei UI" panose="020B0604030504040204" pitchFamily="34" charset="-120"/>
                 <a:cs typeface="Times New Roman" panose="02020603050405020304" pitchFamily="18" charset="0"/>
               </a:rPr>
               <a:t>ADR</a:t>
             </a:r>
             <a:r>
-              <a:rPr lang="zh-TW" sz="1800" dirty="0">
+              <a:rPr lang="zh-TW" sz="1400" dirty="0">
                 <a:effectLst/>
-                <a:ea typeface="PMingLiU" panose="02020500000000000000" pitchFamily="18" charset="-120"/>
+                <a:latin typeface="Microsoft JhengHei UI" panose="020B0604030504040204" pitchFamily="34" charset="-120"/>
+                <a:ea typeface="Microsoft JhengHei UI" panose="020B0604030504040204" pitchFamily="34" charset="-120"/>
                 <a:cs typeface="Times New Roman" panose="02020603050405020304" pitchFamily="18" charset="0"/>
               </a:rPr>
               <a:t>：</a:t>
             </a:r>
             <a:r>
-              <a:rPr lang="en-US" sz="1800" dirty="0">
+              <a:rPr lang="en-US" sz="1400" dirty="0">
                 <a:effectLst/>
-                <a:ea typeface="PMingLiU" panose="02020500000000000000" pitchFamily="18" charset="-120"/>
+                <a:latin typeface="Microsoft JhengHei UI" panose="020B0604030504040204" pitchFamily="34" charset="-120"/>
+                <a:ea typeface="Microsoft JhengHei UI" panose="020B0604030504040204" pitchFamily="34" charset="-120"/>
                 <a:cs typeface="Times New Roman" panose="02020603050405020304" pitchFamily="18" charset="0"/>
               </a:rPr>
               <a:t> $98.4</a:t>
@@ -5111,32 +5239,36 @@
               </a:spcAft>
             </a:pPr>
             <a:r>
-              <a:rPr lang="zh-TW" sz="1800" dirty="0">
+              <a:rPr lang="zh-TW" sz="1400" dirty="0">
                 <a:effectLst/>
-                <a:ea typeface="PMingLiU" panose="02020500000000000000" pitchFamily="18" charset="-120"/>
+                <a:latin typeface="Microsoft JhengHei UI" panose="020B0604030504040204" pitchFamily="34" charset="-120"/>
+                <a:ea typeface="Microsoft JhengHei UI" panose="020B0604030504040204" pitchFamily="34" charset="-120"/>
                 <a:cs typeface="Times New Roman" panose="02020603050405020304" pitchFamily="18" charset="0"/>
               </a:rPr>
               <a:t>平均入住夜數：</a:t>
             </a:r>
             <a:r>
-              <a:rPr lang="en-US" sz="1800" dirty="0">
+              <a:rPr lang="en-US" sz="1400" dirty="0">
                 <a:effectLst/>
-                <a:ea typeface="PMingLiU" panose="02020500000000000000" pitchFamily="18" charset="-120"/>
+                <a:latin typeface="Microsoft JhengHei UI" panose="020B0604030504040204" pitchFamily="34" charset="-120"/>
+                <a:ea typeface="Microsoft JhengHei UI" panose="020B0604030504040204" pitchFamily="34" charset="-120"/>
                 <a:cs typeface="Times New Roman" panose="02020603050405020304" pitchFamily="18" charset="0"/>
               </a:rPr>
               <a:t> 2 </a:t>
             </a:r>
             <a:r>
-              <a:rPr lang="zh-TW" sz="1800" dirty="0">
+              <a:rPr lang="zh-TW" sz="1400" dirty="0">
                 <a:effectLst/>
-                <a:ea typeface="PMingLiU" panose="02020500000000000000" pitchFamily="18" charset="-120"/>
+                <a:latin typeface="Microsoft JhengHei UI" panose="020B0604030504040204" pitchFamily="34" charset="-120"/>
+                <a:ea typeface="Microsoft JhengHei UI" panose="020B0604030504040204" pitchFamily="34" charset="-120"/>
                 <a:cs typeface="Times New Roman" panose="02020603050405020304" pitchFamily="18" charset="0"/>
               </a:rPr>
               <a:t>晚</a:t>
             </a:r>
-            <a:endParaRPr lang="en-US" sz="1800" dirty="0">
+            <a:endParaRPr lang="en-US" sz="1400" dirty="0">
               <a:effectLst/>
-              <a:ea typeface="PMingLiU" panose="02020500000000000000" pitchFamily="18" charset="-120"/>
+              <a:latin typeface="Microsoft JhengHei UI" panose="020B0604030504040204" pitchFamily="34" charset="-120"/>
+              <a:ea typeface="Microsoft JhengHei UI" panose="020B0604030504040204" pitchFamily="34" charset="-120"/>
               <a:cs typeface="Times New Roman" panose="02020603050405020304" pitchFamily="18" charset="0"/>
             </a:endParaRPr>
           </a:p>
@@ -5150,48 +5282,54 @@
               </a:spcAft>
             </a:pPr>
             <a:r>
-              <a:rPr lang="zh-TW" sz="1800" dirty="0">
+              <a:rPr lang="zh-TW" sz="1400" dirty="0">
                 <a:effectLst/>
-                <a:ea typeface="PMingLiU" panose="02020500000000000000" pitchFamily="18" charset="-120"/>
+                <a:latin typeface="Microsoft JhengHei UI" panose="020B0604030504040204" pitchFamily="34" charset="-120"/>
+                <a:ea typeface="Microsoft JhengHei UI" panose="020B0604030504040204" pitchFamily="34" charset="-120"/>
                 <a:cs typeface="Times New Roman" panose="02020603050405020304" pitchFamily="18" charset="0"/>
               </a:rPr>
               <a:t>主要旅客：</a:t>
             </a:r>
             <a:r>
-              <a:rPr lang="en-US" sz="1800" dirty="0">
+              <a:rPr lang="en-US" sz="1400" dirty="0">
                 <a:effectLst/>
-                <a:ea typeface="PMingLiU" panose="02020500000000000000" pitchFamily="18" charset="-120"/>
+                <a:latin typeface="Microsoft JhengHei UI" panose="020B0604030504040204" pitchFamily="34" charset="-120"/>
+                <a:ea typeface="Microsoft JhengHei UI" panose="020B0604030504040204" pitchFamily="34" charset="-120"/>
                 <a:cs typeface="Times New Roman" panose="02020603050405020304" pitchFamily="18" charset="0"/>
               </a:rPr>
               <a:t> 1</a:t>
             </a:r>
             <a:r>
-              <a:rPr lang="zh-TW" sz="1800" dirty="0">
+              <a:rPr lang="zh-TW" sz="1400" dirty="0">
                 <a:effectLst/>
-                <a:ea typeface="PMingLiU" panose="02020500000000000000" pitchFamily="18" charset="-120"/>
+                <a:latin typeface="Microsoft JhengHei UI" panose="020B0604030504040204" pitchFamily="34" charset="-120"/>
+                <a:ea typeface="Microsoft JhengHei UI" panose="020B0604030504040204" pitchFamily="34" charset="-120"/>
                 <a:cs typeface="Times New Roman" panose="02020603050405020304" pitchFamily="18" charset="0"/>
               </a:rPr>
               <a:t>–</a:t>
             </a:r>
             <a:r>
-              <a:rPr lang="en-US" sz="1800" dirty="0">
+              <a:rPr lang="en-US" sz="1400" dirty="0">
                 <a:effectLst/>
-                <a:ea typeface="PMingLiU" panose="02020500000000000000" pitchFamily="18" charset="-120"/>
+                <a:latin typeface="Microsoft JhengHei UI" panose="020B0604030504040204" pitchFamily="34" charset="-120"/>
+                <a:ea typeface="Microsoft JhengHei UI" panose="020B0604030504040204" pitchFamily="34" charset="-120"/>
                 <a:cs typeface="Times New Roman" panose="02020603050405020304" pitchFamily="18" charset="0"/>
               </a:rPr>
               <a:t>2 </a:t>
             </a:r>
             <a:r>
-              <a:rPr lang="zh-TW" sz="1800" dirty="0">
+              <a:rPr lang="zh-TW" sz="1400" dirty="0">
                 <a:effectLst/>
-                <a:ea typeface="PMingLiU" panose="02020500000000000000" pitchFamily="18" charset="-120"/>
+                <a:latin typeface="Microsoft JhengHei UI" panose="020B0604030504040204" pitchFamily="34" charset="-120"/>
+                <a:ea typeface="Microsoft JhengHei UI" panose="020B0604030504040204" pitchFamily="34" charset="-120"/>
                 <a:cs typeface="Times New Roman" panose="02020603050405020304" pitchFamily="18" charset="0"/>
               </a:rPr>
               <a:t>位成人，無小孩</a:t>
             </a:r>
-            <a:endParaRPr lang="en-US" sz="1800" dirty="0">
+            <a:endParaRPr lang="en-US" sz="1400" dirty="0">
               <a:effectLst/>
-              <a:ea typeface="PMingLiU" panose="02020500000000000000" pitchFamily="18" charset="-120"/>
+              <a:latin typeface="Microsoft JhengHei UI" panose="020B0604030504040204" pitchFamily="34" charset="-120"/>
+              <a:ea typeface="Microsoft JhengHei UI" panose="020B0604030504040204" pitchFamily="34" charset="-120"/>
               <a:cs typeface="Times New Roman" panose="02020603050405020304" pitchFamily="18" charset="0"/>
             </a:endParaRPr>
           </a:p>
@@ -5205,16 +5343,18 @@
               </a:spcAft>
             </a:pPr>
             <a:r>
-              <a:rPr lang="zh-TW" sz="1800" dirty="0">
+              <a:rPr lang="zh-TW" sz="1400" dirty="0">
                 <a:effectLst/>
-                <a:ea typeface="PMingLiU" panose="02020500000000000000" pitchFamily="18" charset="-120"/>
+                <a:latin typeface="Microsoft JhengHei UI" panose="020B0604030504040204" pitchFamily="34" charset="-120"/>
+                <a:ea typeface="Microsoft JhengHei UI" panose="020B0604030504040204" pitchFamily="34" charset="-120"/>
                 <a:cs typeface="Times New Roman" panose="02020603050405020304" pitchFamily="18" charset="0"/>
               </a:rPr>
               <a:t>家庭比例： 幾乎不是家庭</a:t>
             </a:r>
-            <a:endParaRPr lang="en-US" sz="1800" dirty="0">
+            <a:endParaRPr lang="en-US" sz="1400" dirty="0">
               <a:effectLst/>
-              <a:ea typeface="PMingLiU" panose="02020500000000000000" pitchFamily="18" charset="-120"/>
+              <a:latin typeface="Microsoft JhengHei UI" panose="020B0604030504040204" pitchFamily="34" charset="-120"/>
+              <a:ea typeface="Microsoft JhengHei UI" panose="020B0604030504040204" pitchFamily="34" charset="-120"/>
               <a:cs typeface="Times New Roman" panose="02020603050405020304" pitchFamily="18" charset="0"/>
             </a:endParaRPr>
           </a:p>
@@ -5228,17 +5368,19 @@
               </a:spcAft>
             </a:pPr>
             <a:r>
-              <a:rPr lang="zh-TW" sz="1800" dirty="0">
+              <a:rPr lang="zh-TW" sz="1400" dirty="0">
                 <a:effectLst/>
-                <a:ea typeface="PMingLiU" panose="02020500000000000000" pitchFamily="18" charset="-120"/>
+                <a:latin typeface="Microsoft JhengHei UI" panose="020B0604030504040204" pitchFamily="34" charset="-120"/>
+                <a:ea typeface="Microsoft JhengHei UI" panose="020B0604030504040204" pitchFamily="34" charset="-120"/>
                 <a:cs typeface="Times New Roman" panose="02020603050405020304" pitchFamily="18" charset="0"/>
               </a:rPr>
               <a:t>週末入住： 幾乎不是週末</a:t>
             </a:r>
             <a:r>
-              <a:rPr lang="en-US" sz="1800" dirty="0">
+              <a:rPr lang="en-US" sz="1400" dirty="0">
                 <a:effectLst/>
-                <a:ea typeface="PMingLiU" panose="02020500000000000000" pitchFamily="18" charset="-120"/>
+                <a:latin typeface="Microsoft JhengHei UI" panose="020B0604030504040204" pitchFamily="34" charset="-120"/>
+                <a:ea typeface="Microsoft JhengHei UI" panose="020B0604030504040204" pitchFamily="34" charset="-120"/>
                 <a:cs typeface="Times New Roman" panose="02020603050405020304" pitchFamily="18" charset="0"/>
               </a:rPr>
               <a:t> (0%)</a:t>
@@ -5254,17 +5396,19 @@
               </a:spcAft>
             </a:pPr>
             <a:r>
-              <a:rPr lang="zh-TW" sz="1800" dirty="0">
+              <a:rPr lang="zh-TW" sz="1400" dirty="0">
                 <a:effectLst/>
-                <a:ea typeface="PMingLiU" panose="02020500000000000000" pitchFamily="18" charset="-120"/>
+                <a:latin typeface="Microsoft JhengHei UI" panose="020B0604030504040204" pitchFamily="34" charset="-120"/>
+                <a:ea typeface="Microsoft JhengHei UI" panose="020B0604030504040204" pitchFamily="34" charset="-120"/>
                 <a:cs typeface="Times New Roman" panose="02020603050405020304" pitchFamily="18" charset="0"/>
               </a:rPr>
               <a:t>特殊需求： 少</a:t>
             </a:r>
             <a:r>
-              <a:rPr lang="en-US" sz="1800" dirty="0">
+              <a:rPr lang="en-US" sz="1400" dirty="0">
                 <a:effectLst/>
-                <a:ea typeface="PMingLiU" panose="02020500000000000000" pitchFamily="18" charset="-120"/>
+                <a:latin typeface="Microsoft JhengHei UI" panose="020B0604030504040204" pitchFamily="34" charset="-120"/>
+                <a:ea typeface="Microsoft JhengHei UI" panose="020B0604030504040204" pitchFamily="34" charset="-120"/>
                 <a:cs typeface="Times New Roman" panose="02020603050405020304" pitchFamily="18" charset="0"/>
               </a:rPr>
               <a:t> (0.45)</a:t>
@@ -5280,21 +5424,44 @@
               </a:spcAft>
             </a:pPr>
             <a:r>
-              <a:rPr lang="zh-TW" sz="1800" dirty="0">
+              <a:rPr lang="zh-TW" sz="1400" dirty="0">
                 <a:effectLst/>
-                <a:ea typeface="PMingLiU" panose="02020500000000000000" pitchFamily="18" charset="-120"/>
+                <a:latin typeface="Microsoft JhengHei UI" panose="020B0604030504040204" pitchFamily="34" charset="-120"/>
+                <a:ea typeface="Microsoft JhengHei UI" panose="020B0604030504040204" pitchFamily="34" charset="-120"/>
                 <a:cs typeface="Times New Roman" panose="02020603050405020304" pitchFamily="18" charset="0"/>
               </a:rPr>
               <a:t>平均營收：</a:t>
             </a:r>
             <a:r>
-              <a:rPr lang="en-US" sz="1800" dirty="0">
+              <a:rPr lang="en-US" sz="1400" dirty="0">
                 <a:effectLst/>
-                <a:ea typeface="PMingLiU" panose="02020500000000000000" pitchFamily="18" charset="-120"/>
+                <a:latin typeface="Microsoft JhengHei UI" panose="020B0604030504040204" pitchFamily="34" charset="-120"/>
+                <a:ea typeface="Microsoft JhengHei UI" panose="020B0604030504040204" pitchFamily="34" charset="-120"/>
                 <a:cs typeface="Times New Roman" panose="02020603050405020304" pitchFamily="18" charset="0"/>
               </a:rPr>
               <a:t> $203</a:t>
             </a:r>
+          </a:p>
+          <a:p>
+            <a:pPr marL="0">
+              <a:spcBef>
+                <a:spcPts val="0"/>
+              </a:spcBef>
+            </a:pPr>
+            <a:r>
+              <a:rPr lang="zh-TW" altLang="en-US" sz="1400" dirty="0">
+                <a:latin typeface="Microsoft JhengHei UI" panose="020B0604030504040204" pitchFamily="34" charset="-120"/>
+                <a:ea typeface="Microsoft JhengHei UI" panose="020B0604030504040204" pitchFamily="34" charset="-120"/>
+                <a:cs typeface="Times New Roman" panose="02020603050405020304" pitchFamily="18" charset="0"/>
+              </a:rPr>
+              <a:t>通常是商務出差或短期停留，非週末，單人或雙人。</a:t>
+            </a:r>
+            <a:endParaRPr lang="en-US" sz="1400" dirty="0">
+              <a:effectLst/>
+              <a:latin typeface="Microsoft JhengHei UI" panose="020B0604030504040204" pitchFamily="34" charset="-120"/>
+              <a:ea typeface="Microsoft JhengHei UI" panose="020B0604030504040204" pitchFamily="34" charset="-120"/>
+              <a:cs typeface="Times New Roman" panose="02020603050405020304" pitchFamily="18" charset="0"/>
+            </a:endParaRPr>
           </a:p>
           <a:p>
             <a:pPr marL="0" marR="0" indent="0">
@@ -5306,9 +5473,10 @@
               </a:spcAft>
               <a:buNone/>
             </a:pPr>
-            <a:endParaRPr lang="en-US" altLang="zh-TW" sz="1800" dirty="0">
+            <a:endParaRPr lang="en-US" altLang="zh-TW" sz="1400" dirty="0">
               <a:effectLst/>
-              <a:ea typeface="PMingLiU" panose="02020500000000000000" pitchFamily="18" charset="-120"/>
+              <a:latin typeface="Microsoft JhengHei UI" panose="020B0604030504040204" pitchFamily="34" charset="-120"/>
+              <a:ea typeface="Microsoft JhengHei UI" panose="020B0604030504040204" pitchFamily="34" charset="-120"/>
               <a:cs typeface="Times New Roman" panose="02020603050405020304" pitchFamily="18" charset="0"/>
             </a:endParaRPr>
           </a:p>
@@ -5323,53 +5491,33 @@
               <a:buNone/>
             </a:pPr>
             <a:r>
-              <a:rPr lang="zh-TW" sz="1800" dirty="0">
+              <a:rPr lang="zh-TW" sz="1400" b="1" dirty="0">
                 <a:effectLst/>
-                <a:ea typeface="PMingLiU" panose="02020500000000000000" pitchFamily="18" charset="-120"/>
+                <a:latin typeface="Microsoft JhengHei UI" panose="020B0604030504040204" pitchFamily="34" charset="-120"/>
+                <a:ea typeface="Microsoft JhengHei UI" panose="020B0604030504040204" pitchFamily="34" charset="-120"/>
                 <a:cs typeface="Times New Roman" panose="02020603050405020304" pitchFamily="18" charset="0"/>
               </a:rPr>
               <a:t>解讀：</a:t>
             </a:r>
             <a:r>
-              <a:rPr lang="zh-TW" sz="1800" b="1" dirty="0">
+              <a:rPr lang="zh-TW" sz="1400" b="1" dirty="0">
                 <a:solidFill>
                   <a:srgbClr val="FF0000"/>
                 </a:solidFill>
                 <a:effectLst/>
-                <a:ea typeface="PMingLiU" panose="02020500000000000000" pitchFamily="18" charset="-120"/>
+                <a:latin typeface="Microsoft JhengHei UI" panose="020B0604030504040204" pitchFamily="34" charset="-120"/>
+                <a:ea typeface="Microsoft JhengHei UI" panose="020B0604030504040204" pitchFamily="34" charset="-120"/>
                 <a:cs typeface="Times New Roman" panose="02020603050405020304" pitchFamily="18" charset="0"/>
               </a:rPr>
               <a:t>短期、平日商務型旅客</a:t>
             </a:r>
-            <a:endParaRPr lang="en-US" sz="1800" b="1" dirty="0">
+            <a:endParaRPr lang="en-US" sz="1400" b="1" dirty="0">
               <a:solidFill>
                 <a:srgbClr val="FF0000"/>
               </a:solidFill>
               <a:effectLst/>
-              <a:ea typeface="PMingLiU" panose="02020500000000000000" pitchFamily="18" charset="-120"/>
-              <a:cs typeface="Times New Roman" panose="02020603050405020304" pitchFamily="18" charset="0"/>
-            </a:endParaRPr>
-          </a:p>
-          <a:p>
-            <a:pPr marL="0" marR="0">
-              <a:spcBef>
-                <a:spcPts val="0"/>
-              </a:spcBef>
-              <a:spcAft>
-                <a:spcPts val="0"/>
-              </a:spcAft>
-            </a:pPr>
-            <a:r>
-              <a:rPr lang="zh-TW" sz="1800" dirty="0">
-                <a:effectLst/>
-                <a:ea typeface="PMingLiU" panose="02020500000000000000" pitchFamily="18" charset="-120"/>
-                <a:cs typeface="Times New Roman" panose="02020603050405020304" pitchFamily="18" charset="0"/>
-              </a:rPr>
-              <a:t>通常是商務出差或短期停留，非週末，單人或雙人。</a:t>
-            </a:r>
-            <a:endParaRPr lang="en-US" sz="1800" dirty="0">
-              <a:effectLst/>
-              <a:ea typeface="PMingLiU" panose="02020500000000000000" pitchFamily="18" charset="-120"/>
+              <a:latin typeface="Microsoft JhengHei UI" panose="020B0604030504040204" pitchFamily="34" charset="-120"/>
+              <a:ea typeface="Microsoft JhengHei UI" panose="020B0604030504040204" pitchFamily="34" charset="-120"/>
               <a:cs typeface="Times New Roman" panose="02020603050405020304" pitchFamily="18" charset="0"/>
             </a:endParaRPr>
           </a:p>
@@ -5391,8 +5539,8 @@
         </p:nvSpPr>
         <p:spPr>
           <a:xfrm>
-            <a:off x="7031967" y="3512929"/>
-            <a:ext cx="4262886" cy="3355975"/>
+            <a:off x="7031966" y="4294982"/>
+            <a:ext cx="4347715" cy="2573922"/>
           </a:xfrm>
           <a:prstGeom prst="rect">
             <a:avLst/>
@@ -5577,9 +5725,10 @@
               <a:buNone/>
             </a:pPr>
             <a:r>
-              <a:rPr lang="en-US" sz="1800" dirty="0">
+              <a:rPr lang="en-US" sz="1400" dirty="0">
                 <a:effectLst/>
-                <a:ea typeface="PMingLiU" panose="02020500000000000000" pitchFamily="18" charset="-120"/>
+                <a:latin typeface="Microsoft JhengHei UI" panose="020B0604030504040204" pitchFamily="34" charset="-120"/>
+                <a:ea typeface="Microsoft JhengHei UI" panose="020B0604030504040204" pitchFamily="34" charset="-120"/>
                 <a:cs typeface="Times New Roman" panose="02020603050405020304" pitchFamily="18" charset="0"/>
               </a:rPr>
               <a:t>Cluster 3</a:t>
@@ -5595,25 +5744,28 @@
               </a:spcAft>
             </a:pPr>
             <a:r>
-              <a:rPr lang="en-US" sz="1800" dirty="0">
+              <a:rPr lang="en-US" sz="1400" dirty="0">
                 <a:effectLst/>
-                <a:ea typeface="PMingLiU" panose="02020500000000000000" pitchFamily="18" charset="-120"/>
+                <a:latin typeface="Microsoft JhengHei UI" panose="020B0604030504040204" pitchFamily="34" charset="-120"/>
+                <a:ea typeface="Microsoft JhengHei UI" panose="020B0604030504040204" pitchFamily="34" charset="-120"/>
                 <a:cs typeface="Times New Roman" panose="02020603050405020304" pitchFamily="18" charset="0"/>
               </a:rPr>
               <a:t>ADR</a:t>
             </a:r>
             <a:r>
-              <a:rPr lang="zh-TW" sz="1800" dirty="0">
+              <a:rPr lang="zh-TW" sz="1400" dirty="0">
                 <a:effectLst/>
-                <a:ea typeface="PMingLiU" panose="02020500000000000000" pitchFamily="18" charset="-120"/>
+                <a:latin typeface="Microsoft JhengHei UI" panose="020B0604030504040204" pitchFamily="34" charset="-120"/>
+                <a:ea typeface="Microsoft JhengHei UI" panose="020B0604030504040204" pitchFamily="34" charset="-120"/>
                 <a:cs typeface="Times New Roman" panose="02020603050405020304" pitchFamily="18" charset="0"/>
               </a:rPr>
               <a:t>：</a:t>
             </a:r>
             <a:r>
-              <a:rPr lang="en-US" sz="1800" dirty="0">
+              <a:rPr lang="en-US" sz="1400" dirty="0">
                 <a:effectLst/>
-                <a:ea typeface="PMingLiU" panose="02020500000000000000" pitchFamily="18" charset="-120"/>
+                <a:latin typeface="Microsoft JhengHei UI" panose="020B0604030504040204" pitchFamily="34" charset="-120"/>
+                <a:ea typeface="Microsoft JhengHei UI" panose="020B0604030504040204" pitchFamily="34" charset="-120"/>
                 <a:cs typeface="Times New Roman" panose="02020603050405020304" pitchFamily="18" charset="0"/>
               </a:rPr>
               <a:t> $152.0</a:t>
@@ -5629,32 +5781,36 @@
               </a:spcAft>
             </a:pPr>
             <a:r>
-              <a:rPr lang="zh-TW" sz="1800" dirty="0">
+              <a:rPr lang="zh-TW" sz="1400" dirty="0">
                 <a:effectLst/>
-                <a:ea typeface="PMingLiU" panose="02020500000000000000" pitchFamily="18" charset="-120"/>
+                <a:latin typeface="Microsoft JhengHei UI" panose="020B0604030504040204" pitchFamily="34" charset="-120"/>
+                <a:ea typeface="Microsoft JhengHei UI" panose="020B0604030504040204" pitchFamily="34" charset="-120"/>
                 <a:cs typeface="Times New Roman" panose="02020603050405020304" pitchFamily="18" charset="0"/>
               </a:rPr>
               <a:t>平均入住夜數：</a:t>
             </a:r>
             <a:r>
-              <a:rPr lang="en-US" sz="1800" dirty="0">
+              <a:rPr lang="en-US" sz="1400" dirty="0">
                 <a:effectLst/>
-                <a:ea typeface="PMingLiU" panose="02020500000000000000" pitchFamily="18" charset="-120"/>
+                <a:latin typeface="Microsoft JhengHei UI" panose="020B0604030504040204" pitchFamily="34" charset="-120"/>
+                <a:ea typeface="Microsoft JhengHei UI" panose="020B0604030504040204" pitchFamily="34" charset="-120"/>
                 <a:cs typeface="Times New Roman" panose="02020603050405020304" pitchFamily="18" charset="0"/>
               </a:rPr>
               <a:t> 3.3 </a:t>
             </a:r>
             <a:r>
-              <a:rPr lang="zh-TW" sz="1800" dirty="0">
+              <a:rPr lang="zh-TW" sz="1400" dirty="0">
                 <a:effectLst/>
-                <a:ea typeface="PMingLiU" panose="02020500000000000000" pitchFamily="18" charset="-120"/>
+                <a:latin typeface="Microsoft JhengHei UI" panose="020B0604030504040204" pitchFamily="34" charset="-120"/>
+                <a:ea typeface="Microsoft JhengHei UI" panose="020B0604030504040204" pitchFamily="34" charset="-120"/>
                 <a:cs typeface="Times New Roman" panose="02020603050405020304" pitchFamily="18" charset="0"/>
               </a:rPr>
               <a:t>晚</a:t>
             </a:r>
-            <a:endParaRPr lang="en-US" sz="1800" dirty="0">
+            <a:endParaRPr lang="en-US" sz="1400" dirty="0">
               <a:effectLst/>
-              <a:ea typeface="PMingLiU" panose="02020500000000000000" pitchFamily="18" charset="-120"/>
+              <a:latin typeface="Microsoft JhengHei UI" panose="020B0604030504040204" pitchFamily="34" charset="-120"/>
+              <a:ea typeface="Microsoft JhengHei UI" panose="020B0604030504040204" pitchFamily="34" charset="-120"/>
               <a:cs typeface="Times New Roman" panose="02020603050405020304" pitchFamily="18" charset="0"/>
             </a:endParaRPr>
           </a:p>
@@ -5668,64 +5824,72 @@
               </a:spcAft>
             </a:pPr>
             <a:r>
-              <a:rPr lang="zh-TW" sz="1800" dirty="0">
+              <a:rPr lang="zh-TW" sz="1400" dirty="0">
                 <a:effectLst/>
-                <a:ea typeface="PMingLiU" panose="02020500000000000000" pitchFamily="18" charset="-120"/>
+                <a:latin typeface="Microsoft JhengHei UI" panose="020B0604030504040204" pitchFamily="34" charset="-120"/>
+                <a:ea typeface="Microsoft JhengHei UI" panose="020B0604030504040204" pitchFamily="34" charset="-120"/>
                 <a:cs typeface="Times New Roman" panose="02020603050405020304" pitchFamily="18" charset="0"/>
               </a:rPr>
               <a:t>主要旅客：</a:t>
             </a:r>
             <a:r>
-              <a:rPr lang="en-US" sz="1800" dirty="0">
+              <a:rPr lang="en-US" sz="1400" dirty="0">
                 <a:effectLst/>
-                <a:ea typeface="PMingLiU" panose="02020500000000000000" pitchFamily="18" charset="-120"/>
+                <a:latin typeface="Microsoft JhengHei UI" panose="020B0604030504040204" pitchFamily="34" charset="-120"/>
+                <a:ea typeface="Microsoft JhengHei UI" panose="020B0604030504040204" pitchFamily="34" charset="-120"/>
                 <a:cs typeface="Times New Roman" panose="02020603050405020304" pitchFamily="18" charset="0"/>
               </a:rPr>
               <a:t> 2 </a:t>
             </a:r>
             <a:r>
-              <a:rPr lang="zh-TW" sz="1800" dirty="0">
+              <a:rPr lang="zh-TW" sz="1400" dirty="0">
                 <a:effectLst/>
-                <a:ea typeface="PMingLiU" panose="02020500000000000000" pitchFamily="18" charset="-120"/>
+                <a:latin typeface="Microsoft JhengHei UI" panose="020B0604030504040204" pitchFamily="34" charset="-120"/>
+                <a:ea typeface="Microsoft JhengHei UI" panose="020B0604030504040204" pitchFamily="34" charset="-120"/>
                 <a:cs typeface="Times New Roman" panose="02020603050405020304" pitchFamily="18" charset="0"/>
               </a:rPr>
               <a:t>位成人</a:t>
             </a:r>
             <a:r>
-              <a:rPr lang="en-US" sz="1800" dirty="0">
+              <a:rPr lang="en-US" sz="1400" dirty="0">
                 <a:effectLst/>
-                <a:ea typeface="PMingLiU" panose="02020500000000000000" pitchFamily="18" charset="-120"/>
+                <a:latin typeface="Microsoft JhengHei UI" panose="020B0604030504040204" pitchFamily="34" charset="-120"/>
+                <a:ea typeface="Microsoft JhengHei UI" panose="020B0604030504040204" pitchFamily="34" charset="-120"/>
                 <a:cs typeface="Times New Roman" panose="02020603050405020304" pitchFamily="18" charset="0"/>
               </a:rPr>
               <a:t> + </a:t>
             </a:r>
             <a:r>
-              <a:rPr lang="zh-TW" sz="1800" dirty="0">
+              <a:rPr lang="zh-TW" sz="1400" dirty="0">
                 <a:effectLst/>
-                <a:ea typeface="PMingLiU" panose="02020500000000000000" pitchFamily="18" charset="-120"/>
+                <a:latin typeface="Microsoft JhengHei UI" panose="020B0604030504040204" pitchFamily="34" charset="-120"/>
+                <a:ea typeface="Microsoft JhengHei UI" panose="020B0604030504040204" pitchFamily="34" charset="-120"/>
                 <a:cs typeface="Times New Roman" panose="02020603050405020304" pitchFamily="18" charset="0"/>
               </a:rPr>
               <a:t>平均</a:t>
             </a:r>
             <a:r>
-              <a:rPr lang="en-US" sz="1800" dirty="0">
+              <a:rPr lang="en-US" sz="1400" dirty="0">
                 <a:effectLst/>
-                <a:ea typeface="PMingLiU" panose="02020500000000000000" pitchFamily="18" charset="-120"/>
+                <a:latin typeface="Microsoft JhengHei UI" panose="020B0604030504040204" pitchFamily="34" charset="-120"/>
+                <a:ea typeface="Microsoft JhengHei UI" panose="020B0604030504040204" pitchFamily="34" charset="-120"/>
                 <a:cs typeface="Times New Roman" panose="02020603050405020304" pitchFamily="18" charset="0"/>
               </a:rPr>
               <a:t> 1.3 </a:t>
             </a:r>
             <a:r>
-              <a:rPr lang="zh-TW" sz="1800" dirty="0">
+              <a:rPr lang="zh-TW" sz="1400" dirty="0">
                 <a:effectLst/>
-                <a:ea typeface="PMingLiU" panose="02020500000000000000" pitchFamily="18" charset="-120"/>
+                <a:latin typeface="Microsoft JhengHei UI" panose="020B0604030504040204" pitchFamily="34" charset="-120"/>
+                <a:ea typeface="Microsoft JhengHei UI" panose="020B0604030504040204" pitchFamily="34" charset="-120"/>
                 <a:cs typeface="Times New Roman" panose="02020603050405020304" pitchFamily="18" charset="0"/>
               </a:rPr>
               <a:t>個小孩</a:t>
             </a:r>
-            <a:endParaRPr lang="en-US" sz="1800" dirty="0">
+            <a:endParaRPr lang="en-US" sz="1400" dirty="0">
               <a:effectLst/>
-              <a:ea typeface="PMingLiU" panose="02020500000000000000" pitchFamily="18" charset="-120"/>
+              <a:latin typeface="Microsoft JhengHei UI" panose="020B0604030504040204" pitchFamily="34" charset="-120"/>
+              <a:ea typeface="Microsoft JhengHei UI" panose="020B0604030504040204" pitchFamily="34" charset="-120"/>
               <a:cs typeface="Times New Roman" panose="02020603050405020304" pitchFamily="18" charset="0"/>
             </a:endParaRPr>
           </a:p>
@@ -5739,17 +5903,19 @@
               </a:spcAft>
             </a:pPr>
             <a:r>
-              <a:rPr lang="zh-TW" sz="1800" dirty="0">
+              <a:rPr lang="zh-TW" sz="1400" dirty="0">
                 <a:effectLst/>
-                <a:ea typeface="PMingLiU" panose="02020500000000000000" pitchFamily="18" charset="-120"/>
+                <a:latin typeface="Microsoft JhengHei UI" panose="020B0604030504040204" pitchFamily="34" charset="-120"/>
+                <a:ea typeface="Microsoft JhengHei UI" panose="020B0604030504040204" pitchFamily="34" charset="-120"/>
                 <a:cs typeface="Times New Roman" panose="02020603050405020304" pitchFamily="18" charset="0"/>
               </a:rPr>
               <a:t>家庭比例： 幾乎都是家庭</a:t>
             </a:r>
             <a:r>
-              <a:rPr lang="en-US" sz="1800" dirty="0">
+              <a:rPr lang="en-US" sz="1400" dirty="0">
                 <a:effectLst/>
-                <a:ea typeface="PMingLiU" panose="02020500000000000000" pitchFamily="18" charset="-120"/>
+                <a:latin typeface="Microsoft JhengHei UI" panose="020B0604030504040204" pitchFamily="34" charset="-120"/>
+                <a:ea typeface="Microsoft JhengHei UI" panose="020B0604030504040204" pitchFamily="34" charset="-120"/>
                 <a:cs typeface="Times New Roman" panose="02020603050405020304" pitchFamily="18" charset="0"/>
               </a:rPr>
               <a:t> </a:t>
@@ -5765,17 +5931,19 @@
               </a:spcAft>
             </a:pPr>
             <a:r>
-              <a:rPr lang="zh-TW" sz="1800" dirty="0">
+              <a:rPr lang="zh-TW" sz="1400" dirty="0">
                 <a:effectLst/>
-                <a:ea typeface="PMingLiU" panose="02020500000000000000" pitchFamily="18" charset="-120"/>
+                <a:latin typeface="Microsoft JhengHei UI" panose="020B0604030504040204" pitchFamily="34" charset="-120"/>
+                <a:ea typeface="Microsoft JhengHei UI" panose="020B0604030504040204" pitchFamily="34" charset="-120"/>
                 <a:cs typeface="Times New Roman" panose="02020603050405020304" pitchFamily="18" charset="0"/>
               </a:rPr>
               <a:t>週末入住：</a:t>
             </a:r>
             <a:r>
-              <a:rPr lang="en-US" sz="1800" dirty="0">
+              <a:rPr lang="en-US" sz="1400" dirty="0">
                 <a:effectLst/>
-                <a:ea typeface="PMingLiU" panose="02020500000000000000" pitchFamily="18" charset="-120"/>
+                <a:latin typeface="Microsoft JhengHei UI" panose="020B0604030504040204" pitchFamily="34" charset="-120"/>
+                <a:ea typeface="Microsoft JhengHei UI" panose="020B0604030504040204" pitchFamily="34" charset="-120"/>
                 <a:cs typeface="Times New Roman" panose="02020603050405020304" pitchFamily="18" charset="0"/>
               </a:rPr>
               <a:t> 60%</a:t>
@@ -5791,17 +5959,19 @@
               </a:spcAft>
             </a:pPr>
             <a:r>
-              <a:rPr lang="zh-TW" sz="1800" dirty="0">
+              <a:rPr lang="zh-TW" sz="1400" dirty="0">
                 <a:effectLst/>
-                <a:ea typeface="PMingLiU" panose="02020500000000000000" pitchFamily="18" charset="-120"/>
+                <a:latin typeface="Microsoft JhengHei UI" panose="020B0604030504040204" pitchFamily="34" charset="-120"/>
+                <a:ea typeface="Microsoft JhengHei UI" panose="020B0604030504040204" pitchFamily="34" charset="-120"/>
                 <a:cs typeface="Times New Roman" panose="02020603050405020304" pitchFamily="18" charset="0"/>
               </a:rPr>
               <a:t>特殊需求： 中高</a:t>
             </a:r>
             <a:r>
-              <a:rPr lang="en-US" sz="1800" dirty="0">
+              <a:rPr lang="en-US" sz="1400" dirty="0">
                 <a:effectLst/>
-                <a:ea typeface="PMingLiU" panose="02020500000000000000" pitchFamily="18" charset="-120"/>
+                <a:latin typeface="Microsoft JhengHei UI" panose="020B0604030504040204" pitchFamily="34" charset="-120"/>
+                <a:ea typeface="Microsoft JhengHei UI" panose="020B0604030504040204" pitchFamily="34" charset="-120"/>
                 <a:cs typeface="Times New Roman" panose="02020603050405020304" pitchFamily="18" charset="0"/>
               </a:rPr>
               <a:t> (1.02)</a:t>
@@ -5817,21 +5987,44 @@
               </a:spcAft>
             </a:pPr>
             <a:r>
-              <a:rPr lang="zh-TW" sz="1800" dirty="0">
+              <a:rPr lang="zh-TW" sz="1400" dirty="0">
                 <a:effectLst/>
-                <a:ea typeface="PMingLiU" panose="02020500000000000000" pitchFamily="18" charset="-120"/>
+                <a:latin typeface="Microsoft JhengHei UI" panose="020B0604030504040204" pitchFamily="34" charset="-120"/>
+                <a:ea typeface="Microsoft JhengHei UI" panose="020B0604030504040204" pitchFamily="34" charset="-120"/>
                 <a:cs typeface="Times New Roman" panose="02020603050405020304" pitchFamily="18" charset="0"/>
               </a:rPr>
               <a:t>平均營收：</a:t>
             </a:r>
             <a:r>
-              <a:rPr lang="en-US" sz="1800" dirty="0">
+              <a:rPr lang="en-US" sz="1400" dirty="0">
                 <a:effectLst/>
-                <a:ea typeface="PMingLiU" panose="02020500000000000000" pitchFamily="18" charset="-120"/>
+                <a:latin typeface="Microsoft JhengHei UI" panose="020B0604030504040204" pitchFamily="34" charset="-120"/>
+                <a:ea typeface="Microsoft JhengHei UI" panose="020B0604030504040204" pitchFamily="34" charset="-120"/>
                 <a:cs typeface="Times New Roman" panose="02020603050405020304" pitchFamily="18" charset="0"/>
               </a:rPr>
               <a:t> $491</a:t>
             </a:r>
+          </a:p>
+          <a:p>
+            <a:pPr marL="0">
+              <a:spcBef>
+                <a:spcPts val="0"/>
+              </a:spcBef>
+            </a:pPr>
+            <a:r>
+              <a:rPr lang="zh-TW" altLang="en-US" sz="1400" dirty="0">
+                <a:latin typeface="Microsoft JhengHei UI" panose="020B0604030504040204" pitchFamily="34" charset="-120"/>
+                <a:ea typeface="Microsoft JhengHei UI" panose="020B0604030504040204" pitchFamily="34" charset="-120"/>
+                <a:cs typeface="Times New Roman" panose="02020603050405020304" pitchFamily="18" charset="0"/>
+              </a:rPr>
+              <a:t>攜帶小孩入住，願意支付較高房價，有更多需求，適合週末或短期家庭度假。</a:t>
+            </a:r>
+            <a:endParaRPr lang="en-US" sz="1400" dirty="0">
+              <a:effectLst/>
+              <a:latin typeface="Microsoft JhengHei UI" panose="020B0604030504040204" pitchFamily="34" charset="-120"/>
+              <a:ea typeface="Microsoft JhengHei UI" panose="020B0604030504040204" pitchFamily="34" charset="-120"/>
+              <a:cs typeface="Times New Roman" panose="02020603050405020304" pitchFamily="18" charset="0"/>
+            </a:endParaRPr>
           </a:p>
           <a:p>
             <a:pPr marL="0" marR="0" indent="0">
@@ -5843,9 +6036,10 @@
               </a:spcAft>
               <a:buNone/>
             </a:pPr>
-            <a:endParaRPr lang="en-US" altLang="zh-TW" sz="1800" dirty="0">
+            <a:endParaRPr lang="en-US" altLang="zh-TW" sz="1400" dirty="0">
               <a:effectLst/>
-              <a:ea typeface="PMingLiU" panose="02020500000000000000" pitchFamily="18" charset="-120"/>
+              <a:latin typeface="Microsoft JhengHei UI" panose="020B0604030504040204" pitchFamily="34" charset="-120"/>
+              <a:ea typeface="Microsoft JhengHei UI" panose="020B0604030504040204" pitchFamily="34" charset="-120"/>
               <a:cs typeface="Times New Roman" panose="02020603050405020304" pitchFamily="18" charset="0"/>
             </a:endParaRPr>
           </a:p>
@@ -5860,54 +6054,74 @@
               <a:buNone/>
             </a:pPr>
             <a:r>
-              <a:rPr lang="zh-TW" sz="1800" dirty="0">
+              <a:rPr lang="zh-TW" sz="1400" b="1" dirty="0">
                 <a:effectLst/>
-                <a:ea typeface="PMingLiU" panose="02020500000000000000" pitchFamily="18" charset="-120"/>
+                <a:latin typeface="Microsoft JhengHei UI" panose="020B0604030504040204" pitchFamily="34" charset="-120"/>
+                <a:ea typeface="Microsoft JhengHei UI" panose="020B0604030504040204" pitchFamily="34" charset="-120"/>
                 <a:cs typeface="Times New Roman" panose="02020603050405020304" pitchFamily="18" charset="0"/>
               </a:rPr>
               <a:t>解讀：</a:t>
             </a:r>
             <a:r>
-              <a:rPr lang="zh-TW" sz="1800" b="1" dirty="0">
+              <a:rPr lang="zh-TW" sz="1400" b="1" dirty="0">
                 <a:solidFill>
                   <a:srgbClr val="FF0000"/>
                 </a:solidFill>
                 <a:effectLst/>
-                <a:ea typeface="PMingLiU" panose="02020500000000000000" pitchFamily="18" charset="-120"/>
+                <a:latin typeface="Microsoft JhengHei UI" panose="020B0604030504040204" pitchFamily="34" charset="-120"/>
+                <a:ea typeface="Microsoft JhengHei UI" panose="020B0604030504040204" pitchFamily="34" charset="-120"/>
                 <a:cs typeface="Times New Roman" panose="02020603050405020304" pitchFamily="18" charset="0"/>
               </a:rPr>
               <a:t>家庭旅遊型旅客</a:t>
             </a:r>
-            <a:endParaRPr lang="en-US" sz="1800" b="1" dirty="0">
+            <a:endParaRPr lang="en-US" sz="1400" b="1" dirty="0">
               <a:solidFill>
                 <a:srgbClr val="FF0000"/>
               </a:solidFill>
               <a:effectLst/>
-              <a:ea typeface="PMingLiU" panose="02020500000000000000" pitchFamily="18" charset="-120"/>
+              <a:latin typeface="Microsoft JhengHei UI" panose="020B0604030504040204" pitchFamily="34" charset="-120"/>
+              <a:ea typeface="Microsoft JhengHei UI" panose="020B0604030504040204" pitchFamily="34" charset="-120"/>
               <a:cs typeface="Times New Roman" panose="02020603050405020304" pitchFamily="18" charset="0"/>
             </a:endParaRPr>
           </a:p>
-          <a:p>
-            <a:pPr marL="0" marR="0">
-              <a:spcBef>
-                <a:spcPts val="0"/>
-              </a:spcBef>
-              <a:spcAft>
-                <a:spcPts val="0"/>
-              </a:spcAft>
-            </a:pPr>
-            <a:r>
-              <a:rPr lang="zh-TW" sz="1800" dirty="0">
-                <a:effectLst/>
-                <a:ea typeface="PMingLiU" panose="02020500000000000000" pitchFamily="18" charset="-120"/>
-                <a:cs typeface="Times New Roman" panose="02020603050405020304" pitchFamily="18" charset="0"/>
-              </a:rPr>
-              <a:t>攜帶小孩入住，願意支付較高房價，有更多需求，適合週末或短期家庭度假。</a:t>
-            </a:r>
-            <a:endParaRPr lang="en-US" sz="1800" dirty="0">
-              <a:effectLst/>
-              <a:ea typeface="PMingLiU" panose="02020500000000000000" pitchFamily="18" charset="-120"/>
-              <a:cs typeface="Times New Roman" panose="02020603050405020304" pitchFamily="18" charset="0"/>
+        </p:txBody>
+      </p:sp>
+      <p:sp>
+        <p:nvSpPr>
+          <p:cNvPr id="2" name="Title 1">
+            <a:extLst>
+              <a:ext uri="{FF2B5EF4-FFF2-40B4-BE49-F238E27FC236}">
+                <a16:creationId xmlns:a16="http://schemas.microsoft.com/office/drawing/2014/main" id="{C715F7D0-E47F-67F3-CDD8-79389D6E7076}"/>
+              </a:ext>
+            </a:extLst>
+          </p:cNvPr>
+          <p:cNvSpPr>
+            <a:spLocks noGrp="1"/>
+          </p:cNvSpPr>
+          <p:nvPr>
+            <p:ph type="title"/>
+          </p:nvPr>
+        </p:nvSpPr>
+        <p:spPr>
+          <a:xfrm>
+            <a:off x="812319" y="226603"/>
+            <a:ext cx="10515600" cy="1325563"/>
+          </a:xfrm>
+        </p:spPr>
+        <p:txBody>
+          <a:bodyPr/>
+          <a:lstStyle/>
+          <a:p>
+            <a:r>
+              <a:rPr lang="zh-TW" altLang="en-US" dirty="0">
+                <a:latin typeface="Microsoft JhengHei UI" panose="020B0604030504040204" pitchFamily="34" charset="-120"/>
+                <a:ea typeface="Microsoft JhengHei UI" panose="020B0604030504040204" pitchFamily="34" charset="-120"/>
+              </a:rPr>
+              <a:t>分析結果</a:t>
+            </a:r>
+            <a:endParaRPr lang="en-US" dirty="0">
+              <a:latin typeface="Microsoft JhengHei UI" panose="020B0604030504040204" pitchFamily="34" charset="-120"/>
+              <a:ea typeface="Microsoft JhengHei UI" panose="020B0604030504040204" pitchFamily="34" charset="-120"/>
             </a:endParaRPr>
           </a:p>
         </p:txBody>
@@ -5926,6 +6140,97 @@
 </file>
 
 <file path=ppt/slides/slide13.xml><?xml version="1.0" encoding="utf-8"?>
+<p:sld xmlns:a="http://schemas.openxmlformats.org/drawingml/2006/main" xmlns:r="http://schemas.openxmlformats.org/officeDocument/2006/relationships" xmlns:p="http://schemas.openxmlformats.org/presentationml/2006/main">
+  <p:cSld>
+    <p:spTree>
+      <p:nvGrpSpPr>
+        <p:cNvPr id="1" name="">
+          <a:extLst>
+            <a:ext uri="{FF2B5EF4-FFF2-40B4-BE49-F238E27FC236}">
+              <a16:creationId xmlns:a16="http://schemas.microsoft.com/office/drawing/2014/main" id="{524B115D-3ED9-10A0-2579-244992FD5100}"/>
+            </a:ext>
+          </a:extLst>
+        </p:cNvPr>
+        <p:cNvGrpSpPr/>
+        <p:nvPr/>
+      </p:nvGrpSpPr>
+      <p:grpSpPr>
+        <a:xfrm>
+          <a:off x="0" y="0"/>
+          <a:ext cx="0" cy="0"/>
+          <a:chOff x="0" y="0"/>
+          <a:chExt cx="0" cy="0"/>
+        </a:xfrm>
+      </p:grpSpPr>
+      <p:sp>
+        <p:nvSpPr>
+          <p:cNvPr id="2" name="Title 1">
+            <a:extLst>
+              <a:ext uri="{FF2B5EF4-FFF2-40B4-BE49-F238E27FC236}">
+                <a16:creationId xmlns:a16="http://schemas.microsoft.com/office/drawing/2014/main" id="{843DDAB8-8064-AC71-A0F8-FAD0FA8D49AF}"/>
+              </a:ext>
+            </a:extLst>
+          </p:cNvPr>
+          <p:cNvSpPr>
+            <a:spLocks noGrp="1"/>
+          </p:cNvSpPr>
+          <p:nvPr>
+            <p:ph type="title"/>
+          </p:nvPr>
+        </p:nvSpPr>
+        <p:spPr>
+          <a:xfrm>
+            <a:off x="838200" y="2766218"/>
+            <a:ext cx="10597816" cy="1325563"/>
+          </a:xfrm>
+        </p:spPr>
+        <p:txBody>
+          <a:bodyPr/>
+          <a:lstStyle/>
+          <a:p>
+            <a:pPr algn="ctr"/>
+            <a:r>
+              <a:rPr lang="zh-TW" altLang="en-US" dirty="0">
+                <a:latin typeface="Microsoft JhengHei UI" panose="020B0604030504040204" pitchFamily="34" charset="-120"/>
+                <a:ea typeface="Microsoft JhengHei UI" panose="020B0604030504040204" pitchFamily="34" charset="-120"/>
+              </a:rPr>
+              <a:t>不同群體的臨時取消行為</a:t>
+            </a:r>
+            <a:r>
+              <a:rPr lang="en-US" altLang="zh-TW" dirty="0">
+                <a:latin typeface="Microsoft JhengHei UI" panose="020B0604030504040204" pitchFamily="34" charset="-120"/>
+                <a:ea typeface="Microsoft JhengHei UI" panose="020B0604030504040204" pitchFamily="34" charset="-120"/>
+              </a:rPr>
+              <a:t>Tableau</a:t>
+            </a:r>
+            <a:r>
+              <a:rPr lang="zh-TW" altLang="en-US" dirty="0">
+                <a:latin typeface="Microsoft JhengHei UI" panose="020B0604030504040204" pitchFamily="34" charset="-120"/>
+                <a:ea typeface="Microsoft JhengHei UI" panose="020B0604030504040204" pitchFamily="34" charset="-120"/>
+              </a:rPr>
+              <a:t>分析</a:t>
+            </a:r>
+            <a:endParaRPr lang="en-US" dirty="0">
+              <a:latin typeface="Microsoft JhengHei UI" panose="020B0604030504040204" pitchFamily="34" charset="-120"/>
+              <a:ea typeface="Microsoft JhengHei UI" panose="020B0604030504040204" pitchFamily="34" charset="-120"/>
+            </a:endParaRPr>
+          </a:p>
+        </p:txBody>
+      </p:sp>
+    </p:spTree>
+    <p:extLst>
+      <p:ext uri="{BB962C8B-B14F-4D97-AF65-F5344CB8AC3E}">
+        <p14:creationId xmlns:p14="http://schemas.microsoft.com/office/powerpoint/2010/main" val="1040067335"/>
+      </p:ext>
+    </p:extLst>
+  </p:cSld>
+  <p:clrMapOvr>
+    <a:masterClrMapping/>
+  </p:clrMapOvr>
+</p:sld>
+</file>
+
+<file path=ppt/slides/slide14.xml><?xml version="1.0" encoding="utf-8"?>
 <p:sld xmlns:a="http://schemas.openxmlformats.org/drawingml/2006/main" xmlns:r="http://schemas.openxmlformats.org/officeDocument/2006/relationships" xmlns:p="http://schemas.openxmlformats.org/presentationml/2006/main">
   <p:cSld>
     <p:bg>
@@ -6212,177 +6517,6 @@
 </p:sld>
 </file>
 
-<file path=ppt/slides/slide14.xml><?xml version="1.0" encoding="utf-8"?>
-<p:sld xmlns:a="http://schemas.openxmlformats.org/drawingml/2006/main" xmlns:r="http://schemas.openxmlformats.org/officeDocument/2006/relationships" xmlns:p="http://schemas.openxmlformats.org/presentationml/2006/main">
-  <p:cSld>
-    <p:spTree>
-      <p:nvGrpSpPr>
-        <p:cNvPr id="1" name=""/>
-        <p:cNvGrpSpPr/>
-        <p:nvPr/>
-      </p:nvGrpSpPr>
-      <p:grpSpPr>
-        <a:xfrm>
-          <a:off x="0" y="0"/>
-          <a:ext cx="0" cy="0"/>
-          <a:chOff x="0" y="0"/>
-          <a:chExt cx="0" cy="0"/>
-        </a:xfrm>
-      </p:grpSpPr>
-      <p:sp>
-        <p:nvSpPr>
-          <p:cNvPr id="2" name="Title 1">
-            <a:extLst>
-              <a:ext uri="{FF2B5EF4-FFF2-40B4-BE49-F238E27FC236}">
-                <a16:creationId xmlns:a16="http://schemas.microsoft.com/office/drawing/2014/main" id="{7E88B3D0-99B7-6F46-4AD9-9BB5D2AE6F58}"/>
-              </a:ext>
-            </a:extLst>
-          </p:cNvPr>
-          <p:cNvSpPr>
-            <a:spLocks noGrp="1"/>
-          </p:cNvSpPr>
-          <p:nvPr>
-            <p:ph type="title"/>
-          </p:nvPr>
-        </p:nvSpPr>
-        <p:spPr/>
-        <p:txBody>
-          <a:bodyPr/>
-          <a:lstStyle/>
-          <a:p>
-            <a:r>
-              <a:rPr lang="zh-TW" altLang="en-US" dirty="0"/>
-              <a:t>不同群體的臨時取消行為分析</a:t>
-            </a:r>
-            <a:endParaRPr lang="en-US" dirty="0"/>
-          </a:p>
-        </p:txBody>
-      </p:sp>
-      <p:sp>
-        <p:nvSpPr>
-          <p:cNvPr id="3" name="Content Placeholder 2">
-            <a:extLst>
-              <a:ext uri="{FF2B5EF4-FFF2-40B4-BE49-F238E27FC236}">
-                <a16:creationId xmlns:a16="http://schemas.microsoft.com/office/drawing/2014/main" id="{F6651727-B30E-9C33-D1B2-173851443730}"/>
-              </a:ext>
-            </a:extLst>
-          </p:cNvPr>
-          <p:cNvSpPr>
-            <a:spLocks noGrp="1"/>
-          </p:cNvSpPr>
-          <p:nvPr>
-            <p:ph idx="1"/>
-          </p:nvPr>
-        </p:nvSpPr>
-        <p:spPr/>
-        <p:txBody>
-          <a:bodyPr>
-            <a:normAutofit/>
-          </a:bodyPr>
-          <a:lstStyle/>
-          <a:p>
-            <a:pPr>
-              <a:lnSpc>
-                <a:spcPct val="150000"/>
-              </a:lnSpc>
-            </a:pPr>
-            <a:r>
-              <a:rPr lang="zh-TW" altLang="en-US" dirty="0">
-                <a:latin typeface="+mn-ea"/>
-              </a:rPr>
-              <a:t>國家：部分國家臨時取消率高，可能與各地市場習慣、旅遊文化有關。</a:t>
-            </a:r>
-            <a:endParaRPr lang="en-US" altLang="zh-TW" dirty="0">
-              <a:latin typeface="+mn-ea"/>
-            </a:endParaRPr>
-          </a:p>
-          <a:p>
-            <a:pPr>
-              <a:lnSpc>
-                <a:spcPct val="150000"/>
-              </a:lnSpc>
-            </a:pPr>
-            <a:r>
-              <a:rPr lang="zh-TW" altLang="en-US" dirty="0">
-                <a:latin typeface="+mn-ea"/>
-              </a:rPr>
-              <a:t>訂房渠道 ：旅行社</a:t>
-            </a:r>
-            <a:r>
-              <a:rPr lang="en-US" altLang="zh-TW" dirty="0">
-                <a:latin typeface="+mn-ea"/>
-              </a:rPr>
-              <a:t>/</a:t>
-            </a:r>
-            <a:r>
-              <a:rPr lang="zh-TW" altLang="en-US" dirty="0">
-                <a:latin typeface="+mn-ea"/>
-              </a:rPr>
-              <a:t>代理（</a:t>
-            </a:r>
-            <a:r>
-              <a:rPr lang="en-US" dirty="0">
-                <a:latin typeface="+mn-ea"/>
-              </a:rPr>
-              <a:t>TA/TO </a:t>
-            </a:r>
-            <a:r>
-              <a:rPr lang="zh-TW" altLang="en-US" dirty="0">
-                <a:latin typeface="+mn-ea"/>
-              </a:rPr>
-              <a:t>）臨時取消率較低</a:t>
-            </a:r>
-            <a:endParaRPr lang="en-US" dirty="0">
-              <a:latin typeface="+mn-ea"/>
-            </a:endParaRPr>
-          </a:p>
-          <a:p>
-            <a:pPr>
-              <a:lnSpc>
-                <a:spcPct val="150000"/>
-              </a:lnSpc>
-            </a:pPr>
-            <a:r>
-              <a:rPr lang="zh-TW" altLang="en-US" dirty="0">
-                <a:latin typeface="+mn-ea"/>
-              </a:rPr>
-              <a:t>訂金：訂金有效降低臨時取消數量</a:t>
-            </a:r>
-            <a:endParaRPr lang="en-US" altLang="zh-TW" dirty="0">
-              <a:latin typeface="+mn-ea"/>
-            </a:endParaRPr>
-          </a:p>
-          <a:p>
-            <a:pPr>
-              <a:lnSpc>
-                <a:spcPct val="150000"/>
-              </a:lnSpc>
-            </a:pPr>
-            <a:r>
-              <a:rPr lang="zh-TW" altLang="en-US" dirty="0">
-                <a:latin typeface="+mn-ea"/>
-              </a:rPr>
-              <a:t>其他族群對臨時取消的差異不大。</a:t>
-            </a:r>
-            <a:endParaRPr lang="en-US" altLang="zh-TW" dirty="0">
-              <a:latin typeface="+mn-ea"/>
-            </a:endParaRPr>
-          </a:p>
-        </p:txBody>
-      </p:sp>
-    </p:spTree>
-    <p:extLst>
-      <p:ext uri="{BB962C8B-B14F-4D97-AF65-F5344CB8AC3E}">
-        <p14:creationId xmlns:p14="http://schemas.microsoft.com/office/powerpoint/2010/main" val="754755178"/>
-      </p:ext>
-    </p:extLst>
-  </p:cSld>
-  <p:clrMapOvr>
-    <a:masterClrMapping/>
-  </p:clrMapOvr>
-</p:sld>
-</file>
-
 <file path=ppt/slides/slide15.xml><?xml version="1.0" encoding="utf-8"?>
 <p:sld xmlns:a="http://schemas.openxmlformats.org/drawingml/2006/main" xmlns:r="http://schemas.openxmlformats.org/officeDocument/2006/relationships" xmlns:p="http://schemas.openxmlformats.org/presentationml/2006/main">
   <p:cSld>
@@ -6405,7 +6539,7 @@
           <p:cNvPr id="2" name="Title 1">
             <a:extLst>
               <a:ext uri="{FF2B5EF4-FFF2-40B4-BE49-F238E27FC236}">
-                <a16:creationId xmlns:a16="http://schemas.microsoft.com/office/drawing/2014/main" id="{155BDB7C-438E-292E-0CB3-05C82FEC437A}"/>
+                <a16:creationId xmlns:a16="http://schemas.microsoft.com/office/drawing/2014/main" id="{7E88B3D0-99B7-6F46-4AD9-9BB5D2AE6F58}"/>
               </a:ext>
             </a:extLst>
           </p:cNvPr>
@@ -6422,10 +6556,16 @@
           <a:lstStyle/>
           <a:p>
             <a:r>
-              <a:rPr lang="en-US" dirty="0" err="1"/>
-              <a:t>專注於取消訂房的分析</a:t>
-            </a:r>
-            <a:endParaRPr lang="en-US" dirty="0"/>
+              <a:rPr lang="zh-TW" altLang="en-US" dirty="0">
+                <a:latin typeface="Microsoft JhengHei UI" panose="020B0604030504040204" pitchFamily="34" charset="-120"/>
+                <a:ea typeface="Microsoft JhengHei UI" panose="020B0604030504040204" pitchFamily="34" charset="-120"/>
+              </a:rPr>
+              <a:t>分析結果</a:t>
+            </a:r>
+            <a:endParaRPr lang="en-US" dirty="0">
+              <a:latin typeface="Microsoft JhengHei UI" panose="020B0604030504040204" pitchFamily="34" charset="-120"/>
+              <a:ea typeface="Microsoft JhengHei UI" panose="020B0604030504040204" pitchFamily="34" charset="-120"/>
+            </a:endParaRPr>
           </a:p>
         </p:txBody>
       </p:sp>
@@ -6434,7 +6574,7 @@
           <p:cNvPr id="3" name="Content Placeholder 2">
             <a:extLst>
               <a:ext uri="{FF2B5EF4-FFF2-40B4-BE49-F238E27FC236}">
-                <a16:creationId xmlns:a16="http://schemas.microsoft.com/office/drawing/2014/main" id="{881D96CC-7BE1-CEE9-07E2-E9B87E4DA6BA}"/>
+                <a16:creationId xmlns:a16="http://schemas.microsoft.com/office/drawing/2014/main" id="{F6651727-B30E-9C33-D1B2-173851443730}"/>
               </a:ext>
             </a:extLst>
           </p:cNvPr>
@@ -6447,7 +6587,9 @@
         </p:nvSpPr>
         <p:spPr/>
         <p:txBody>
-          <a:bodyPr/>
+          <a:bodyPr>
+            <a:normAutofit/>
+          </a:bodyPr>
           <a:lstStyle/>
           <a:p>
             <a:pPr>
@@ -6456,10 +6598,16 @@
               </a:lnSpc>
             </a:pPr>
             <a:r>
-              <a:rPr lang="en-US" dirty="0" err="1"/>
-              <a:t>臨時取消佔比極小</a:t>
-            </a:r>
-            <a:endParaRPr lang="en-US" dirty="0"/>
+              <a:rPr lang="zh-TW" altLang="en-US" dirty="0">
+                <a:latin typeface="Microsoft JhengHei UI" panose="020B0604030504040204" pitchFamily="34" charset="-120"/>
+                <a:ea typeface="Microsoft JhengHei UI" panose="020B0604030504040204" pitchFamily="34" charset="-120"/>
+              </a:rPr>
+              <a:t>國家：部分國家臨時取消率高，可能與各地市場習慣、旅遊文化有關。</a:t>
+            </a:r>
+            <a:endParaRPr lang="en-US" altLang="zh-TW" dirty="0">
+              <a:latin typeface="Microsoft JhengHei UI" panose="020B0604030504040204" pitchFamily="34" charset="-120"/>
+              <a:ea typeface="Microsoft JhengHei UI" panose="020B0604030504040204" pitchFamily="34" charset="-120"/>
+            </a:endParaRPr>
           </a:p>
           <a:p>
             <a:pPr>
@@ -6468,10 +6616,44 @@
               </a:lnSpc>
             </a:pPr>
             <a:r>
-              <a:rPr lang="en-US" dirty="0" err="1"/>
-              <a:t>目前臨時取消策略有效</a:t>
-            </a:r>
-            <a:endParaRPr lang="en-US" dirty="0"/>
+              <a:rPr lang="zh-TW" altLang="en-US" dirty="0">
+                <a:latin typeface="Microsoft JhengHei UI" panose="020B0604030504040204" pitchFamily="34" charset="-120"/>
+                <a:ea typeface="Microsoft JhengHei UI" panose="020B0604030504040204" pitchFamily="34" charset="-120"/>
+              </a:rPr>
+              <a:t>訂房渠道 ：旅行社</a:t>
+            </a:r>
+            <a:r>
+              <a:rPr lang="en-US" altLang="zh-TW" dirty="0">
+                <a:latin typeface="Microsoft JhengHei UI" panose="020B0604030504040204" pitchFamily="34" charset="-120"/>
+                <a:ea typeface="Microsoft JhengHei UI" panose="020B0604030504040204" pitchFamily="34" charset="-120"/>
+              </a:rPr>
+              <a:t>/</a:t>
+            </a:r>
+            <a:r>
+              <a:rPr lang="zh-TW" altLang="en-US" dirty="0">
+                <a:latin typeface="Microsoft JhengHei UI" panose="020B0604030504040204" pitchFamily="34" charset="-120"/>
+                <a:ea typeface="Microsoft JhengHei UI" panose="020B0604030504040204" pitchFamily="34" charset="-120"/>
+              </a:rPr>
+              <a:t>代理（</a:t>
+            </a:r>
+            <a:r>
+              <a:rPr lang="en-US" dirty="0">
+                <a:latin typeface="Microsoft JhengHei UI" panose="020B0604030504040204" pitchFamily="34" charset="-120"/>
+                <a:ea typeface="Microsoft JhengHei UI" panose="020B0604030504040204" pitchFamily="34" charset="-120"/>
+              </a:rPr>
+              <a:t>TA/TO </a:t>
+            </a:r>
+            <a:r>
+              <a:rPr lang="zh-TW" altLang="en-US" dirty="0">
+                <a:latin typeface="Microsoft JhengHei UI" panose="020B0604030504040204" pitchFamily="34" charset="-120"/>
+                <a:ea typeface="Microsoft JhengHei UI" panose="020B0604030504040204" pitchFamily="34" charset="-120"/>
+              </a:rPr>
+              <a:t>）臨時取消率較低</a:t>
+            </a:r>
+            <a:endParaRPr lang="en-US" dirty="0">
+              <a:latin typeface="Microsoft JhengHei UI" panose="020B0604030504040204" pitchFamily="34" charset="-120"/>
+              <a:ea typeface="Microsoft JhengHei UI" panose="020B0604030504040204" pitchFamily="34" charset="-120"/>
+            </a:endParaRPr>
           </a:p>
           <a:p>
             <a:pPr>
@@ -6480,17 +6662,41 @@
               </a:lnSpc>
             </a:pPr>
             <a:r>
-              <a:rPr lang="en-US" dirty="0" err="1"/>
-              <a:t>分群差異不大</a:t>
-            </a:r>
-            <a:endParaRPr lang="en-US" dirty="0"/>
+              <a:rPr lang="zh-TW" altLang="en-US" dirty="0">
+                <a:latin typeface="Microsoft JhengHei UI" panose="020B0604030504040204" pitchFamily="34" charset="-120"/>
+                <a:ea typeface="Microsoft JhengHei UI" panose="020B0604030504040204" pitchFamily="34" charset="-120"/>
+              </a:rPr>
+              <a:t>訂金：訂金有效降低臨時取消數量</a:t>
+            </a:r>
+            <a:endParaRPr lang="en-US" altLang="zh-TW" dirty="0">
+              <a:latin typeface="Microsoft JhengHei UI" panose="020B0604030504040204" pitchFamily="34" charset="-120"/>
+              <a:ea typeface="Microsoft JhengHei UI" panose="020B0604030504040204" pitchFamily="34" charset="-120"/>
+            </a:endParaRPr>
+          </a:p>
+          <a:p>
+            <a:pPr>
+              <a:lnSpc>
+                <a:spcPct val="150000"/>
+              </a:lnSpc>
+            </a:pPr>
+            <a:r>
+              <a:rPr lang="zh-TW" altLang="en-US" dirty="0">
+                <a:latin typeface="Microsoft JhengHei UI" panose="020B0604030504040204" pitchFamily="34" charset="-120"/>
+                <a:ea typeface="Microsoft JhengHei UI" panose="020B0604030504040204" pitchFamily="34" charset="-120"/>
+              </a:rPr>
+              <a:t>其他族群對臨時取消的差異不大。</a:t>
+            </a:r>
+            <a:endParaRPr lang="en-US" altLang="zh-TW" dirty="0">
+              <a:latin typeface="Microsoft JhengHei UI" panose="020B0604030504040204" pitchFamily="34" charset="-120"/>
+              <a:ea typeface="Microsoft JhengHei UI" panose="020B0604030504040204" pitchFamily="34" charset="-120"/>
+            </a:endParaRPr>
           </a:p>
         </p:txBody>
       </p:sp>
     </p:spTree>
     <p:extLst>
       <p:ext uri="{BB962C8B-B14F-4D97-AF65-F5344CB8AC3E}">
-        <p14:creationId xmlns:p14="http://schemas.microsoft.com/office/powerpoint/2010/main" val="2504353940"/>
+        <p14:creationId xmlns:p14="http://schemas.microsoft.com/office/powerpoint/2010/main" val="754755178"/>
       </p:ext>
     </p:extLst>
   </p:cSld>
@@ -6522,6 +6728,207 @@
           <p:cNvPr id="2" name="Title 1">
             <a:extLst>
               <a:ext uri="{FF2B5EF4-FFF2-40B4-BE49-F238E27FC236}">
+                <a16:creationId xmlns:a16="http://schemas.microsoft.com/office/drawing/2014/main" id="{155BDB7C-438E-292E-0CB3-05C82FEC437A}"/>
+              </a:ext>
+            </a:extLst>
+          </p:cNvPr>
+          <p:cNvSpPr>
+            <a:spLocks noGrp="1"/>
+          </p:cNvSpPr>
+          <p:nvPr>
+            <p:ph type="title"/>
+          </p:nvPr>
+        </p:nvSpPr>
+        <p:spPr/>
+        <p:txBody>
+          <a:bodyPr/>
+          <a:lstStyle/>
+          <a:p>
+            <a:r>
+              <a:rPr lang="zh-TW" altLang="en-US" dirty="0">
+                <a:latin typeface="Microsoft JhengHei UI" panose="020B0604030504040204" pitchFamily="34" charset="-120"/>
+                <a:ea typeface="Microsoft JhengHei UI" panose="020B0604030504040204" pitchFamily="34" charset="-120"/>
+              </a:rPr>
+              <a:t>結論</a:t>
+            </a:r>
+            <a:endParaRPr lang="en-US" dirty="0">
+              <a:latin typeface="Microsoft JhengHei UI" panose="020B0604030504040204" pitchFamily="34" charset="-120"/>
+              <a:ea typeface="Microsoft JhengHei UI" panose="020B0604030504040204" pitchFamily="34" charset="-120"/>
+            </a:endParaRPr>
+          </a:p>
+        </p:txBody>
+      </p:sp>
+      <p:sp>
+        <p:nvSpPr>
+          <p:cNvPr id="3" name="Content Placeholder 2">
+            <a:extLst>
+              <a:ext uri="{FF2B5EF4-FFF2-40B4-BE49-F238E27FC236}">
+                <a16:creationId xmlns:a16="http://schemas.microsoft.com/office/drawing/2014/main" id="{881D96CC-7BE1-CEE9-07E2-E9B87E4DA6BA}"/>
+              </a:ext>
+            </a:extLst>
+          </p:cNvPr>
+          <p:cNvSpPr>
+            <a:spLocks noGrp="1"/>
+          </p:cNvSpPr>
+          <p:nvPr>
+            <p:ph idx="1"/>
+          </p:nvPr>
+        </p:nvSpPr>
+        <p:spPr/>
+        <p:txBody>
+          <a:bodyPr/>
+          <a:lstStyle/>
+          <a:p>
+            <a:pPr>
+              <a:lnSpc>
+                <a:spcPct val="150000"/>
+              </a:lnSpc>
+            </a:pPr>
+            <a:r>
+              <a:rPr lang="en-US" dirty="0" err="1">
+                <a:latin typeface="Microsoft JhengHei UI" panose="020B0604030504040204" pitchFamily="34" charset="-120"/>
+                <a:ea typeface="Microsoft JhengHei UI" panose="020B0604030504040204" pitchFamily="34" charset="-120"/>
+              </a:rPr>
+              <a:t>專注於取消訂房</a:t>
+            </a:r>
+            <a:r>
+              <a:rPr lang="zh-TW" altLang="en-US" dirty="0">
+                <a:latin typeface="Microsoft JhengHei UI" panose="020B0604030504040204" pitchFamily="34" charset="-120"/>
+                <a:ea typeface="Microsoft JhengHei UI" panose="020B0604030504040204" pitchFamily="34" charset="-120"/>
+              </a:rPr>
+              <a:t>而非臨時取消訂房</a:t>
+            </a:r>
+            <a:r>
+              <a:rPr lang="en-US" dirty="0" err="1">
+                <a:latin typeface="Microsoft JhengHei UI" panose="020B0604030504040204" pitchFamily="34" charset="-120"/>
+                <a:ea typeface="Microsoft JhengHei UI" panose="020B0604030504040204" pitchFamily="34" charset="-120"/>
+              </a:rPr>
+              <a:t>的分析</a:t>
+            </a:r>
+            <a:endParaRPr lang="en-US" dirty="0">
+              <a:latin typeface="Microsoft JhengHei UI" panose="020B0604030504040204" pitchFamily="34" charset="-120"/>
+              <a:ea typeface="Microsoft JhengHei UI" panose="020B0604030504040204" pitchFamily="34" charset="-120"/>
+            </a:endParaRPr>
+          </a:p>
+          <a:p>
+            <a:pPr lvl="1">
+              <a:lnSpc>
+                <a:spcPct val="150000"/>
+              </a:lnSpc>
+            </a:pPr>
+            <a:r>
+              <a:rPr lang="en-US" dirty="0" err="1">
+                <a:latin typeface="Microsoft JhengHei UI" panose="020B0604030504040204" pitchFamily="34" charset="-120"/>
+                <a:ea typeface="Microsoft JhengHei UI" panose="020B0604030504040204" pitchFamily="34" charset="-120"/>
+              </a:rPr>
+              <a:t>臨時取消佔比極小</a:t>
+            </a:r>
+            <a:endParaRPr lang="en-US" dirty="0">
+              <a:latin typeface="Microsoft JhengHei UI" panose="020B0604030504040204" pitchFamily="34" charset="-120"/>
+              <a:ea typeface="Microsoft JhengHei UI" panose="020B0604030504040204" pitchFamily="34" charset="-120"/>
+            </a:endParaRPr>
+          </a:p>
+          <a:p>
+            <a:pPr lvl="1">
+              <a:lnSpc>
+                <a:spcPct val="150000"/>
+              </a:lnSpc>
+            </a:pPr>
+            <a:r>
+              <a:rPr lang="en-US" dirty="0" err="1">
+                <a:latin typeface="Microsoft JhengHei UI" panose="020B0604030504040204" pitchFamily="34" charset="-120"/>
+                <a:ea typeface="Microsoft JhengHei UI" panose="020B0604030504040204" pitchFamily="34" charset="-120"/>
+              </a:rPr>
+              <a:t>目前臨時取消策略有效</a:t>
+            </a:r>
+            <a:endParaRPr lang="en-US" dirty="0">
+              <a:latin typeface="Microsoft JhengHei UI" panose="020B0604030504040204" pitchFamily="34" charset="-120"/>
+              <a:ea typeface="Microsoft JhengHei UI" panose="020B0604030504040204" pitchFamily="34" charset="-120"/>
+            </a:endParaRPr>
+          </a:p>
+          <a:p>
+            <a:pPr lvl="1">
+              <a:lnSpc>
+                <a:spcPct val="150000"/>
+              </a:lnSpc>
+            </a:pPr>
+            <a:r>
+              <a:rPr lang="en-US" dirty="0" err="1">
+                <a:latin typeface="Microsoft JhengHei UI" panose="020B0604030504040204" pitchFamily="34" charset="-120"/>
+                <a:ea typeface="Microsoft JhengHei UI" panose="020B0604030504040204" pitchFamily="34" charset="-120"/>
+              </a:rPr>
+              <a:t>臨時取消</a:t>
+            </a:r>
+            <a:r>
+              <a:rPr lang="zh-TW" altLang="en-US" dirty="0">
+                <a:latin typeface="Microsoft JhengHei UI" panose="020B0604030504040204" pitchFamily="34" charset="-120"/>
+                <a:ea typeface="Microsoft JhengHei UI" panose="020B0604030504040204" pitchFamily="34" charset="-120"/>
+              </a:rPr>
+              <a:t>於各</a:t>
+            </a:r>
+            <a:r>
+              <a:rPr lang="en-US" dirty="0" err="1">
+                <a:latin typeface="Microsoft JhengHei UI" panose="020B0604030504040204" pitchFamily="34" charset="-120"/>
+                <a:ea typeface="Microsoft JhengHei UI" panose="020B0604030504040204" pitchFamily="34" charset="-120"/>
+              </a:rPr>
+              <a:t>分群</a:t>
+            </a:r>
+            <a:r>
+              <a:rPr lang="zh-TW" altLang="en-US" dirty="0">
+                <a:latin typeface="Microsoft JhengHei UI" panose="020B0604030504040204" pitchFamily="34" charset="-120"/>
+                <a:ea typeface="Microsoft JhengHei UI" panose="020B0604030504040204" pitchFamily="34" charset="-120"/>
+              </a:rPr>
+              <a:t>間</a:t>
+            </a:r>
+            <a:r>
+              <a:rPr lang="en-US" dirty="0" err="1">
+                <a:latin typeface="Microsoft JhengHei UI" panose="020B0604030504040204" pitchFamily="34" charset="-120"/>
+                <a:ea typeface="Microsoft JhengHei UI" panose="020B0604030504040204" pitchFamily="34" charset="-120"/>
+              </a:rPr>
+              <a:t>差異不大</a:t>
+            </a:r>
+            <a:endParaRPr lang="en-US" dirty="0">
+              <a:latin typeface="Microsoft JhengHei UI" panose="020B0604030504040204" pitchFamily="34" charset="-120"/>
+              <a:ea typeface="Microsoft JhengHei UI" panose="020B0604030504040204" pitchFamily="34" charset="-120"/>
+            </a:endParaRPr>
+          </a:p>
+        </p:txBody>
+      </p:sp>
+    </p:spTree>
+    <p:extLst>
+      <p:ext uri="{BB962C8B-B14F-4D97-AF65-F5344CB8AC3E}">
+        <p14:creationId xmlns:p14="http://schemas.microsoft.com/office/powerpoint/2010/main" val="2504353940"/>
+      </p:ext>
+    </p:extLst>
+  </p:cSld>
+  <p:clrMapOvr>
+    <a:masterClrMapping/>
+  </p:clrMapOvr>
+</p:sld>
+</file>
+
+<file path=ppt/slides/slide17.xml><?xml version="1.0" encoding="utf-8"?>
+<p:sld xmlns:a="http://schemas.openxmlformats.org/drawingml/2006/main" xmlns:r="http://schemas.openxmlformats.org/officeDocument/2006/relationships" xmlns:p="http://schemas.openxmlformats.org/presentationml/2006/main">
+  <p:cSld>
+    <p:spTree>
+      <p:nvGrpSpPr>
+        <p:cNvPr id="1" name=""/>
+        <p:cNvGrpSpPr/>
+        <p:nvPr/>
+      </p:nvGrpSpPr>
+      <p:grpSpPr>
+        <a:xfrm>
+          <a:off x="0" y="0"/>
+          <a:ext cx="0" cy="0"/>
+          <a:chOff x="0" y="0"/>
+          <a:chExt cx="0" cy="0"/>
+        </a:xfrm>
+      </p:grpSpPr>
+      <p:sp>
+        <p:nvSpPr>
+          <p:cNvPr id="2" name="Title 1">
+            <a:extLst>
+              <a:ext uri="{FF2B5EF4-FFF2-40B4-BE49-F238E27FC236}">
                 <a16:creationId xmlns:a16="http://schemas.microsoft.com/office/drawing/2014/main" id="{1BB7BCF1-7627-9A4C-CE17-E45EB94422EE}"/>
               </a:ext>
             </a:extLst>
@@ -6545,10 +6952,30 @@
           <a:p>
             <a:pPr algn="ctr"/>
             <a:r>
-              <a:rPr lang="zh-TW" altLang="en-US" dirty="0"/>
-              <a:t>不同群體的取消數量與佔比分析</a:t>
-            </a:r>
-            <a:endParaRPr lang="en-US" dirty="0"/>
+              <a:rPr lang="zh-TW" altLang="en-US" dirty="0">
+                <a:latin typeface="Microsoft JhengHei UI" panose="020B0604030504040204" pitchFamily="34" charset="-120"/>
+                <a:ea typeface="Microsoft JhengHei UI" panose="020B0604030504040204" pitchFamily="34" charset="-120"/>
+              </a:rPr>
+              <a:t>不同群體的取消數量與佔比</a:t>
+            </a:r>
+            <a:r>
+              <a:rPr lang="en-US" altLang="zh-TW" dirty="0">
+                <a:latin typeface="Microsoft JhengHei UI" panose="020B0604030504040204" pitchFamily="34" charset="-120"/>
+                <a:ea typeface="Microsoft JhengHei UI" panose="020B0604030504040204" pitchFamily="34" charset="-120"/>
+              </a:rPr>
+              <a:t>Tableau</a:t>
+            </a:r>
+            <a:r>
+              <a:rPr lang="zh-TW" altLang="en-US" dirty="0">
+                <a:latin typeface="Microsoft JhengHei UI" panose="020B0604030504040204" pitchFamily="34" charset="-120"/>
+                <a:ea typeface="Microsoft JhengHei UI" panose="020B0604030504040204" pitchFamily="34" charset="-120"/>
+              </a:rPr>
+              <a:t>分析</a:t>
+            </a:r>
+            <a:endParaRPr lang="en-US" dirty="0">
+              <a:latin typeface="Microsoft JhengHei UI" panose="020B0604030504040204" pitchFamily="34" charset="-120"/>
+              <a:ea typeface="Microsoft JhengHei UI" panose="020B0604030504040204" pitchFamily="34" charset="-120"/>
+            </a:endParaRPr>
           </a:p>
         </p:txBody>
       </p:sp>
@@ -6565,7 +6992,7 @@
 </p:sld>
 </file>
 
-<file path=ppt/slides/slide17.xml><?xml version="1.0" encoding="utf-8"?>
+<file path=ppt/slides/slide18.xml><?xml version="1.0" encoding="utf-8"?>
 <p:sld xmlns:a="http://schemas.openxmlformats.org/drawingml/2006/main" xmlns:r="http://schemas.openxmlformats.org/officeDocument/2006/relationships" xmlns:p="http://schemas.openxmlformats.org/presentationml/2006/main">
   <p:cSld>
     <p:spTree>
@@ -6703,7 +7130,7 @@
 </p:sld>
 </file>
 
-<file path=ppt/slides/slide18.xml><?xml version="1.0" encoding="utf-8"?>
+<file path=ppt/slides/slide19.xml><?xml version="1.0" encoding="utf-8"?>
 <p:sld xmlns:a="http://schemas.openxmlformats.org/drawingml/2006/main" xmlns:r="http://schemas.openxmlformats.org/officeDocument/2006/relationships" xmlns:p="http://schemas.openxmlformats.org/presentationml/2006/main">
   <p:cSld>
     <p:spTree>
@@ -6936,418 +7363,6 @@
 </p:sld>
 </file>
 
-<file path=ppt/slides/slide19.xml><?xml version="1.0" encoding="utf-8"?>
-<p:sld xmlns:a="http://schemas.openxmlformats.org/drawingml/2006/main" xmlns:r="http://schemas.openxmlformats.org/officeDocument/2006/relationships" xmlns:p="http://schemas.openxmlformats.org/presentationml/2006/main">
-  <p:cSld>
-    <p:spTree>
-      <p:nvGrpSpPr>
-        <p:cNvPr id="1" name=""/>
-        <p:cNvGrpSpPr/>
-        <p:nvPr/>
-      </p:nvGrpSpPr>
-      <p:grpSpPr>
-        <a:xfrm>
-          <a:off x="0" y="0"/>
-          <a:ext cx="0" cy="0"/>
-          <a:chOff x="0" y="0"/>
-          <a:chExt cx="0" cy="0"/>
-        </a:xfrm>
-      </p:grpSpPr>
-      <p:sp>
-        <p:nvSpPr>
-          <p:cNvPr id="2" name="Title 1">
-            <a:extLst>
-              <a:ext uri="{FF2B5EF4-FFF2-40B4-BE49-F238E27FC236}">
-                <a16:creationId xmlns:a16="http://schemas.microsoft.com/office/drawing/2014/main" id="{65F76772-DD69-D036-7525-3718C82D4AB4}"/>
-              </a:ext>
-            </a:extLst>
-          </p:cNvPr>
-          <p:cNvSpPr>
-            <a:spLocks noGrp="1"/>
-          </p:cNvSpPr>
-          <p:nvPr>
-            <p:ph type="title"/>
-          </p:nvPr>
-        </p:nvSpPr>
-        <p:spPr/>
-        <p:txBody>
-          <a:bodyPr/>
-          <a:lstStyle/>
-          <a:p>
-            <a:r>
-              <a:rPr lang="zh-TW" altLang="en-US" dirty="0"/>
-              <a:t>不同群體的取消數量與佔比分析</a:t>
-            </a:r>
-            <a:endParaRPr lang="en-US" dirty="0"/>
-          </a:p>
-        </p:txBody>
-      </p:sp>
-      <p:sp>
-        <p:nvSpPr>
-          <p:cNvPr id="3" name="Content Placeholder 2">
-            <a:extLst>
-              <a:ext uri="{FF2B5EF4-FFF2-40B4-BE49-F238E27FC236}">
-                <a16:creationId xmlns:a16="http://schemas.microsoft.com/office/drawing/2014/main" id="{B58321BA-A8A6-FC3D-EEE7-A2E722211324}"/>
-              </a:ext>
-            </a:extLst>
-          </p:cNvPr>
-          <p:cNvSpPr>
-            <a:spLocks noGrp="1"/>
-          </p:cNvSpPr>
-          <p:nvPr>
-            <p:ph idx="1"/>
-          </p:nvPr>
-        </p:nvSpPr>
-        <p:spPr/>
-        <p:txBody>
-          <a:bodyPr>
-            <a:normAutofit fontScale="77500" lnSpcReduction="20000"/>
-          </a:bodyPr>
-          <a:lstStyle/>
-          <a:p>
-            <a:pPr>
-              <a:lnSpc>
-                <a:spcPct val="150000"/>
-              </a:lnSpc>
-            </a:pPr>
-            <a:r>
-              <a:rPr lang="en-US" dirty="0" err="1">
-                <a:latin typeface="+mn-ea"/>
-              </a:rPr>
-              <a:t>取消量與取消率較高的分群類別</a:t>
-            </a:r>
-            <a:r>
-              <a:rPr lang="en-US" dirty="0">
-                <a:latin typeface="+mn-ea"/>
-              </a:rPr>
-              <a:t>：</a:t>
-            </a:r>
-          </a:p>
-          <a:p>
-            <a:pPr lvl="1">
-              <a:lnSpc>
-                <a:spcPct val="150000"/>
-              </a:lnSpc>
-            </a:pPr>
-            <a:r>
-              <a:rPr lang="en-US" dirty="0" err="1">
-                <a:latin typeface="+mn-ea"/>
-              </a:rPr>
-              <a:t>國家</a:t>
-            </a:r>
-            <a:r>
-              <a:rPr lang="en-US" dirty="0">
-                <a:latin typeface="+mn-ea"/>
-              </a:rPr>
-              <a:t>：</a:t>
-            </a:r>
-            <a:r>
-              <a:rPr lang="zh-TW" altLang="en-US" dirty="0">
-                <a:latin typeface="+mn-ea"/>
-              </a:rPr>
-              <a:t>葡萄牙</a:t>
-            </a:r>
-            <a:r>
-              <a:rPr lang="en-US" altLang="zh-TW" dirty="0">
-                <a:latin typeface="+mn-ea"/>
-              </a:rPr>
-              <a:t> (PRT)</a:t>
-            </a:r>
-          </a:p>
-          <a:p>
-            <a:pPr lvl="1">
-              <a:lnSpc>
-                <a:spcPct val="150000"/>
-              </a:lnSpc>
-            </a:pPr>
-            <a:r>
-              <a:rPr lang="en-US" dirty="0" err="1">
-                <a:latin typeface="+mn-ea"/>
-              </a:rPr>
-              <a:t>通路</a:t>
-            </a:r>
-            <a:r>
-              <a:rPr lang="en-US" altLang="zh-TW" dirty="0">
-                <a:latin typeface="+mn-ea"/>
-              </a:rPr>
-              <a:t>:</a:t>
-            </a:r>
-            <a:r>
-              <a:rPr lang="zh-TW" altLang="en-US" dirty="0">
-                <a:latin typeface="+mn-ea"/>
-              </a:rPr>
-              <a:t> 旅行社 </a:t>
-            </a:r>
-            <a:r>
-              <a:rPr lang="en-US" altLang="zh-TW" dirty="0">
-                <a:latin typeface="+mn-ea"/>
-              </a:rPr>
-              <a:t>/ </a:t>
-            </a:r>
-            <a:r>
-              <a:rPr lang="zh-TW" altLang="en-US" dirty="0">
-                <a:latin typeface="+mn-ea"/>
-              </a:rPr>
-              <a:t>旅遊代理 </a:t>
-            </a:r>
-            <a:r>
-              <a:rPr lang="en-US" altLang="zh-TW" dirty="0">
-                <a:latin typeface="+mn-ea"/>
-                <a:sym typeface="Wingdings" pitchFamily="2" charset="2"/>
-              </a:rPr>
-              <a:t>(</a:t>
-            </a:r>
-            <a:r>
-              <a:rPr lang="en-US" dirty="0">
-                <a:latin typeface="+mn-ea"/>
-              </a:rPr>
-              <a:t>TA/TO</a:t>
-            </a:r>
-            <a:r>
-              <a:rPr lang="en-US" altLang="zh-TW" dirty="0">
-                <a:latin typeface="+mn-ea"/>
-              </a:rPr>
-              <a:t>)</a:t>
-            </a:r>
-            <a:endParaRPr lang="en-US" dirty="0">
-              <a:latin typeface="+mn-ea"/>
-            </a:endParaRPr>
-          </a:p>
-          <a:p>
-            <a:pPr lvl="1">
-              <a:lnSpc>
-                <a:spcPct val="150000"/>
-              </a:lnSpc>
-            </a:pPr>
-            <a:r>
-              <a:rPr lang="en-US" sz="2400" dirty="0" err="1">
-                <a:latin typeface="+mn-ea"/>
-              </a:rPr>
-              <a:t>客戶類型</a:t>
-            </a:r>
-            <a:r>
-              <a:rPr lang="en-US" sz="2400" dirty="0">
-                <a:latin typeface="+mn-ea"/>
-              </a:rPr>
-              <a:t> </a:t>
-            </a:r>
-            <a:r>
-              <a:rPr lang="en-US" altLang="zh-TW" dirty="0">
-                <a:latin typeface="+mn-ea"/>
-              </a:rPr>
-              <a:t>:</a:t>
-            </a:r>
-            <a:r>
-              <a:rPr lang="zh-TW" altLang="en-US" dirty="0">
-                <a:latin typeface="+mn-ea"/>
-              </a:rPr>
-              <a:t> 散客 </a:t>
-            </a:r>
-            <a:r>
-              <a:rPr lang="en-US" altLang="zh-TW" dirty="0">
-                <a:latin typeface="+mn-ea"/>
-                <a:sym typeface="Wingdings" pitchFamily="2" charset="2"/>
-              </a:rPr>
-              <a:t>(</a:t>
-            </a:r>
-            <a:r>
-              <a:rPr lang="en-US" altLang="zh-TW" dirty="0">
-                <a:latin typeface="+mn-ea"/>
-              </a:rPr>
-              <a:t>Transient)</a:t>
-            </a:r>
-          </a:p>
-          <a:p>
-            <a:pPr lvl="1">
-              <a:lnSpc>
-                <a:spcPct val="150000"/>
-              </a:lnSpc>
-            </a:pPr>
-            <a:r>
-              <a:rPr lang="en-US" dirty="0" err="1">
-                <a:latin typeface="+mn-ea"/>
-              </a:rPr>
-              <a:t>回頭客：新客戶</a:t>
-            </a:r>
-            <a:r>
-              <a:rPr lang="en-US" altLang="zh-TW" dirty="0">
-                <a:latin typeface="+mn-ea"/>
-              </a:rPr>
-              <a:t>(0)</a:t>
-            </a:r>
-            <a:endParaRPr lang="en-US" dirty="0">
-              <a:latin typeface="+mn-ea"/>
-            </a:endParaRPr>
-          </a:p>
-          <a:p>
-            <a:pPr lvl="1">
-              <a:lnSpc>
-                <a:spcPct val="150000"/>
-              </a:lnSpc>
-            </a:pPr>
-            <a:r>
-              <a:rPr lang="en-US" altLang="zh-TW" sz="2400" dirty="0">
-                <a:latin typeface="+mn-ea"/>
-              </a:rPr>
-              <a:t>Python</a:t>
-            </a:r>
-            <a:r>
-              <a:rPr lang="zh-TW" altLang="en-US" sz="2400" dirty="0">
-                <a:latin typeface="+mn-ea"/>
-              </a:rPr>
-              <a:t>分群</a:t>
-            </a:r>
-            <a:r>
-              <a:rPr lang="en-US" dirty="0">
-                <a:latin typeface="+mn-ea"/>
-              </a:rPr>
-              <a:t>：</a:t>
-            </a:r>
-            <a:r>
-              <a:rPr lang="en-US" dirty="0" err="1">
-                <a:latin typeface="+mn-ea"/>
-              </a:rPr>
-              <a:t>商務短住</a:t>
-            </a:r>
-            <a:r>
-              <a:rPr lang="en-US" altLang="zh-TW" dirty="0">
-                <a:latin typeface="+mn-ea"/>
-              </a:rPr>
-              <a:t>(Business</a:t>
-            </a:r>
-            <a:r>
-              <a:rPr lang="zh-TW" altLang="en-US" dirty="0">
-                <a:latin typeface="+mn-ea"/>
-              </a:rPr>
-              <a:t> </a:t>
-            </a:r>
-            <a:r>
-              <a:rPr lang="en-US" altLang="zh-TW" dirty="0">
-                <a:latin typeface="+mn-ea"/>
-              </a:rPr>
-              <a:t>short-stay)</a:t>
-            </a:r>
-            <a:r>
-              <a:rPr lang="en-US" dirty="0">
-                <a:latin typeface="+mn-ea"/>
-              </a:rPr>
-              <a:t>、</a:t>
-            </a:r>
-            <a:r>
-              <a:rPr lang="en-US" dirty="0" err="1">
-                <a:latin typeface="+mn-ea"/>
-              </a:rPr>
-              <a:t>週末短住</a:t>
-            </a:r>
-            <a:r>
-              <a:rPr lang="en-US" altLang="zh-TW" dirty="0">
-                <a:latin typeface="+mn-ea"/>
-              </a:rPr>
-              <a:t>(Weekend</a:t>
-            </a:r>
-            <a:r>
-              <a:rPr lang="zh-TW" altLang="en-US" dirty="0">
-                <a:latin typeface="+mn-ea"/>
-              </a:rPr>
-              <a:t> </a:t>
-            </a:r>
-            <a:r>
-              <a:rPr lang="en-US" altLang="zh-TW" dirty="0">
-                <a:latin typeface="+mn-ea"/>
-              </a:rPr>
-              <a:t>short-stay)</a:t>
-            </a:r>
-            <a:endParaRPr lang="en-US" dirty="0">
-              <a:latin typeface="+mn-ea"/>
-            </a:endParaRPr>
-          </a:p>
-          <a:p>
-            <a:pPr>
-              <a:lnSpc>
-                <a:spcPct val="150000"/>
-              </a:lnSpc>
-            </a:pPr>
-            <a:r>
-              <a:rPr lang="en-US" dirty="0" err="1">
-                <a:latin typeface="+mn-ea"/>
-              </a:rPr>
-              <a:t>訂金</a:t>
-            </a:r>
-            <a:r>
-              <a:rPr lang="en-US" altLang="zh-TW" dirty="0">
-                <a:latin typeface="+mn-ea"/>
-              </a:rPr>
-              <a:t>(Deposit)</a:t>
-            </a:r>
-            <a:r>
-              <a:rPr lang="zh-TW" altLang="en-US" dirty="0">
-                <a:latin typeface="+mn-ea"/>
-              </a:rPr>
-              <a:t>制度效果不彰</a:t>
-            </a:r>
-            <a:endParaRPr lang="en-US" altLang="zh-TW" dirty="0">
-              <a:latin typeface="+mn-ea"/>
-            </a:endParaRPr>
-          </a:p>
-          <a:p>
-            <a:pPr lvl="1">
-              <a:lnSpc>
-                <a:spcPct val="150000"/>
-              </a:lnSpc>
-            </a:pPr>
-            <a:r>
-              <a:rPr lang="en-US" dirty="0" err="1">
-                <a:latin typeface="+mn-ea"/>
-              </a:rPr>
-              <a:t>是否收取分類機制</a:t>
-            </a:r>
-            <a:endParaRPr lang="en-US" dirty="0">
-              <a:latin typeface="+mn-ea"/>
-            </a:endParaRPr>
-          </a:p>
-          <a:p>
-            <a:pPr lvl="1">
-              <a:lnSpc>
-                <a:spcPct val="150000"/>
-              </a:lnSpc>
-            </a:pPr>
-            <a:r>
-              <a:rPr lang="en-US" dirty="0" err="1">
-                <a:latin typeface="+mn-ea"/>
-              </a:rPr>
-              <a:t>訂金金額</a:t>
-            </a:r>
-            <a:endParaRPr lang="en-US" dirty="0">
-              <a:latin typeface="+mn-ea"/>
-            </a:endParaRPr>
-          </a:p>
-          <a:p>
-            <a:pPr lvl="1"/>
-            <a:endParaRPr lang="en-US" dirty="0">
-              <a:latin typeface="+mn-ea"/>
-            </a:endParaRPr>
-          </a:p>
-          <a:p>
-            <a:pPr lvl="1"/>
-            <a:endParaRPr lang="en-US" dirty="0">
-              <a:latin typeface="+mn-ea"/>
-            </a:endParaRPr>
-          </a:p>
-        </p:txBody>
-      </p:sp>
-    </p:spTree>
-    <p:extLst>
-      <p:ext uri="{BB962C8B-B14F-4D97-AF65-F5344CB8AC3E}">
-        <p14:creationId xmlns:p14="http://schemas.microsoft.com/office/powerpoint/2010/main" val="4004750313"/>
-      </p:ext>
-    </p:extLst>
-  </p:cSld>
-  <p:clrMapOvr>
-    <a:masterClrMapping/>
-  </p:clrMapOvr>
-</p:sld>
-</file>
-
 <file path=ppt/slides/slide2.xml><?xml version="1.0" encoding="utf-8"?>
 <p:sld xmlns:a="http://schemas.openxmlformats.org/drawingml/2006/main" xmlns:r="http://schemas.openxmlformats.org/officeDocument/2006/relationships" xmlns:p="http://schemas.openxmlformats.org/presentationml/2006/main">
   <p:cSld>
@@ -7395,10 +7410,16 @@
           <a:p>
             <a:pPr algn="ctr"/>
             <a:r>
-              <a:rPr lang="en-US" sz="5400" dirty="0" err="1"/>
+              <a:rPr lang="en-US" sz="5400" dirty="0" err="1">
+                <a:latin typeface="Microsoft JhengHei UI" panose="020B0604030504040204" pitchFamily="34" charset="-120"/>
+                <a:ea typeface="Microsoft JhengHei UI" panose="020B0604030504040204" pitchFamily="34" charset="-120"/>
+              </a:rPr>
               <a:t>訂單取消類型比例圖</a:t>
             </a:r>
-            <a:endParaRPr lang="en-US" sz="5400" dirty="0"/>
+            <a:endParaRPr lang="en-US" sz="5400" dirty="0">
+              <a:latin typeface="Microsoft JhengHei UI" panose="020B0604030504040204" pitchFamily="34" charset="-120"/>
+              <a:ea typeface="Microsoft JhengHei UI" panose="020B0604030504040204" pitchFamily="34" charset="-120"/>
+            </a:endParaRPr>
           </a:p>
         </p:txBody>
       </p:sp>
@@ -7437,7 +7458,7 @@
           <p:cNvPr id="2" name="Title 1">
             <a:extLst>
               <a:ext uri="{FF2B5EF4-FFF2-40B4-BE49-F238E27FC236}">
-                <a16:creationId xmlns:a16="http://schemas.microsoft.com/office/drawing/2014/main" id="{629C63E9-B5A0-2364-170B-46501E5BD421}"/>
+                <a16:creationId xmlns:a16="http://schemas.microsoft.com/office/drawing/2014/main" id="{65F76772-DD69-D036-7525-3718C82D4AB4}"/>
               </a:ext>
             </a:extLst>
           </p:cNvPr>
@@ -7454,428 +7475,423 @@
           <a:lstStyle/>
           <a:p>
             <a:r>
-              <a:rPr lang="en-US" dirty="0" err="1"/>
-              <a:t>取消預測模型</a:t>
-            </a:r>
-            <a:endParaRPr lang="en-US" dirty="0"/>
+              <a:rPr lang="zh-TW" altLang="en-US" dirty="0">
+                <a:latin typeface="Microsoft JhengHei UI" panose="020B0604030504040204" pitchFamily="34" charset="-120"/>
+                <a:ea typeface="Microsoft JhengHei UI" panose="020B0604030504040204" pitchFamily="34" charset="-120"/>
+              </a:rPr>
+              <a:t>不同群體的取消數量與佔比分析</a:t>
+            </a:r>
+            <a:endParaRPr lang="en-US" dirty="0">
+              <a:latin typeface="Microsoft JhengHei UI" panose="020B0604030504040204" pitchFamily="34" charset="-120"/>
+              <a:ea typeface="Microsoft JhengHei UI" panose="020B0604030504040204" pitchFamily="34" charset="-120"/>
+            </a:endParaRPr>
           </a:p>
         </p:txBody>
       </p:sp>
-      <p:graphicFrame>
-        <p:nvGraphicFramePr>
-          <p:cNvPr id="3" name="Table 3">
-            <a:extLst>
-              <a:ext uri="{FF2B5EF4-FFF2-40B4-BE49-F238E27FC236}">
-                <a16:creationId xmlns:a16="http://schemas.microsoft.com/office/drawing/2014/main" id="{401237CA-6E99-A6E7-C685-BB443B61E54D}"/>
-              </a:ext>
-            </a:extLst>
-          </p:cNvPr>
-          <p:cNvGraphicFramePr>
-            <a:graphicFrameLocks noGrp="1"/>
-          </p:cNvGraphicFramePr>
+      <p:sp>
+        <p:nvSpPr>
+          <p:cNvPr id="3" name="Content Placeholder 2">
+            <a:extLst>
+              <a:ext uri="{FF2B5EF4-FFF2-40B4-BE49-F238E27FC236}">
+                <a16:creationId xmlns:a16="http://schemas.microsoft.com/office/drawing/2014/main" id="{B58321BA-A8A6-FC3D-EEE7-A2E722211324}"/>
+              </a:ext>
+            </a:extLst>
+          </p:cNvPr>
+          <p:cNvSpPr>
+            <a:spLocks noGrp="1"/>
+          </p:cNvSpPr>
           <p:nvPr>
-            <p:extLst>
-              <p:ext uri="{D42A27DB-BD31-4B8C-83A1-F6EECF244321}">
-                <p14:modId xmlns:p14="http://schemas.microsoft.com/office/powerpoint/2010/main" val="1204526242"/>
-              </p:ext>
-            </p:extLst>
+            <p:ph idx="1"/>
           </p:nvPr>
-        </p:nvGraphicFramePr>
-        <p:xfrm>
-          <a:off x="1636716" y="2249635"/>
-          <a:ext cx="8918568" cy="2358730"/>
-        </p:xfrm>
-        <a:graphic>
-          <a:graphicData uri="http://schemas.openxmlformats.org/drawingml/2006/table">
-            <a:tbl>
-              <a:tblPr firstRow="1" bandRow="1">
-                <a:tableStyleId>{5C22544A-7EE6-4342-B048-85BDC9FD1C3A}</a:tableStyleId>
-              </a:tblPr>
-              <a:tblGrid>
-                <a:gridCol w="2229642">
-                  <a:extLst>
-                    <a:ext uri="{9D8B030D-6E8A-4147-A177-3AD203B41FA5}">
-                      <a16:colId xmlns:a16="http://schemas.microsoft.com/office/drawing/2014/main" val="2440004961"/>
-                    </a:ext>
-                  </a:extLst>
-                </a:gridCol>
-                <a:gridCol w="2229642">
-                  <a:extLst>
-                    <a:ext uri="{9D8B030D-6E8A-4147-A177-3AD203B41FA5}">
-                      <a16:colId xmlns:a16="http://schemas.microsoft.com/office/drawing/2014/main" val="2510119324"/>
-                    </a:ext>
-                  </a:extLst>
-                </a:gridCol>
-                <a:gridCol w="2229642">
-                  <a:extLst>
-                    <a:ext uri="{9D8B030D-6E8A-4147-A177-3AD203B41FA5}">
-                      <a16:colId xmlns:a16="http://schemas.microsoft.com/office/drawing/2014/main" val="3066830093"/>
-                    </a:ext>
-                  </a:extLst>
-                </a:gridCol>
-                <a:gridCol w="2229642">
-                  <a:extLst>
-                    <a:ext uri="{9D8B030D-6E8A-4147-A177-3AD203B41FA5}">
-                      <a16:colId xmlns:a16="http://schemas.microsoft.com/office/drawing/2014/main" val="2070802007"/>
-                    </a:ext>
-                  </a:extLst>
-                </a:gridCol>
-              </a:tblGrid>
-              <a:tr h="471746">
-                <a:tc>
-                  <a:txBody>
-                    <a:bodyPr/>
-                    <a:lstStyle/>
-                    <a:p>
-                      <a:r>
-                        <a:rPr lang="en-US" altLang="zh-TW" dirty="0"/>
-                        <a:t>Model</a:t>
-                      </a:r>
-                      <a:endParaRPr lang="en-US" dirty="0"/>
-                    </a:p>
-                  </a:txBody>
-                  <a:tcPr/>
-                </a:tc>
-                <a:tc>
-                  <a:txBody>
-                    <a:bodyPr/>
-                    <a:lstStyle/>
-                    <a:p>
-                      <a:r>
-                        <a:rPr lang="en-US" altLang="zh-TW" dirty="0"/>
-                        <a:t>Accuracy</a:t>
-                      </a:r>
-                      <a:endParaRPr lang="en-US" dirty="0"/>
-                    </a:p>
-                  </a:txBody>
-                  <a:tcPr/>
-                </a:tc>
-                <a:tc>
-                  <a:txBody>
-                    <a:bodyPr/>
-                    <a:lstStyle/>
-                    <a:p>
-                      <a:r>
-                        <a:rPr lang="en-US" altLang="zh-TW" dirty="0"/>
-                        <a:t>Kappa</a:t>
-                      </a:r>
-                      <a:endParaRPr lang="en-US" dirty="0"/>
-                    </a:p>
-                  </a:txBody>
-                  <a:tcPr/>
-                </a:tc>
-                <a:tc>
-                  <a:txBody>
-                    <a:bodyPr/>
-                    <a:lstStyle/>
-                    <a:p>
-                      <a:r>
-                        <a:rPr lang="en-US" altLang="zh-TW" dirty="0"/>
-                        <a:t>AUC</a:t>
-                      </a:r>
-                      <a:endParaRPr lang="en-US" dirty="0"/>
-                    </a:p>
-                  </a:txBody>
-                  <a:tcPr/>
-                </a:tc>
-                <a:extLst>
-                  <a:ext uri="{0D108BD9-81ED-4DB2-BD59-A6C34878D82A}">
-                    <a16:rowId xmlns:a16="http://schemas.microsoft.com/office/drawing/2014/main" val="916272579"/>
-                  </a:ext>
-                </a:extLst>
-              </a:tr>
-              <a:tr h="471746">
-                <a:tc>
-                  <a:txBody>
-                    <a:bodyPr/>
-                    <a:lstStyle/>
-                    <a:p>
-                      <a:r>
-                        <a:rPr lang="en-US" altLang="zh-TW" dirty="0"/>
-                        <a:t>Logistic</a:t>
-                      </a:r>
-                      <a:r>
-                        <a:rPr lang="zh-TW" altLang="en-US" dirty="0"/>
-                        <a:t> </a:t>
-                      </a:r>
-                      <a:r>
-                        <a:rPr lang="en-US" altLang="zh-TW" dirty="0"/>
-                        <a:t>Regression</a:t>
-                      </a:r>
-                      <a:endParaRPr lang="en-US" dirty="0"/>
-                    </a:p>
-                  </a:txBody>
-                  <a:tcPr/>
-                </a:tc>
-                <a:tc>
-                  <a:txBody>
-                    <a:bodyPr/>
-                    <a:lstStyle/>
-                    <a:p>
-                      <a:r>
-                        <a:rPr lang="en-US" altLang="zh-TW" dirty="0"/>
-                        <a:t>0.7482</a:t>
-                      </a:r>
-                      <a:endParaRPr lang="en-US" dirty="0"/>
-                    </a:p>
-                  </a:txBody>
-                  <a:tcPr/>
-                </a:tc>
-                <a:tc>
-                  <a:txBody>
-                    <a:bodyPr/>
-                    <a:lstStyle/>
-                    <a:p>
-                      <a:r>
-                        <a:rPr lang="en-US" altLang="zh-TW" dirty="0"/>
-                        <a:t>0.375</a:t>
-                      </a:r>
-                      <a:endParaRPr lang="en-US" dirty="0"/>
-                    </a:p>
-                  </a:txBody>
-                  <a:tcPr/>
-                </a:tc>
-                <a:tc>
-                  <a:txBody>
-                    <a:bodyPr/>
-                    <a:lstStyle/>
-                    <a:p>
-                      <a:r>
-                        <a:rPr lang="en-US" altLang="zh-TW" dirty="0"/>
-                        <a:t>0.664</a:t>
-                      </a:r>
-                      <a:endParaRPr lang="en-US" dirty="0"/>
-                    </a:p>
-                  </a:txBody>
-                  <a:tcPr/>
-                </a:tc>
-                <a:extLst>
-                  <a:ext uri="{0D108BD9-81ED-4DB2-BD59-A6C34878D82A}">
-                    <a16:rowId xmlns:a16="http://schemas.microsoft.com/office/drawing/2014/main" val="2234108978"/>
-                  </a:ext>
-                </a:extLst>
-              </a:tr>
-              <a:tr h="471746">
-                <a:tc>
-                  <a:txBody>
-                    <a:bodyPr/>
-                    <a:lstStyle/>
-                    <a:p>
-                      <a:r>
-                        <a:rPr lang="en-US" altLang="zh-TW" dirty="0"/>
-                        <a:t>SVM</a:t>
-                      </a:r>
-                      <a:endParaRPr lang="en-US" dirty="0"/>
-                    </a:p>
-                  </a:txBody>
-                  <a:tcPr/>
-                </a:tc>
-                <a:tc>
-                  <a:txBody>
-                    <a:bodyPr/>
-                    <a:lstStyle/>
-                    <a:p>
-                      <a:r>
-                        <a:rPr lang="en-US" altLang="zh-TW" dirty="0"/>
-                        <a:t>0.748</a:t>
-                      </a:r>
-                      <a:endParaRPr lang="en-US" dirty="0"/>
-                    </a:p>
-                  </a:txBody>
-                  <a:tcPr/>
-                </a:tc>
-                <a:tc>
-                  <a:txBody>
-                    <a:bodyPr/>
-                    <a:lstStyle/>
-                    <a:p>
-                      <a:r>
-                        <a:rPr lang="en-US" altLang="zh-TW" dirty="0"/>
-                        <a:t>0.355</a:t>
-                      </a:r>
-                      <a:endParaRPr lang="en-US" dirty="0"/>
-                    </a:p>
-                  </a:txBody>
-                  <a:tcPr/>
-                </a:tc>
-                <a:tc>
-                  <a:txBody>
-                    <a:bodyPr/>
-                    <a:lstStyle/>
-                    <a:p>
-                      <a:r>
-                        <a:rPr lang="en-US" altLang="zh-TW" dirty="0"/>
-                        <a:t>0.650</a:t>
-                      </a:r>
-                      <a:endParaRPr lang="en-US" dirty="0"/>
-                    </a:p>
-                  </a:txBody>
-                  <a:tcPr/>
-                </a:tc>
-                <a:extLst>
-                  <a:ext uri="{0D108BD9-81ED-4DB2-BD59-A6C34878D82A}">
-                    <a16:rowId xmlns:a16="http://schemas.microsoft.com/office/drawing/2014/main" val="836089225"/>
-                  </a:ext>
-                </a:extLst>
-              </a:tr>
-              <a:tr h="471746">
-                <a:tc>
-                  <a:txBody>
-                    <a:bodyPr/>
-                    <a:lstStyle/>
-                    <a:p>
-                      <a:r>
-                        <a:rPr lang="en-US" altLang="zh-TW" dirty="0"/>
-                        <a:t>Random</a:t>
-                      </a:r>
-                      <a:r>
-                        <a:rPr lang="zh-TW" altLang="en-US" dirty="0"/>
-                        <a:t> </a:t>
-                      </a:r>
-                      <a:r>
-                        <a:rPr lang="en-US" altLang="zh-TW" dirty="0"/>
-                        <a:t>Forest</a:t>
-                      </a:r>
-                      <a:endParaRPr lang="en-US" dirty="0"/>
-                    </a:p>
-                  </a:txBody>
-                  <a:tcPr/>
-                </a:tc>
-                <a:tc>
-                  <a:txBody>
-                    <a:bodyPr/>
-                    <a:lstStyle/>
-                    <a:p>
-                      <a:r>
-                        <a:rPr lang="en-US" altLang="zh-TW" dirty="0"/>
-                        <a:t>0.749</a:t>
-                      </a:r>
-                      <a:endParaRPr lang="en-US" dirty="0"/>
-                    </a:p>
-                  </a:txBody>
-                  <a:tcPr/>
-                </a:tc>
-                <a:tc>
-                  <a:txBody>
-                    <a:bodyPr/>
-                    <a:lstStyle/>
-                    <a:p>
-                      <a:r>
-                        <a:rPr lang="en-US" altLang="zh-TW" dirty="0"/>
-                        <a:t>0.425</a:t>
-                      </a:r>
-                      <a:endParaRPr lang="en-US" dirty="0"/>
-                    </a:p>
-                  </a:txBody>
-                  <a:tcPr/>
-                </a:tc>
-                <a:tc>
-                  <a:txBody>
-                    <a:bodyPr/>
-                    <a:lstStyle/>
-                    <a:p>
-                      <a:r>
-                        <a:rPr lang="en-US" altLang="zh-TW" dirty="0"/>
-                        <a:t>0.701</a:t>
-                      </a:r>
-                      <a:endParaRPr lang="en-US" dirty="0"/>
-                    </a:p>
-                  </a:txBody>
-                  <a:tcPr/>
-                </a:tc>
-                <a:extLst>
-                  <a:ext uri="{0D108BD9-81ED-4DB2-BD59-A6C34878D82A}">
-                    <a16:rowId xmlns:a16="http://schemas.microsoft.com/office/drawing/2014/main" val="2809071303"/>
-                  </a:ext>
-                </a:extLst>
-              </a:tr>
-              <a:tr h="471746">
-                <a:tc>
-                  <a:txBody>
-                    <a:bodyPr/>
-                    <a:lstStyle/>
-                    <a:p>
-                      <a:r>
-                        <a:rPr lang="en-US" altLang="zh-TW" dirty="0" err="1"/>
-                        <a:t>XGBoost</a:t>
-                      </a:r>
-                      <a:endParaRPr lang="en-US" dirty="0"/>
-                    </a:p>
-                  </a:txBody>
-                  <a:tcPr>
-                    <a:solidFill>
-                      <a:srgbClr val="FFCCCF"/>
-                    </a:solidFill>
-                  </a:tcPr>
-                </a:tc>
-                <a:tc>
-                  <a:txBody>
-                    <a:bodyPr/>
-                    <a:lstStyle/>
-                    <a:p>
-                      <a:r>
-                        <a:rPr lang="en-US" altLang="zh-TW" dirty="0"/>
-                        <a:t>0.764</a:t>
-                      </a:r>
-                      <a:endParaRPr lang="en-US" dirty="0"/>
-                    </a:p>
-                  </a:txBody>
-                  <a:tcPr>
-                    <a:solidFill>
-                      <a:srgbClr val="FFCCCF"/>
-                    </a:solidFill>
-                  </a:tcPr>
-                </a:tc>
-                <a:tc>
-                  <a:txBody>
-                    <a:bodyPr/>
-                    <a:lstStyle/>
-                    <a:p>
-                      <a:r>
-                        <a:rPr lang="en-US" altLang="zh-TW" dirty="0"/>
-                        <a:t>0.448</a:t>
-                      </a:r>
-                      <a:endParaRPr lang="en-US" dirty="0"/>
-                    </a:p>
-                  </a:txBody>
-                  <a:tcPr>
-                    <a:solidFill>
-                      <a:srgbClr val="FFCCCF"/>
-                    </a:solidFill>
-                  </a:tcPr>
-                </a:tc>
-                <a:tc>
-                  <a:txBody>
-                    <a:bodyPr/>
-                    <a:lstStyle/>
-                    <a:p>
-                      <a:r>
-                        <a:rPr lang="en-US" altLang="zh-TW" dirty="0"/>
-                        <a:t>0.708</a:t>
-                      </a:r>
-                      <a:endParaRPr lang="en-US" dirty="0"/>
-                    </a:p>
-                  </a:txBody>
-                  <a:tcPr>
-                    <a:solidFill>
-                      <a:srgbClr val="FFCCCF"/>
-                    </a:solidFill>
-                  </a:tcPr>
-                </a:tc>
-                <a:extLst>
-                  <a:ext uri="{0D108BD9-81ED-4DB2-BD59-A6C34878D82A}">
-                    <a16:rowId xmlns:a16="http://schemas.microsoft.com/office/drawing/2014/main" val="3376547446"/>
-                  </a:ext>
-                </a:extLst>
-              </a:tr>
-            </a:tbl>
-          </a:graphicData>
-        </a:graphic>
-      </p:graphicFrame>
+        </p:nvSpPr>
+        <p:spPr/>
+        <p:txBody>
+          <a:bodyPr>
+            <a:normAutofit fontScale="77500" lnSpcReduction="20000"/>
+          </a:bodyPr>
+          <a:lstStyle/>
+          <a:p>
+            <a:pPr>
+              <a:lnSpc>
+                <a:spcPct val="150000"/>
+              </a:lnSpc>
+            </a:pPr>
+            <a:r>
+              <a:rPr lang="en-US" dirty="0" err="1">
+                <a:latin typeface="Microsoft JhengHei UI" panose="020B0604030504040204" pitchFamily="34" charset="-120"/>
+                <a:ea typeface="Microsoft JhengHei UI" panose="020B0604030504040204" pitchFamily="34" charset="-120"/>
+              </a:rPr>
+              <a:t>取消量與取消率較高的分群類別</a:t>
+            </a:r>
+            <a:r>
+              <a:rPr lang="en-US" dirty="0">
+                <a:latin typeface="Microsoft JhengHei UI" panose="020B0604030504040204" pitchFamily="34" charset="-120"/>
+                <a:ea typeface="Microsoft JhengHei UI" panose="020B0604030504040204" pitchFamily="34" charset="-120"/>
+              </a:rPr>
+              <a:t>：</a:t>
+            </a:r>
+          </a:p>
+          <a:p>
+            <a:pPr lvl="1">
+              <a:lnSpc>
+                <a:spcPct val="150000"/>
+              </a:lnSpc>
+            </a:pPr>
+            <a:r>
+              <a:rPr lang="en-US" dirty="0" err="1">
+                <a:latin typeface="Microsoft JhengHei UI" panose="020B0604030504040204" pitchFamily="34" charset="-120"/>
+                <a:ea typeface="Microsoft JhengHei UI" panose="020B0604030504040204" pitchFamily="34" charset="-120"/>
+              </a:rPr>
+              <a:t>國家</a:t>
+            </a:r>
+            <a:r>
+              <a:rPr lang="en-US" dirty="0">
+                <a:latin typeface="Microsoft JhengHei UI" panose="020B0604030504040204" pitchFamily="34" charset="-120"/>
+                <a:ea typeface="Microsoft JhengHei UI" panose="020B0604030504040204" pitchFamily="34" charset="-120"/>
+              </a:rPr>
+              <a:t>：</a:t>
+            </a:r>
+            <a:r>
+              <a:rPr lang="zh-TW" altLang="en-US" dirty="0">
+                <a:latin typeface="Microsoft JhengHei UI" panose="020B0604030504040204" pitchFamily="34" charset="-120"/>
+                <a:ea typeface="Microsoft JhengHei UI" panose="020B0604030504040204" pitchFamily="34" charset="-120"/>
+              </a:rPr>
+              <a:t>葡萄牙</a:t>
+            </a:r>
+            <a:r>
+              <a:rPr lang="en-US" altLang="zh-TW" dirty="0">
+                <a:latin typeface="Microsoft JhengHei UI" panose="020B0604030504040204" pitchFamily="34" charset="-120"/>
+                <a:ea typeface="Microsoft JhengHei UI" panose="020B0604030504040204" pitchFamily="34" charset="-120"/>
+              </a:rPr>
+              <a:t> (PRT)</a:t>
+            </a:r>
+          </a:p>
+          <a:p>
+            <a:pPr lvl="1">
+              <a:lnSpc>
+                <a:spcPct val="150000"/>
+              </a:lnSpc>
+            </a:pPr>
+            <a:r>
+              <a:rPr lang="en-US" dirty="0" err="1">
+                <a:latin typeface="Microsoft JhengHei UI" panose="020B0604030504040204" pitchFamily="34" charset="-120"/>
+                <a:ea typeface="Microsoft JhengHei UI" panose="020B0604030504040204" pitchFamily="34" charset="-120"/>
+              </a:rPr>
+              <a:t>通路</a:t>
+            </a:r>
+            <a:r>
+              <a:rPr lang="en-US" altLang="zh-TW" dirty="0">
+                <a:latin typeface="Microsoft JhengHei UI" panose="020B0604030504040204" pitchFamily="34" charset="-120"/>
+                <a:ea typeface="Microsoft JhengHei UI" panose="020B0604030504040204" pitchFamily="34" charset="-120"/>
+              </a:rPr>
+              <a:t>:</a:t>
+            </a:r>
+            <a:r>
+              <a:rPr lang="zh-TW" altLang="en-US" dirty="0">
+                <a:latin typeface="Microsoft JhengHei UI" panose="020B0604030504040204" pitchFamily="34" charset="-120"/>
+                <a:ea typeface="Microsoft JhengHei UI" panose="020B0604030504040204" pitchFamily="34" charset="-120"/>
+              </a:rPr>
+              <a:t> 旅行社 </a:t>
+            </a:r>
+            <a:r>
+              <a:rPr lang="en-US" altLang="zh-TW" dirty="0">
+                <a:latin typeface="Microsoft JhengHei UI" panose="020B0604030504040204" pitchFamily="34" charset="-120"/>
+                <a:ea typeface="Microsoft JhengHei UI" panose="020B0604030504040204" pitchFamily="34" charset="-120"/>
+              </a:rPr>
+              <a:t>/ </a:t>
+            </a:r>
+            <a:r>
+              <a:rPr lang="zh-TW" altLang="en-US" dirty="0">
+                <a:latin typeface="Microsoft JhengHei UI" panose="020B0604030504040204" pitchFamily="34" charset="-120"/>
+                <a:ea typeface="Microsoft JhengHei UI" panose="020B0604030504040204" pitchFamily="34" charset="-120"/>
+              </a:rPr>
+              <a:t>旅遊代理 </a:t>
+            </a:r>
+            <a:r>
+              <a:rPr lang="en-US" altLang="zh-TW" dirty="0">
+                <a:latin typeface="Microsoft JhengHei UI" panose="020B0604030504040204" pitchFamily="34" charset="-120"/>
+                <a:ea typeface="Microsoft JhengHei UI" panose="020B0604030504040204" pitchFamily="34" charset="-120"/>
+                <a:sym typeface="Wingdings" pitchFamily="2" charset="2"/>
+              </a:rPr>
+              <a:t>(</a:t>
+            </a:r>
+            <a:r>
+              <a:rPr lang="en-US" dirty="0">
+                <a:latin typeface="Microsoft JhengHei UI" panose="020B0604030504040204" pitchFamily="34" charset="-120"/>
+                <a:ea typeface="Microsoft JhengHei UI" panose="020B0604030504040204" pitchFamily="34" charset="-120"/>
+              </a:rPr>
+              <a:t>TA/TO</a:t>
+            </a:r>
+            <a:r>
+              <a:rPr lang="en-US" altLang="zh-TW" dirty="0">
+                <a:latin typeface="Microsoft JhengHei UI" panose="020B0604030504040204" pitchFamily="34" charset="-120"/>
+                <a:ea typeface="Microsoft JhengHei UI" panose="020B0604030504040204" pitchFamily="34" charset="-120"/>
+              </a:rPr>
+              <a:t>)</a:t>
+            </a:r>
+            <a:endParaRPr lang="en-US" dirty="0">
+              <a:latin typeface="Microsoft JhengHei UI" panose="020B0604030504040204" pitchFamily="34" charset="-120"/>
+              <a:ea typeface="Microsoft JhengHei UI" panose="020B0604030504040204" pitchFamily="34" charset="-120"/>
+            </a:endParaRPr>
+          </a:p>
+          <a:p>
+            <a:pPr lvl="1">
+              <a:lnSpc>
+                <a:spcPct val="150000"/>
+              </a:lnSpc>
+            </a:pPr>
+            <a:r>
+              <a:rPr lang="en-US" sz="2400" dirty="0" err="1">
+                <a:latin typeface="Microsoft JhengHei UI" panose="020B0604030504040204" pitchFamily="34" charset="-120"/>
+                <a:ea typeface="Microsoft JhengHei UI" panose="020B0604030504040204" pitchFamily="34" charset="-120"/>
+              </a:rPr>
+              <a:t>客戶類型</a:t>
+            </a:r>
+            <a:r>
+              <a:rPr lang="en-US" sz="2400" dirty="0">
+                <a:latin typeface="Microsoft JhengHei UI" panose="020B0604030504040204" pitchFamily="34" charset="-120"/>
+                <a:ea typeface="Microsoft JhengHei UI" panose="020B0604030504040204" pitchFamily="34" charset="-120"/>
+              </a:rPr>
+              <a:t> </a:t>
+            </a:r>
+            <a:r>
+              <a:rPr lang="en-US" altLang="zh-TW" dirty="0">
+                <a:latin typeface="Microsoft JhengHei UI" panose="020B0604030504040204" pitchFamily="34" charset="-120"/>
+                <a:ea typeface="Microsoft JhengHei UI" panose="020B0604030504040204" pitchFamily="34" charset="-120"/>
+              </a:rPr>
+              <a:t>:</a:t>
+            </a:r>
+            <a:r>
+              <a:rPr lang="zh-TW" altLang="en-US" dirty="0">
+                <a:latin typeface="Microsoft JhengHei UI" panose="020B0604030504040204" pitchFamily="34" charset="-120"/>
+                <a:ea typeface="Microsoft JhengHei UI" panose="020B0604030504040204" pitchFamily="34" charset="-120"/>
+              </a:rPr>
+              <a:t> 散客 </a:t>
+            </a:r>
+            <a:r>
+              <a:rPr lang="en-US" altLang="zh-TW" dirty="0">
+                <a:latin typeface="Microsoft JhengHei UI" panose="020B0604030504040204" pitchFamily="34" charset="-120"/>
+                <a:ea typeface="Microsoft JhengHei UI" panose="020B0604030504040204" pitchFamily="34" charset="-120"/>
+                <a:sym typeface="Wingdings" pitchFamily="2" charset="2"/>
+              </a:rPr>
+              <a:t>(</a:t>
+            </a:r>
+            <a:r>
+              <a:rPr lang="en-US" altLang="zh-TW" dirty="0">
+                <a:latin typeface="Microsoft JhengHei UI" panose="020B0604030504040204" pitchFamily="34" charset="-120"/>
+                <a:ea typeface="Microsoft JhengHei UI" panose="020B0604030504040204" pitchFamily="34" charset="-120"/>
+              </a:rPr>
+              <a:t>Transient)</a:t>
+            </a:r>
+          </a:p>
+          <a:p>
+            <a:pPr lvl="1">
+              <a:lnSpc>
+                <a:spcPct val="150000"/>
+              </a:lnSpc>
+            </a:pPr>
+            <a:r>
+              <a:rPr lang="en-US" dirty="0" err="1">
+                <a:latin typeface="Microsoft JhengHei UI" panose="020B0604030504040204" pitchFamily="34" charset="-120"/>
+                <a:ea typeface="Microsoft JhengHei UI" panose="020B0604030504040204" pitchFamily="34" charset="-120"/>
+              </a:rPr>
+              <a:t>回頭客：新客戶</a:t>
+            </a:r>
+            <a:r>
+              <a:rPr lang="en-US" altLang="zh-TW" dirty="0">
+                <a:latin typeface="Microsoft JhengHei UI" panose="020B0604030504040204" pitchFamily="34" charset="-120"/>
+                <a:ea typeface="Microsoft JhengHei UI" panose="020B0604030504040204" pitchFamily="34" charset="-120"/>
+              </a:rPr>
+              <a:t>(0)</a:t>
+            </a:r>
+            <a:endParaRPr lang="en-US" dirty="0">
+              <a:latin typeface="Microsoft JhengHei UI" panose="020B0604030504040204" pitchFamily="34" charset="-120"/>
+              <a:ea typeface="Microsoft JhengHei UI" panose="020B0604030504040204" pitchFamily="34" charset="-120"/>
+            </a:endParaRPr>
+          </a:p>
+          <a:p>
+            <a:pPr lvl="1">
+              <a:lnSpc>
+                <a:spcPct val="150000"/>
+              </a:lnSpc>
+            </a:pPr>
+            <a:r>
+              <a:rPr lang="en-US" altLang="zh-TW" sz="2400" dirty="0">
+                <a:latin typeface="Microsoft JhengHei UI" panose="020B0604030504040204" pitchFamily="34" charset="-120"/>
+                <a:ea typeface="Microsoft JhengHei UI" panose="020B0604030504040204" pitchFamily="34" charset="-120"/>
+              </a:rPr>
+              <a:t>Python</a:t>
+            </a:r>
+            <a:r>
+              <a:rPr lang="zh-TW" altLang="en-US" sz="2400" dirty="0">
+                <a:latin typeface="Microsoft JhengHei UI" panose="020B0604030504040204" pitchFamily="34" charset="-120"/>
+                <a:ea typeface="Microsoft JhengHei UI" panose="020B0604030504040204" pitchFamily="34" charset="-120"/>
+              </a:rPr>
+              <a:t>分群</a:t>
+            </a:r>
+            <a:r>
+              <a:rPr lang="en-US" dirty="0">
+                <a:latin typeface="Microsoft JhengHei UI" panose="020B0604030504040204" pitchFamily="34" charset="-120"/>
+                <a:ea typeface="Microsoft JhengHei UI" panose="020B0604030504040204" pitchFamily="34" charset="-120"/>
+              </a:rPr>
+              <a:t>：</a:t>
+            </a:r>
+            <a:r>
+              <a:rPr lang="en-US" dirty="0" err="1">
+                <a:latin typeface="Microsoft JhengHei UI" panose="020B0604030504040204" pitchFamily="34" charset="-120"/>
+                <a:ea typeface="Microsoft JhengHei UI" panose="020B0604030504040204" pitchFamily="34" charset="-120"/>
+              </a:rPr>
+              <a:t>商務短住</a:t>
+            </a:r>
+            <a:r>
+              <a:rPr lang="en-US" altLang="zh-TW" dirty="0">
+                <a:latin typeface="Microsoft JhengHei UI" panose="020B0604030504040204" pitchFamily="34" charset="-120"/>
+                <a:ea typeface="Microsoft JhengHei UI" panose="020B0604030504040204" pitchFamily="34" charset="-120"/>
+              </a:rPr>
+              <a:t>(Business</a:t>
+            </a:r>
+            <a:r>
+              <a:rPr lang="zh-TW" altLang="en-US" dirty="0">
+                <a:latin typeface="Microsoft JhengHei UI" panose="020B0604030504040204" pitchFamily="34" charset="-120"/>
+                <a:ea typeface="Microsoft JhengHei UI" panose="020B0604030504040204" pitchFamily="34" charset="-120"/>
+              </a:rPr>
+              <a:t> </a:t>
+            </a:r>
+            <a:r>
+              <a:rPr lang="en-US" altLang="zh-TW" dirty="0">
+                <a:latin typeface="Microsoft JhengHei UI" panose="020B0604030504040204" pitchFamily="34" charset="-120"/>
+                <a:ea typeface="Microsoft JhengHei UI" panose="020B0604030504040204" pitchFamily="34" charset="-120"/>
+              </a:rPr>
+              <a:t>short-stay)</a:t>
+            </a:r>
+            <a:r>
+              <a:rPr lang="en-US" dirty="0">
+                <a:latin typeface="Microsoft JhengHei UI" panose="020B0604030504040204" pitchFamily="34" charset="-120"/>
+                <a:ea typeface="Microsoft JhengHei UI" panose="020B0604030504040204" pitchFamily="34" charset="-120"/>
+              </a:rPr>
+              <a:t>、</a:t>
+            </a:r>
+            <a:r>
+              <a:rPr lang="en-US" dirty="0" err="1">
+                <a:latin typeface="Microsoft JhengHei UI" panose="020B0604030504040204" pitchFamily="34" charset="-120"/>
+                <a:ea typeface="Microsoft JhengHei UI" panose="020B0604030504040204" pitchFamily="34" charset="-120"/>
+              </a:rPr>
+              <a:t>週末短住</a:t>
+            </a:r>
+            <a:r>
+              <a:rPr lang="en-US" altLang="zh-TW" dirty="0">
+                <a:latin typeface="Microsoft JhengHei UI" panose="020B0604030504040204" pitchFamily="34" charset="-120"/>
+                <a:ea typeface="Microsoft JhengHei UI" panose="020B0604030504040204" pitchFamily="34" charset="-120"/>
+              </a:rPr>
+              <a:t>(Weekend</a:t>
+            </a:r>
+            <a:r>
+              <a:rPr lang="zh-TW" altLang="en-US" dirty="0">
+                <a:latin typeface="Microsoft JhengHei UI" panose="020B0604030504040204" pitchFamily="34" charset="-120"/>
+                <a:ea typeface="Microsoft JhengHei UI" panose="020B0604030504040204" pitchFamily="34" charset="-120"/>
+              </a:rPr>
+              <a:t> </a:t>
+            </a:r>
+            <a:r>
+              <a:rPr lang="en-US" altLang="zh-TW" dirty="0">
+                <a:latin typeface="Microsoft JhengHei UI" panose="020B0604030504040204" pitchFamily="34" charset="-120"/>
+                <a:ea typeface="Microsoft JhengHei UI" panose="020B0604030504040204" pitchFamily="34" charset="-120"/>
+              </a:rPr>
+              <a:t>short-stay)</a:t>
+            </a:r>
+            <a:endParaRPr lang="en-US" dirty="0">
+              <a:latin typeface="Microsoft JhengHei UI" panose="020B0604030504040204" pitchFamily="34" charset="-120"/>
+              <a:ea typeface="Microsoft JhengHei UI" panose="020B0604030504040204" pitchFamily="34" charset="-120"/>
+            </a:endParaRPr>
+          </a:p>
+          <a:p>
+            <a:pPr>
+              <a:lnSpc>
+                <a:spcPct val="150000"/>
+              </a:lnSpc>
+            </a:pPr>
+            <a:r>
+              <a:rPr lang="en-US" dirty="0" err="1">
+                <a:latin typeface="Microsoft JhengHei UI" panose="020B0604030504040204" pitchFamily="34" charset="-120"/>
+                <a:ea typeface="Microsoft JhengHei UI" panose="020B0604030504040204" pitchFamily="34" charset="-120"/>
+              </a:rPr>
+              <a:t>訂金</a:t>
+            </a:r>
+            <a:r>
+              <a:rPr lang="en-US" altLang="zh-TW" dirty="0">
+                <a:latin typeface="Microsoft JhengHei UI" panose="020B0604030504040204" pitchFamily="34" charset="-120"/>
+                <a:ea typeface="Microsoft JhengHei UI" panose="020B0604030504040204" pitchFamily="34" charset="-120"/>
+              </a:rPr>
+              <a:t>(Deposit)</a:t>
+            </a:r>
+            <a:r>
+              <a:rPr lang="zh-TW" altLang="en-US" dirty="0">
+                <a:latin typeface="Microsoft JhengHei UI" panose="020B0604030504040204" pitchFamily="34" charset="-120"/>
+                <a:ea typeface="Microsoft JhengHei UI" panose="020B0604030504040204" pitchFamily="34" charset="-120"/>
+              </a:rPr>
+              <a:t>制度效果不彰</a:t>
+            </a:r>
+            <a:endParaRPr lang="en-US" altLang="zh-TW" dirty="0">
+              <a:latin typeface="Microsoft JhengHei UI" panose="020B0604030504040204" pitchFamily="34" charset="-120"/>
+              <a:ea typeface="Microsoft JhengHei UI" panose="020B0604030504040204" pitchFamily="34" charset="-120"/>
+            </a:endParaRPr>
+          </a:p>
+          <a:p>
+            <a:pPr lvl="1">
+              <a:lnSpc>
+                <a:spcPct val="150000"/>
+              </a:lnSpc>
+            </a:pPr>
+            <a:r>
+              <a:rPr lang="en-US" dirty="0" err="1">
+                <a:latin typeface="Microsoft JhengHei UI" panose="020B0604030504040204" pitchFamily="34" charset="-120"/>
+                <a:ea typeface="Microsoft JhengHei UI" panose="020B0604030504040204" pitchFamily="34" charset="-120"/>
+              </a:rPr>
+              <a:t>是否收取分類機制</a:t>
+            </a:r>
+            <a:endParaRPr lang="en-US" dirty="0">
+              <a:latin typeface="Microsoft JhengHei UI" panose="020B0604030504040204" pitchFamily="34" charset="-120"/>
+              <a:ea typeface="Microsoft JhengHei UI" panose="020B0604030504040204" pitchFamily="34" charset="-120"/>
+            </a:endParaRPr>
+          </a:p>
+          <a:p>
+            <a:pPr lvl="1">
+              <a:lnSpc>
+                <a:spcPct val="150000"/>
+              </a:lnSpc>
+            </a:pPr>
+            <a:r>
+              <a:rPr lang="en-US" dirty="0" err="1">
+                <a:latin typeface="Microsoft JhengHei UI" panose="020B0604030504040204" pitchFamily="34" charset="-120"/>
+                <a:ea typeface="Microsoft JhengHei UI" panose="020B0604030504040204" pitchFamily="34" charset="-120"/>
+              </a:rPr>
+              <a:t>訂金金額</a:t>
+            </a:r>
+            <a:endParaRPr lang="en-US" dirty="0">
+              <a:latin typeface="Microsoft JhengHei UI" panose="020B0604030504040204" pitchFamily="34" charset="-120"/>
+              <a:ea typeface="Microsoft JhengHei UI" panose="020B0604030504040204" pitchFamily="34" charset="-120"/>
+            </a:endParaRPr>
+          </a:p>
+          <a:p>
+            <a:pPr lvl="1"/>
+            <a:endParaRPr lang="en-US" dirty="0">
+              <a:latin typeface="Microsoft JhengHei UI" panose="020B0604030504040204" pitchFamily="34" charset="-120"/>
+              <a:ea typeface="Microsoft JhengHei UI" panose="020B0604030504040204" pitchFamily="34" charset="-120"/>
+            </a:endParaRPr>
+          </a:p>
+          <a:p>
+            <a:pPr lvl="1"/>
+            <a:endParaRPr lang="en-US" dirty="0">
+              <a:latin typeface="Microsoft JhengHei UI" panose="020B0604030504040204" pitchFamily="34" charset="-120"/>
+              <a:ea typeface="Microsoft JhengHei UI" panose="020B0604030504040204" pitchFamily="34" charset="-120"/>
+            </a:endParaRPr>
+          </a:p>
+        </p:txBody>
+      </p:sp>
     </p:spTree>
     <p:extLst>
       <p:ext uri="{BB962C8B-B14F-4D97-AF65-F5344CB8AC3E}">
-        <p14:creationId xmlns:p14="http://schemas.microsoft.com/office/powerpoint/2010/main" val="3206007727"/>
+        <p14:creationId xmlns:p14="http://schemas.microsoft.com/office/powerpoint/2010/main" val="4004750313"/>
       </p:ext>
     </p:extLst>
   </p:cSld>
@@ -7924,26 +7940,16 @@
           <a:lstStyle/>
           <a:p>
             <a:r>
-              <a:rPr lang="en-US" altLang="zh-TW" dirty="0"/>
-              <a:t>Dashboard</a:t>
-            </a:r>
-            <a:r>
-              <a:rPr lang="zh-TW" altLang="en-US" dirty="0"/>
-              <a:t> </a:t>
-            </a:r>
-            <a:r>
-              <a:rPr lang="en-US" altLang="zh-TW" dirty="0"/>
-              <a:t>&amp;</a:t>
-            </a:r>
-            <a:r>
-              <a:rPr lang="zh-TW" altLang="en-US" dirty="0"/>
-              <a:t> </a:t>
-            </a:r>
-            <a:r>
-              <a:rPr lang="en-US" altLang="zh-TW" dirty="0"/>
-              <a:t>Code</a:t>
-            </a:r>
-            <a:endParaRPr lang="en-US" dirty="0"/>
+              <a:rPr lang="en-US" altLang="zh-TW" dirty="0">
+                <a:latin typeface="Microsoft JhengHei UI" panose="020B0604030504040204" pitchFamily="34" charset="-120"/>
+                <a:ea typeface="Microsoft JhengHei UI" panose="020B0604030504040204" pitchFamily="34" charset="-120"/>
+              </a:rPr>
+              <a:t>Tableau Dashboard Link</a:t>
+            </a:r>
+            <a:endParaRPr lang="en-US" dirty="0">
+              <a:latin typeface="Microsoft JhengHei UI" panose="020B0604030504040204" pitchFamily="34" charset="-120"/>
+              <a:ea typeface="Microsoft JhengHei UI" panose="020B0604030504040204" pitchFamily="34" charset="-120"/>
+            </a:endParaRPr>
           </a:p>
         </p:txBody>
       </p:sp>
@@ -7975,23 +7981,32 @@
             </a:pPr>
             <a:r>
               <a:rPr lang="en-US" altLang="zh-TW" dirty="0">
+                <a:latin typeface="Microsoft JhengHei UI" panose="020B0604030504040204" pitchFamily="34" charset="-120"/>
+                <a:ea typeface="Microsoft JhengHei UI" panose="020B0604030504040204" pitchFamily="34" charset="-120"/>
                 <a:hlinkClick r:id="rId2"/>
               </a:rPr>
               <a:t>Cancellation</a:t>
             </a:r>
             <a:r>
               <a:rPr lang="zh-TW" altLang="en-US" dirty="0">
+                <a:latin typeface="Microsoft JhengHei UI" panose="020B0604030504040204" pitchFamily="34" charset="-120"/>
+                <a:ea typeface="Microsoft JhengHei UI" panose="020B0604030504040204" pitchFamily="34" charset="-120"/>
                 <a:hlinkClick r:id="rId2"/>
               </a:rPr>
               <a:t> </a:t>
             </a:r>
             <a:r>
               <a:rPr lang="en-US" altLang="zh-TW" dirty="0">
+                <a:latin typeface="Microsoft JhengHei UI" panose="020B0604030504040204" pitchFamily="34" charset="-120"/>
+                <a:ea typeface="Microsoft JhengHei UI" panose="020B0604030504040204" pitchFamily="34" charset="-120"/>
                 <a:hlinkClick r:id="rId2"/>
               </a:rPr>
               <a:t>Analysis</a:t>
             </a:r>
-            <a:endParaRPr lang="en-US" altLang="zh-TW" dirty="0"/>
+            <a:endParaRPr lang="en-US" altLang="zh-TW" dirty="0">
+              <a:latin typeface="Microsoft JhengHei UI" panose="020B0604030504040204" pitchFamily="34" charset="-120"/>
+              <a:ea typeface="Microsoft JhengHei UI" panose="020B0604030504040204" pitchFamily="34" charset="-120"/>
+            </a:endParaRPr>
           </a:p>
           <a:p>
             <a:pPr>
@@ -8001,49 +8016,32 @@
             </a:pPr>
             <a:r>
               <a:rPr lang="en-US" altLang="zh-TW" dirty="0">
+                <a:latin typeface="Microsoft JhengHei UI" panose="020B0604030504040204" pitchFamily="34" charset="-120"/>
+                <a:ea typeface="Microsoft JhengHei UI" panose="020B0604030504040204" pitchFamily="34" charset="-120"/>
                 <a:hlinkClick r:id="rId3"/>
               </a:rPr>
               <a:t>Segmentation</a:t>
             </a:r>
             <a:r>
               <a:rPr lang="zh-TW" altLang="en-US" dirty="0">
+                <a:latin typeface="Microsoft JhengHei UI" panose="020B0604030504040204" pitchFamily="34" charset="-120"/>
+                <a:ea typeface="Microsoft JhengHei UI" panose="020B0604030504040204" pitchFamily="34" charset="-120"/>
                 <a:hlinkClick r:id="rId3"/>
               </a:rPr>
               <a:t> </a:t>
             </a:r>
             <a:r>
               <a:rPr lang="en-US" altLang="zh-TW" dirty="0">
+                <a:latin typeface="Microsoft JhengHei UI" panose="020B0604030504040204" pitchFamily="34" charset="-120"/>
+                <a:ea typeface="Microsoft JhengHei UI" panose="020B0604030504040204" pitchFamily="34" charset="-120"/>
                 <a:hlinkClick r:id="rId3"/>
               </a:rPr>
               <a:t>Analysis</a:t>
             </a:r>
-            <a:endParaRPr lang="en-US" altLang="zh-TW" dirty="0"/>
-          </a:p>
-          <a:p>
-            <a:pPr>
-              <a:lnSpc>
-                <a:spcPct val="150000"/>
-              </a:lnSpc>
-            </a:pPr>
-            <a:r>
-              <a:rPr lang="en-US" altLang="zh-TW" dirty="0">
-                <a:hlinkClick r:id="rId4"/>
-              </a:rPr>
-              <a:t>ML</a:t>
-            </a:r>
-            <a:r>
-              <a:rPr lang="zh-TW" altLang="en-US" dirty="0">
-                <a:hlinkClick r:id="rId4"/>
-              </a:rPr>
-              <a:t> </a:t>
-            </a:r>
-            <a:r>
-              <a:rPr lang="en-US" altLang="zh-TW" dirty="0">
-                <a:hlinkClick r:id="rId4"/>
-              </a:rPr>
-              <a:t>Code</a:t>
-            </a:r>
-            <a:endParaRPr lang="en-US" dirty="0"/>
+            <a:endParaRPr lang="en-US" altLang="zh-TW" dirty="0">
+              <a:latin typeface="Microsoft JhengHei UI" panose="020B0604030504040204" pitchFamily="34" charset="-120"/>
+              <a:ea typeface="Microsoft JhengHei UI" panose="020B0604030504040204" pitchFamily="34" charset="-120"/>
+            </a:endParaRPr>
           </a:p>
         </p:txBody>
       </p:sp>
@@ -8542,10 +8540,16 @@
           <a:lstStyle/>
           <a:p>
             <a:r>
-              <a:rPr lang="en-US" sz="4400" dirty="0" err="1"/>
+              <a:rPr lang="en-US" sz="4400" dirty="0" err="1">
+                <a:latin typeface="Microsoft JhengHei UI" panose="020B0604030504040204" pitchFamily="34" charset="-120"/>
+                <a:ea typeface="Microsoft JhengHei UI" panose="020B0604030504040204" pitchFamily="34" charset="-120"/>
+              </a:rPr>
               <a:t>訂單取消類型比例圖</a:t>
             </a:r>
-            <a:endParaRPr lang="en-US" dirty="0"/>
+            <a:endParaRPr lang="en-US" dirty="0">
+              <a:latin typeface="Microsoft JhengHei UI" panose="020B0604030504040204" pitchFamily="34" charset="-120"/>
+              <a:ea typeface="Microsoft JhengHei UI" panose="020B0604030504040204" pitchFamily="34" charset="-120"/>
+            </a:endParaRPr>
           </a:p>
         </p:txBody>
       </p:sp>
@@ -8576,18 +8580,30 @@
               </a:lnSpc>
             </a:pPr>
             <a:r>
-              <a:rPr lang="zh-TW" altLang="en-US" dirty="0"/>
+              <a:rPr lang="zh-TW" altLang="en-US" dirty="0">
+                <a:latin typeface="Microsoft JhengHei UI" panose="020B0604030504040204" pitchFamily="34" charset="-120"/>
+                <a:ea typeface="Microsoft JhengHei UI" panose="020B0604030504040204" pitchFamily="34" charset="-120"/>
+              </a:rPr>
               <a:t>取消訂房率高達</a:t>
             </a:r>
             <a:r>
-              <a:rPr lang="en-US" altLang="zh-TW" dirty="0"/>
+              <a:rPr lang="en-US" altLang="zh-TW" dirty="0">
+                <a:latin typeface="Microsoft JhengHei UI" panose="020B0604030504040204" pitchFamily="34" charset="-120"/>
+                <a:ea typeface="Microsoft JhengHei UI" panose="020B0604030504040204" pitchFamily="34" charset="-120"/>
+              </a:rPr>
               <a:t>40%</a:t>
             </a:r>
             <a:r>
-              <a:rPr lang="zh-TW" altLang="en-US" dirty="0"/>
+              <a:rPr lang="zh-TW" altLang="en-US" dirty="0">
+                <a:latin typeface="Microsoft JhengHei UI" panose="020B0604030504040204" pitchFamily="34" charset="-120"/>
+                <a:ea typeface="Microsoft JhengHei UI" panose="020B0604030504040204" pitchFamily="34" charset="-120"/>
+              </a:rPr>
               <a:t>。</a:t>
             </a:r>
-            <a:endParaRPr lang="en-US" altLang="zh-TW" dirty="0"/>
+            <a:endParaRPr lang="en-US" altLang="zh-TW" dirty="0">
+              <a:latin typeface="Microsoft JhengHei UI" panose="020B0604030504040204" pitchFamily="34" charset="-120"/>
+              <a:ea typeface="Microsoft JhengHei UI" panose="020B0604030504040204" pitchFamily="34" charset="-120"/>
+            </a:endParaRPr>
           </a:p>
           <a:p>
             <a:pPr>
@@ -8596,10 +8612,44 @@
               </a:lnSpc>
             </a:pPr>
             <a:r>
-              <a:rPr lang="zh-TW" altLang="en-US" dirty="0"/>
-              <a:t>臨時取消佔比極小。</a:t>
-            </a:r>
-            <a:endParaRPr lang="en-US" altLang="zh-TW" dirty="0"/>
+              <a:rPr lang="zh-TW" altLang="en-US" dirty="0">
+                <a:latin typeface="Microsoft JhengHei UI" panose="020B0604030504040204" pitchFamily="34" charset="-120"/>
+                <a:ea typeface="Microsoft JhengHei UI" panose="020B0604030504040204" pitchFamily="34" charset="-120"/>
+              </a:rPr>
+              <a:t>臨時取消佔比極小</a:t>
+            </a:r>
+            <a:r>
+              <a:rPr lang="en-US" altLang="zh-TW" dirty="0">
+                <a:latin typeface="Microsoft JhengHei UI" panose="020B0604030504040204" pitchFamily="34" charset="-120"/>
+                <a:ea typeface="Microsoft JhengHei UI" panose="020B0604030504040204" pitchFamily="34" charset="-120"/>
+              </a:rPr>
+              <a:t>(</a:t>
+            </a:r>
+            <a:r>
+              <a:rPr lang="zh-TW" altLang="en-US" dirty="0">
+                <a:latin typeface="Microsoft JhengHei UI" panose="020B0604030504040204" pitchFamily="34" charset="-120"/>
+                <a:ea typeface="Microsoft JhengHei UI" panose="020B0604030504040204" pitchFamily="34" charset="-120"/>
+              </a:rPr>
+              <a:t>圓餅圖中紅色部分</a:t>
+            </a:r>
+            <a:r>
+              <a:rPr lang="en-US" altLang="zh-TW" dirty="0">
+                <a:latin typeface="Microsoft JhengHei UI" panose="020B0604030504040204" pitchFamily="34" charset="-120"/>
+                <a:ea typeface="Microsoft JhengHei UI" panose="020B0604030504040204" pitchFamily="34" charset="-120"/>
+              </a:rPr>
+              <a:t>)</a:t>
+            </a:r>
+            <a:r>
+              <a:rPr lang="zh-TW" altLang="en-US" dirty="0">
+                <a:latin typeface="Microsoft JhengHei UI" panose="020B0604030504040204" pitchFamily="34" charset="-120"/>
+                <a:ea typeface="Microsoft JhengHei UI" panose="020B0604030504040204" pitchFamily="34" charset="-120"/>
+              </a:rPr>
+              <a:t>。</a:t>
+            </a:r>
+            <a:endParaRPr lang="en-US" altLang="zh-TW" dirty="0">
+              <a:latin typeface="Microsoft JhengHei UI" panose="020B0604030504040204" pitchFamily="34" charset="-120"/>
+              <a:ea typeface="Microsoft JhengHei UI" panose="020B0604030504040204" pitchFamily="34" charset="-120"/>
+            </a:endParaRPr>
           </a:p>
         </p:txBody>
       </p:sp>
@@ -8663,10 +8713,16 @@
           <a:p>
             <a:pPr algn="ctr"/>
             <a:r>
-              <a:rPr lang="en-US" sz="5400" dirty="0" err="1"/>
+              <a:rPr lang="en-US" sz="5400" dirty="0" err="1">
+                <a:latin typeface="Microsoft JhengHei UI" panose="020B0604030504040204" pitchFamily="34" charset="-120"/>
+                <a:ea typeface="Microsoft JhengHei UI" panose="020B0604030504040204" pitchFamily="34" charset="-120"/>
+              </a:rPr>
               <a:t>臨時取消與損失趨勢分析</a:t>
             </a:r>
-            <a:endParaRPr lang="en-US" sz="5400" dirty="0"/>
+            <a:endParaRPr lang="en-US" sz="5400" dirty="0">
+              <a:latin typeface="Microsoft JhengHei UI" panose="020B0604030504040204" pitchFamily="34" charset="-120"/>
+              <a:ea typeface="Microsoft JhengHei UI" panose="020B0604030504040204" pitchFamily="34" charset="-120"/>
+            </a:endParaRPr>
           </a:p>
         </p:txBody>
       </p:sp>
@@ -8928,10 +8984,16 @@
           <a:lstStyle/>
           <a:p>
             <a:r>
-              <a:rPr lang="en-US" sz="4400" dirty="0" err="1"/>
+              <a:rPr lang="en-US" sz="4400" dirty="0" err="1">
+                <a:latin typeface="Microsoft JhengHei UI" panose="020B0604030504040204" pitchFamily="34" charset="-120"/>
+                <a:ea typeface="Microsoft JhengHei UI" panose="020B0604030504040204" pitchFamily="34" charset="-120"/>
+              </a:rPr>
               <a:t>臨時取消與損失趨勢分析</a:t>
             </a:r>
-            <a:endParaRPr lang="en-US" dirty="0"/>
+            <a:endParaRPr lang="en-US" dirty="0">
+              <a:latin typeface="Microsoft JhengHei UI" panose="020B0604030504040204" pitchFamily="34" charset="-120"/>
+              <a:ea typeface="Microsoft JhengHei UI" panose="020B0604030504040204" pitchFamily="34" charset="-120"/>
+            </a:endParaRPr>
           </a:p>
         </p:txBody>
       </p:sp>
@@ -8963,36 +9025,42 @@
             </a:pPr>
             <a:r>
               <a:rPr lang="zh-TW" altLang="en-US" dirty="0">
-                <a:latin typeface="+mn-ea"/>
+                <a:latin typeface="Microsoft JhengHei UI" panose="020B0604030504040204" pitchFamily="34" charset="-120"/>
+                <a:ea typeface="Microsoft JhengHei UI" panose="020B0604030504040204" pitchFamily="34" charset="-120"/>
               </a:rPr>
               <a:t>臨時取消率 在 </a:t>
             </a:r>
             <a:r>
               <a:rPr lang="en-US" altLang="zh-TW" dirty="0">
-                <a:latin typeface="+mn-ea"/>
+                <a:latin typeface="Microsoft JhengHei UI" panose="020B0604030504040204" pitchFamily="34" charset="-120"/>
+                <a:ea typeface="Microsoft JhengHei UI" panose="020B0604030504040204" pitchFamily="34" charset="-120"/>
               </a:rPr>
               <a:t>2015–2017 </a:t>
             </a:r>
             <a:r>
               <a:rPr lang="zh-TW" altLang="en-US" dirty="0">
-                <a:latin typeface="+mn-ea"/>
+                <a:latin typeface="Microsoft JhengHei UI" panose="020B0604030504040204" pitchFamily="34" charset="-120"/>
+                <a:ea typeface="Microsoft JhengHei UI" panose="020B0604030504040204" pitchFamily="34" charset="-120"/>
               </a:rPr>
               <a:t>年間呈現</a:t>
             </a:r>
             <a:r>
               <a:rPr lang="zh-TW" altLang="en-US" b="1" dirty="0">
-                <a:latin typeface="+mn-ea"/>
+                <a:latin typeface="Microsoft JhengHei UI" panose="020B0604030504040204" pitchFamily="34" charset="-120"/>
+                <a:ea typeface="Microsoft JhengHei UI" panose="020B0604030504040204" pitchFamily="34" charset="-120"/>
               </a:rPr>
               <a:t>下降</a:t>
             </a:r>
             <a:r>
               <a:rPr lang="zh-TW" altLang="en-US" dirty="0">
-                <a:latin typeface="+mn-ea"/>
+                <a:latin typeface="Microsoft JhengHei UI" panose="020B0604030504040204" pitchFamily="34" charset="-120"/>
+                <a:ea typeface="Microsoft JhengHei UI" panose="020B0604030504040204" pitchFamily="34" charset="-120"/>
               </a:rPr>
               <a:t>趨勢。</a:t>
             </a:r>
             <a:endParaRPr lang="en-US" altLang="zh-TW" dirty="0">
-              <a:latin typeface="+mn-ea"/>
+              <a:latin typeface="Microsoft JhengHei UI" panose="020B0604030504040204" pitchFamily="34" charset="-120"/>
+              <a:ea typeface="Microsoft JhengHei UI" panose="020B0604030504040204" pitchFamily="34" charset="-120"/>
             </a:endParaRPr>
           </a:p>
           <a:p>
@@ -9003,24 +9071,28 @@
             </a:pPr>
             <a:r>
               <a:rPr lang="zh-TW" altLang="en-US" dirty="0">
-                <a:latin typeface="+mn-ea"/>
+                <a:latin typeface="Microsoft JhengHei UI" panose="020B0604030504040204" pitchFamily="34" charset="-120"/>
+                <a:ea typeface="Microsoft JhengHei UI" panose="020B0604030504040204" pitchFamily="34" charset="-120"/>
               </a:rPr>
               <a:t>臨時取消平均損失以及平均每日房價呈現</a:t>
             </a:r>
             <a:r>
               <a:rPr lang="zh-TW" altLang="en-US" b="1" dirty="0">
-                <a:latin typeface="+mn-ea"/>
+                <a:latin typeface="Microsoft JhengHei UI" panose="020B0604030504040204" pitchFamily="34" charset="-120"/>
+                <a:ea typeface="Microsoft JhengHei UI" panose="020B0604030504040204" pitchFamily="34" charset="-120"/>
               </a:rPr>
               <a:t>上升</a:t>
             </a:r>
             <a:r>
               <a:rPr lang="zh-TW" altLang="en-US" dirty="0">
-                <a:latin typeface="+mn-ea"/>
+                <a:latin typeface="Microsoft JhengHei UI" panose="020B0604030504040204" pitchFamily="34" charset="-120"/>
+                <a:ea typeface="Microsoft JhengHei UI" panose="020B0604030504040204" pitchFamily="34" charset="-120"/>
               </a:rPr>
               <a:t>趨勢。 </a:t>
             </a:r>
             <a:endParaRPr lang="en-US" altLang="zh-TW" dirty="0">
-              <a:latin typeface="+mn-ea"/>
+              <a:latin typeface="Microsoft JhengHei UI" panose="020B0604030504040204" pitchFamily="34" charset="-120"/>
+              <a:ea typeface="Microsoft JhengHei UI" panose="020B0604030504040204" pitchFamily="34" charset="-120"/>
             </a:endParaRPr>
           </a:p>
           <a:p>
@@ -9031,24 +9103,28 @@
             </a:pPr>
             <a:r>
               <a:rPr lang="zh-TW" altLang="en-US" dirty="0">
-                <a:latin typeface="+mn-ea"/>
+                <a:latin typeface="Microsoft JhengHei UI" panose="020B0604030504040204" pitchFamily="34" charset="-120"/>
+                <a:ea typeface="Microsoft JhengHei UI" panose="020B0604030504040204" pitchFamily="34" charset="-120"/>
               </a:rPr>
               <a:t>總臨時取消損失呈現</a:t>
             </a:r>
             <a:r>
               <a:rPr lang="zh-TW" altLang="en-US" b="1" dirty="0">
-                <a:latin typeface="+mn-ea"/>
+                <a:latin typeface="Microsoft JhengHei UI" panose="020B0604030504040204" pitchFamily="34" charset="-120"/>
+                <a:ea typeface="Microsoft JhengHei UI" panose="020B0604030504040204" pitchFamily="34" charset="-120"/>
               </a:rPr>
               <a:t>較大波動</a:t>
             </a:r>
             <a:r>
               <a:rPr lang="zh-TW" altLang="en-US" dirty="0">
-                <a:latin typeface="+mn-ea"/>
+                <a:latin typeface="Microsoft JhengHei UI" panose="020B0604030504040204" pitchFamily="34" charset="-120"/>
+                <a:ea typeface="Microsoft JhengHei UI" panose="020B0604030504040204" pitchFamily="34" charset="-120"/>
               </a:rPr>
               <a:t>。 </a:t>
             </a:r>
             <a:endParaRPr lang="en-US" altLang="zh-TW" dirty="0">
-              <a:latin typeface="+mn-ea"/>
+              <a:latin typeface="Microsoft JhengHei UI" panose="020B0604030504040204" pitchFamily="34" charset="-120"/>
+              <a:ea typeface="Microsoft JhengHei UI" panose="020B0604030504040204" pitchFamily="34" charset="-120"/>
             </a:endParaRPr>
           </a:p>
           <a:p>
@@ -9059,37 +9135,43 @@
             </a:pPr>
             <a:r>
               <a:rPr lang="en-US" dirty="0" err="1">
-                <a:latin typeface="+mj-lt"/>
+                <a:latin typeface="Microsoft JhengHei UI" panose="020B0604030504040204" pitchFamily="34" charset="-120"/>
+                <a:ea typeface="Microsoft JhengHei UI" panose="020B0604030504040204" pitchFamily="34" charset="-120"/>
               </a:rPr>
               <a:t>目前對於臨時取消的</a:t>
             </a:r>
             <a:r>
               <a:rPr lang="en-US" b="1" dirty="0" err="1">
-                <a:latin typeface="+mj-lt"/>
+                <a:latin typeface="Microsoft JhengHei UI" panose="020B0604030504040204" pitchFamily="34" charset="-120"/>
+                <a:ea typeface="Microsoft JhengHei UI" panose="020B0604030504040204" pitchFamily="34" charset="-120"/>
               </a:rPr>
               <a:t>策略有效</a:t>
             </a:r>
             <a:r>
               <a:rPr lang="en-US" dirty="0" err="1">
-                <a:latin typeface="+mj-lt"/>
+                <a:latin typeface="Microsoft JhengHei UI" panose="020B0604030504040204" pitchFamily="34" charset="-120"/>
+                <a:ea typeface="Microsoft JhengHei UI" panose="020B0604030504040204" pitchFamily="34" charset="-120"/>
               </a:rPr>
               <a:t>，但因房價上升所以總損失並</a:t>
             </a:r>
             <a:r>
               <a:rPr lang="en-US" b="1" dirty="0" err="1">
-                <a:latin typeface="+mj-lt"/>
+                <a:latin typeface="Microsoft JhengHei UI" panose="020B0604030504040204" pitchFamily="34" charset="-120"/>
+                <a:ea typeface="Microsoft JhengHei UI" panose="020B0604030504040204" pitchFamily="34" charset="-120"/>
               </a:rPr>
               <a:t>未有</a:t>
             </a:r>
             <a:r>
               <a:rPr lang="en-US" dirty="0" err="1">
-                <a:latin typeface="+mj-lt"/>
+                <a:latin typeface="Microsoft JhengHei UI" panose="020B0604030504040204" pitchFamily="34" charset="-120"/>
+                <a:ea typeface="Microsoft JhengHei UI" panose="020B0604030504040204" pitchFamily="34" charset="-120"/>
               </a:rPr>
               <a:t>跟著下降的趨勢</a:t>
             </a:r>
             <a:r>
               <a:rPr lang="en-US" dirty="0">
-                <a:latin typeface="+mj-lt"/>
+                <a:latin typeface="Microsoft JhengHei UI" panose="020B0604030504040204" pitchFamily="34" charset="-120"/>
+                <a:ea typeface="Microsoft JhengHei UI" panose="020B0604030504040204" pitchFamily="34" charset="-120"/>
               </a:rPr>
               <a:t>。</a:t>
             </a:r>
@@ -9154,10 +9236,16 @@
           <a:p>
             <a:pPr algn="ctr"/>
             <a:r>
-              <a:rPr lang="zh-TW" altLang="en-US" dirty="0"/>
+              <a:rPr lang="zh-TW" altLang="en-US" dirty="0">
+                <a:latin typeface="Microsoft JhengHei UI" panose="020B0604030504040204" pitchFamily="34" charset="-120"/>
+                <a:ea typeface="Microsoft JhengHei UI" panose="020B0604030504040204" pitchFamily="34" charset="-120"/>
+              </a:rPr>
               <a:t>不同群體的臨時取消行為分析</a:t>
             </a:r>
-            <a:endParaRPr lang="en-US" dirty="0"/>
+            <a:endParaRPr lang="en-US" dirty="0">
+              <a:latin typeface="Microsoft JhengHei UI" panose="020B0604030504040204" pitchFamily="34" charset="-120"/>
+              <a:ea typeface="Microsoft JhengHei UI" panose="020B0604030504040204" pitchFamily="34" charset="-120"/>
+            </a:endParaRPr>
           </a:p>
         </p:txBody>
       </p:sp>
@@ -9179,7 +9267,13 @@
   <p:cSld>
     <p:spTree>
       <p:nvGrpSpPr>
-        <p:cNvPr id="1" name=""/>
+        <p:cNvPr id="1" name="">
+          <a:extLst>
+            <a:ext uri="{FF2B5EF4-FFF2-40B4-BE49-F238E27FC236}">
+              <a16:creationId xmlns:a16="http://schemas.microsoft.com/office/drawing/2014/main" id="{2943534D-32A2-8584-AEDB-74D894C61FF3}"/>
+            </a:ext>
+          </a:extLst>
+        </p:cNvPr>
         <p:cNvGrpSpPr/>
         <p:nvPr/>
       </p:nvGrpSpPr>
@@ -9196,7 +9290,7 @@
           <p:cNvPr id="2" name="Title 1">
             <a:extLst>
               <a:ext uri="{FF2B5EF4-FFF2-40B4-BE49-F238E27FC236}">
-                <a16:creationId xmlns:a16="http://schemas.microsoft.com/office/drawing/2014/main" id="{71E88E85-CC82-E8EB-A36E-B190E246124E}"/>
+                <a16:creationId xmlns:a16="http://schemas.microsoft.com/office/drawing/2014/main" id="{1F5E9405-CA53-2A05-D550-1C81B13C90E2}"/>
               </a:ext>
             </a:extLst>
           </p:cNvPr>
@@ -9213,200 +9307,477 @@
           <a:lstStyle/>
           <a:p>
             <a:r>
-              <a:rPr lang="en-US" dirty="0" err="1"/>
+              <a:rPr lang="en-US" dirty="0" err="1">
+                <a:latin typeface="Microsoft JhengHei UI" panose="020B0604030504040204" pitchFamily="34" charset="-120"/>
+                <a:ea typeface="Microsoft JhengHei UI" panose="020B0604030504040204" pitchFamily="34" charset="-120"/>
+              </a:rPr>
               <a:t>分群</a:t>
             </a:r>
-            <a:endParaRPr lang="en-US" dirty="0"/>
+            <a:endParaRPr lang="en-US" dirty="0">
+              <a:latin typeface="Microsoft JhengHei UI" panose="020B0604030504040204" pitchFamily="34" charset="-120"/>
+              <a:ea typeface="Microsoft JhengHei UI" panose="020B0604030504040204" pitchFamily="34" charset="-120"/>
+            </a:endParaRPr>
           </a:p>
         </p:txBody>
       </p:sp>
-      <p:sp>
-        <p:nvSpPr>
-          <p:cNvPr id="3" name="Content Placeholder 2">
-            <a:extLst>
-              <a:ext uri="{FF2B5EF4-FFF2-40B4-BE49-F238E27FC236}">
-                <a16:creationId xmlns:a16="http://schemas.microsoft.com/office/drawing/2014/main" id="{E2C1EB1E-7AE4-69B5-BE36-4589B816B822}"/>
-              </a:ext>
-            </a:extLst>
-          </p:cNvPr>
-          <p:cNvSpPr>
-            <a:spLocks noGrp="1"/>
-          </p:cNvSpPr>
+      <p:graphicFrame>
+        <p:nvGraphicFramePr>
+          <p:cNvPr id="8" name="Table 7">
+            <a:extLst>
+              <a:ext uri="{FF2B5EF4-FFF2-40B4-BE49-F238E27FC236}">
+                <a16:creationId xmlns:a16="http://schemas.microsoft.com/office/drawing/2014/main" id="{F655B2F5-9738-7A2E-6916-7A67C18FC136}"/>
+              </a:ext>
+            </a:extLst>
+          </p:cNvPr>
+          <p:cNvGraphicFramePr>
+            <a:graphicFrameLocks noGrp="1"/>
+          </p:cNvGraphicFramePr>
           <p:nvPr>
-            <p:ph idx="1"/>
+            <p:extLst>
+              <p:ext uri="{D42A27DB-BD31-4B8C-83A1-F6EECF244321}">
+                <p14:modId xmlns:p14="http://schemas.microsoft.com/office/powerpoint/2010/main" val="3901388321"/>
+              </p:ext>
+            </p:extLst>
           </p:nvPr>
-        </p:nvSpPr>
-        <p:spPr/>
-        <p:txBody>
-          <a:bodyPr>
-            <a:noAutofit/>
-          </a:bodyPr>
-          <a:lstStyle/>
-          <a:p>
-            <a:pPr>
-              <a:lnSpc>
-                <a:spcPct val="150000"/>
-              </a:lnSpc>
-            </a:pPr>
-            <a:r>
-              <a:rPr lang="en-US" sz="2400" dirty="0">
-                <a:latin typeface="+mn-ea"/>
-              </a:rPr>
-              <a:t>國家：</a:t>
-            </a:r>
-            <a:r>
-              <a:rPr lang="en-US" altLang="zh-TW" sz="2400" dirty="0">
-                <a:latin typeface="+mn-ea"/>
-              </a:rPr>
-              <a:t>109</a:t>
-            </a:r>
-            <a:r>
-              <a:rPr lang="zh-TW" altLang="en-US" sz="2400" dirty="0">
-                <a:latin typeface="+mn-ea"/>
-              </a:rPr>
-              <a:t>個國家</a:t>
-            </a:r>
-            <a:endParaRPr lang="en-US" sz="2400" dirty="0">
-              <a:latin typeface="+mn-ea"/>
-            </a:endParaRPr>
-          </a:p>
-          <a:p>
-            <a:pPr marL="228600" lvl="1">
-              <a:lnSpc>
-                <a:spcPct val="150000"/>
-              </a:lnSpc>
-              <a:spcBef>
-                <a:spcPts val="1000"/>
-              </a:spcBef>
-            </a:pPr>
-            <a:r>
-              <a:rPr lang="en-US" dirty="0" err="1">
-                <a:latin typeface="+mn-ea"/>
-              </a:rPr>
-              <a:t>訂房渠道</a:t>
-            </a:r>
-            <a:r>
-              <a:rPr lang="zh-TW" altLang="en-US" sz="2400" dirty="0">
-                <a:latin typeface="+mn-ea"/>
-              </a:rPr>
-              <a:t>：</a:t>
-            </a:r>
-            <a:r>
-              <a:rPr lang="zh-TW" altLang="en-US" dirty="0">
-                <a:latin typeface="+mn-ea"/>
-              </a:rPr>
-              <a:t>企業訂房、直接訂房、全球分銷系統、旅行社 </a:t>
-            </a:r>
-            <a:r>
-              <a:rPr lang="en-US" altLang="zh-TW" dirty="0">
-                <a:latin typeface="+mn-ea"/>
-              </a:rPr>
-              <a:t>/ </a:t>
-            </a:r>
-            <a:r>
-              <a:rPr lang="zh-TW" altLang="en-US" dirty="0">
-                <a:latin typeface="+mn-ea"/>
-              </a:rPr>
-              <a:t>旅遊代理</a:t>
-            </a:r>
-            <a:endParaRPr lang="en-US" dirty="0">
-              <a:latin typeface="+mn-ea"/>
-            </a:endParaRPr>
-          </a:p>
-          <a:p>
-            <a:pPr>
-              <a:lnSpc>
-                <a:spcPct val="150000"/>
-              </a:lnSpc>
-            </a:pPr>
-            <a:r>
-              <a:rPr lang="en-US" sz="2400" dirty="0" err="1">
-                <a:latin typeface="+mn-ea"/>
-              </a:rPr>
-              <a:t>客戶類型</a:t>
-            </a:r>
-            <a:r>
-              <a:rPr lang="zh-TW" altLang="en-US" sz="2400" dirty="0">
-                <a:latin typeface="+mn-ea"/>
-              </a:rPr>
-              <a:t>：合約客戶、團體客、散客、散客團體</a:t>
-            </a:r>
-            <a:endParaRPr lang="en-US" sz="2400" dirty="0">
-              <a:latin typeface="+mn-ea"/>
-            </a:endParaRPr>
-          </a:p>
-          <a:p>
-            <a:pPr>
-              <a:lnSpc>
-                <a:spcPct val="150000"/>
-              </a:lnSpc>
-            </a:pPr>
-            <a:r>
-              <a:rPr lang="en-US" sz="2400" dirty="0" err="1">
-                <a:latin typeface="+mn-ea"/>
-              </a:rPr>
-              <a:t>訂金策略</a:t>
-            </a:r>
-            <a:r>
-              <a:rPr lang="zh-TW" altLang="en-US" sz="2400" dirty="0">
-                <a:latin typeface="+mn-ea"/>
-              </a:rPr>
-              <a:t>：無訂金、不可退訂金、可退訂金</a:t>
-            </a:r>
-            <a:endParaRPr lang="en-US" sz="2400" dirty="0">
-              <a:latin typeface="+mn-ea"/>
-            </a:endParaRPr>
-          </a:p>
-          <a:p>
-            <a:pPr>
-              <a:lnSpc>
-                <a:spcPct val="150000"/>
-              </a:lnSpc>
-            </a:pPr>
-            <a:r>
-              <a:rPr lang="en-US" sz="2400" dirty="0" err="1">
-                <a:latin typeface="+mn-ea"/>
-              </a:rPr>
-              <a:t>回頭客</a:t>
-            </a:r>
-            <a:r>
-              <a:rPr lang="zh-TW" altLang="en-US" sz="2400" dirty="0">
-                <a:latin typeface="+mn-ea"/>
-              </a:rPr>
-              <a:t>：新客、回頭客</a:t>
-            </a:r>
-            <a:endParaRPr lang="en-US" sz="2400" dirty="0">
-              <a:latin typeface="+mn-ea"/>
-            </a:endParaRPr>
-          </a:p>
-          <a:p>
-            <a:pPr>
-              <a:lnSpc>
-                <a:spcPct val="150000"/>
-              </a:lnSpc>
-            </a:pPr>
-            <a:r>
-              <a:rPr lang="en-US" altLang="zh-TW" sz="2400" dirty="0">
-                <a:latin typeface="+mn-ea"/>
-              </a:rPr>
-              <a:t>Python</a:t>
-            </a:r>
-            <a:r>
-              <a:rPr lang="zh-TW" altLang="en-US" sz="2400" dirty="0">
-                <a:latin typeface="+mn-ea"/>
-              </a:rPr>
-              <a:t>分群：商務短住、家庭旅遊、高價常住、週末短住</a:t>
-            </a:r>
-            <a:endParaRPr lang="en-US" sz="2400" dirty="0">
-              <a:latin typeface="+mn-ea"/>
-            </a:endParaRPr>
-          </a:p>
-        </p:txBody>
-      </p:sp>
+        </p:nvGraphicFramePr>
+        <p:xfrm>
+          <a:off x="1334168" y="1727034"/>
+          <a:ext cx="9897964" cy="4316622"/>
+        </p:xfrm>
+        <a:graphic>
+          <a:graphicData uri="http://schemas.openxmlformats.org/drawingml/2006/table">
+            <a:tbl>
+              <a:tblPr firstRow="1" bandRow="1">
+                <a:tableStyleId>{5C22544A-7EE6-4342-B048-85BDC9FD1C3A}</a:tableStyleId>
+              </a:tblPr>
+              <a:tblGrid>
+                <a:gridCol w="4948982">
+                  <a:extLst>
+                    <a:ext uri="{9D8B030D-6E8A-4147-A177-3AD203B41FA5}">
+                      <a16:colId xmlns:a16="http://schemas.microsoft.com/office/drawing/2014/main" val="1292968656"/>
+                    </a:ext>
+                  </a:extLst>
+                </a:gridCol>
+                <a:gridCol w="4948982">
+                  <a:extLst>
+                    <a:ext uri="{9D8B030D-6E8A-4147-A177-3AD203B41FA5}">
+                      <a16:colId xmlns:a16="http://schemas.microsoft.com/office/drawing/2014/main" val="3977895269"/>
+                    </a:ext>
+                  </a:extLst>
+                </a:gridCol>
+              </a:tblGrid>
+              <a:tr h="519643">
+                <a:tc>
+                  <a:txBody>
+                    <a:bodyPr/>
+                    <a:lstStyle/>
+                    <a:p>
+                      <a:pPr rtl="0">
+                        <a:buNone/>
+                      </a:pPr>
+                      <a:r>
+                        <a:rPr lang="zh-TW" altLang="en-US" sz="2200" b="1" dirty="0">
+                          <a:solidFill>
+                            <a:schemeClr val="bg1"/>
+                          </a:solidFill>
+                          <a:effectLst/>
+                          <a:latin typeface="Microsoft JhengHei UI" panose="020B0604030504040204" pitchFamily="34" charset="-120"/>
+                          <a:ea typeface="Microsoft JhengHei UI" panose="020B0604030504040204" pitchFamily="34" charset="-120"/>
+                        </a:rPr>
+                        <a:t>分群依據</a:t>
+                      </a:r>
+                    </a:p>
+                  </a:txBody>
+                  <a:tcPr marL="139190" marR="139190" marT="92793" marB="92793" anchor="ctr"/>
+                </a:tc>
+                <a:tc>
+                  <a:txBody>
+                    <a:bodyPr/>
+                    <a:lstStyle/>
+                    <a:p>
+                      <a:pPr rtl="0">
+                        <a:buNone/>
+                      </a:pPr>
+                      <a:r>
+                        <a:rPr lang="zh-TW" altLang="en-US" sz="2200" b="1" dirty="0">
+                          <a:solidFill>
+                            <a:schemeClr val="bg1"/>
+                          </a:solidFill>
+                          <a:effectLst/>
+                          <a:latin typeface="Microsoft JhengHei UI" panose="020B0604030504040204" pitchFamily="34" charset="-120"/>
+                          <a:ea typeface="Microsoft JhengHei UI" panose="020B0604030504040204" pitchFamily="34" charset="-120"/>
+                        </a:rPr>
+                        <a:t>類別</a:t>
+                      </a:r>
+                    </a:p>
+                  </a:txBody>
+                  <a:tcPr marL="139190" marR="139190" marT="92793" marB="92793" anchor="ctr"/>
+                </a:tc>
+                <a:extLst>
+                  <a:ext uri="{0D108BD9-81ED-4DB2-BD59-A6C34878D82A}">
+                    <a16:rowId xmlns:a16="http://schemas.microsoft.com/office/drawing/2014/main" val="333267637"/>
+                  </a:ext>
+                </a:extLst>
+              </a:tr>
+              <a:tr h="519643">
+                <a:tc>
+                  <a:txBody>
+                    <a:bodyPr/>
+                    <a:lstStyle/>
+                    <a:p>
+                      <a:pPr rtl="0">
+                        <a:buNone/>
+                      </a:pPr>
+                      <a:r>
+                        <a:rPr lang="zh-TW" altLang="en-US" sz="2200" b="0" dirty="0">
+                          <a:solidFill>
+                            <a:srgbClr val="1B1C1D"/>
+                          </a:solidFill>
+                          <a:effectLst/>
+                          <a:latin typeface="Microsoft JhengHei UI" panose="020B0604030504040204" pitchFamily="34" charset="-120"/>
+                          <a:ea typeface="Microsoft JhengHei UI" panose="020B0604030504040204" pitchFamily="34" charset="-120"/>
+                        </a:rPr>
+                        <a:t>國家</a:t>
+                      </a:r>
+                    </a:p>
+                  </a:txBody>
+                  <a:tcPr marL="139190" marR="139190" marT="92793" marB="92793" anchor="ctr"/>
+                </a:tc>
+                <a:tc>
+                  <a:txBody>
+                    <a:bodyPr/>
+                    <a:lstStyle/>
+                    <a:p>
+                      <a:pPr rtl="0">
+                        <a:buNone/>
+                      </a:pPr>
+                      <a:r>
+                        <a:rPr lang="en-US" altLang="zh-TW" sz="2200" b="0" dirty="0">
+                          <a:solidFill>
+                            <a:srgbClr val="1B1C1D"/>
+                          </a:solidFill>
+                          <a:effectLst/>
+                          <a:latin typeface="Microsoft JhengHei UI" panose="020B0604030504040204" pitchFamily="34" charset="-120"/>
+                          <a:ea typeface="Microsoft JhengHei UI" panose="020B0604030504040204" pitchFamily="34" charset="-120"/>
+                        </a:rPr>
+                        <a:t>109</a:t>
+                      </a:r>
+                      <a:r>
+                        <a:rPr lang="zh-TW" altLang="en-US" sz="2200" b="0" dirty="0">
+                          <a:solidFill>
+                            <a:srgbClr val="1B1C1D"/>
+                          </a:solidFill>
+                          <a:effectLst/>
+                          <a:latin typeface="Microsoft JhengHei UI" panose="020B0604030504040204" pitchFamily="34" charset="-120"/>
+                          <a:ea typeface="Microsoft JhengHei UI" panose="020B0604030504040204" pitchFamily="34" charset="-120"/>
+                        </a:rPr>
+                        <a:t>個國家</a:t>
+                      </a:r>
+                    </a:p>
+                  </a:txBody>
+                  <a:tcPr marL="139190" marR="139190" marT="92793" marB="92793" anchor="ctr"/>
+                </a:tc>
+                <a:extLst>
+                  <a:ext uri="{0D108BD9-81ED-4DB2-BD59-A6C34878D82A}">
+                    <a16:rowId xmlns:a16="http://schemas.microsoft.com/office/drawing/2014/main" val="560811435"/>
+                  </a:ext>
+                </a:extLst>
+              </a:tr>
+              <a:tr h="853699">
+                <a:tc>
+                  <a:txBody>
+                    <a:bodyPr/>
+                    <a:lstStyle/>
+                    <a:p>
+                      <a:pPr rtl="0">
+                        <a:buNone/>
+                      </a:pPr>
+                      <a:r>
+                        <a:rPr lang="zh-TW" altLang="en-US" sz="2200" b="0">
+                          <a:solidFill>
+                            <a:srgbClr val="1B1C1D"/>
+                          </a:solidFill>
+                          <a:effectLst/>
+                          <a:latin typeface="Microsoft JhengHei UI" panose="020B0604030504040204" pitchFamily="34" charset="-120"/>
+                          <a:ea typeface="Microsoft JhengHei UI" panose="020B0604030504040204" pitchFamily="34" charset="-120"/>
+                        </a:rPr>
+                        <a:t>訂房渠道</a:t>
+                      </a:r>
+                    </a:p>
+                  </a:txBody>
+                  <a:tcPr marL="139190" marR="139190" marT="92793" marB="92793" anchor="ctr"/>
+                </a:tc>
+                <a:tc>
+                  <a:txBody>
+                    <a:bodyPr/>
+                    <a:lstStyle/>
+                    <a:p>
+                      <a:pPr rtl="0">
+                        <a:buNone/>
+                      </a:pPr>
+                      <a:r>
+                        <a:rPr lang="zh-TW" altLang="en-US" sz="2200" b="0">
+                          <a:solidFill>
+                            <a:srgbClr val="1B1C1D"/>
+                          </a:solidFill>
+                          <a:effectLst/>
+                          <a:latin typeface="Microsoft JhengHei UI" panose="020B0604030504040204" pitchFamily="34" charset="-120"/>
+                          <a:ea typeface="Microsoft JhengHei UI" panose="020B0604030504040204" pitchFamily="34" charset="-120"/>
+                        </a:rPr>
+                        <a:t>企業訂房、直接訂房、全球分銷系統、旅行社 </a:t>
+                      </a:r>
+                      <a:r>
+                        <a:rPr lang="en-US" altLang="zh-TW" sz="2200" b="0">
+                          <a:solidFill>
+                            <a:srgbClr val="1B1C1D"/>
+                          </a:solidFill>
+                          <a:effectLst/>
+                          <a:latin typeface="Microsoft JhengHei UI" panose="020B0604030504040204" pitchFamily="34" charset="-120"/>
+                          <a:ea typeface="Microsoft JhengHei UI" panose="020B0604030504040204" pitchFamily="34" charset="-120"/>
+                        </a:rPr>
+                        <a:t>/ </a:t>
+                      </a:r>
+                      <a:r>
+                        <a:rPr lang="zh-TW" altLang="en-US" sz="2200" b="0">
+                          <a:solidFill>
+                            <a:srgbClr val="1B1C1D"/>
+                          </a:solidFill>
+                          <a:effectLst/>
+                          <a:latin typeface="Microsoft JhengHei UI" panose="020B0604030504040204" pitchFamily="34" charset="-120"/>
+                          <a:ea typeface="Microsoft JhengHei UI" panose="020B0604030504040204" pitchFamily="34" charset="-120"/>
+                        </a:rPr>
+                        <a:t>旅遊代理</a:t>
+                      </a:r>
+                    </a:p>
+                  </a:txBody>
+                  <a:tcPr marL="139190" marR="139190" marT="92793" marB="92793" anchor="ctr"/>
+                </a:tc>
+                <a:extLst>
+                  <a:ext uri="{0D108BD9-81ED-4DB2-BD59-A6C34878D82A}">
+                    <a16:rowId xmlns:a16="http://schemas.microsoft.com/office/drawing/2014/main" val="988396152"/>
+                  </a:ext>
+                </a:extLst>
+              </a:tr>
+              <a:tr h="519643">
+                <a:tc>
+                  <a:txBody>
+                    <a:bodyPr/>
+                    <a:lstStyle/>
+                    <a:p>
+                      <a:pPr rtl="0">
+                        <a:buNone/>
+                      </a:pPr>
+                      <a:r>
+                        <a:rPr lang="zh-TW" altLang="en-US" sz="2200" b="0">
+                          <a:solidFill>
+                            <a:srgbClr val="1B1C1D"/>
+                          </a:solidFill>
+                          <a:effectLst/>
+                          <a:latin typeface="Microsoft JhengHei UI" panose="020B0604030504040204" pitchFamily="34" charset="-120"/>
+                          <a:ea typeface="Microsoft JhengHei UI" panose="020B0604030504040204" pitchFamily="34" charset="-120"/>
+                        </a:rPr>
+                        <a:t>客戶類型</a:t>
+                      </a:r>
+                    </a:p>
+                  </a:txBody>
+                  <a:tcPr marL="139190" marR="139190" marT="92793" marB="92793" anchor="ctr"/>
+                </a:tc>
+                <a:tc>
+                  <a:txBody>
+                    <a:bodyPr/>
+                    <a:lstStyle/>
+                    <a:p>
+                      <a:pPr rtl="0">
+                        <a:buNone/>
+                      </a:pPr>
+                      <a:r>
+                        <a:rPr lang="zh-TW" altLang="en-US" sz="2200" b="0">
+                          <a:solidFill>
+                            <a:srgbClr val="1B1C1D"/>
+                          </a:solidFill>
+                          <a:effectLst/>
+                          <a:latin typeface="Microsoft JhengHei UI" panose="020B0604030504040204" pitchFamily="34" charset="-120"/>
+                          <a:ea typeface="Microsoft JhengHei UI" panose="020B0604030504040204" pitchFamily="34" charset="-120"/>
+                        </a:rPr>
+                        <a:t>合約客戶、團體客、散客、散客團體</a:t>
+                      </a:r>
+                    </a:p>
+                  </a:txBody>
+                  <a:tcPr marL="139190" marR="139190" marT="92793" marB="92793" anchor="ctr"/>
+                </a:tc>
+                <a:extLst>
+                  <a:ext uri="{0D108BD9-81ED-4DB2-BD59-A6C34878D82A}">
+                    <a16:rowId xmlns:a16="http://schemas.microsoft.com/office/drawing/2014/main" val="3673219260"/>
+                  </a:ext>
+                </a:extLst>
+              </a:tr>
+              <a:tr h="519643">
+                <a:tc>
+                  <a:txBody>
+                    <a:bodyPr/>
+                    <a:lstStyle/>
+                    <a:p>
+                      <a:pPr rtl="0">
+                        <a:buNone/>
+                      </a:pPr>
+                      <a:r>
+                        <a:rPr lang="zh-TW" altLang="en-US" sz="2200" b="0">
+                          <a:solidFill>
+                            <a:srgbClr val="1B1C1D"/>
+                          </a:solidFill>
+                          <a:effectLst/>
+                          <a:latin typeface="Microsoft JhengHei UI" panose="020B0604030504040204" pitchFamily="34" charset="-120"/>
+                          <a:ea typeface="Microsoft JhengHei UI" panose="020B0604030504040204" pitchFamily="34" charset="-120"/>
+                        </a:rPr>
+                        <a:t>訂金策略</a:t>
+                      </a:r>
+                    </a:p>
+                  </a:txBody>
+                  <a:tcPr marL="139190" marR="139190" marT="92793" marB="92793" anchor="ctr"/>
+                </a:tc>
+                <a:tc>
+                  <a:txBody>
+                    <a:bodyPr/>
+                    <a:lstStyle/>
+                    <a:p>
+                      <a:pPr rtl="0">
+                        <a:buNone/>
+                      </a:pPr>
+                      <a:r>
+                        <a:rPr lang="zh-TW" altLang="en-US" sz="2200" b="0">
+                          <a:solidFill>
+                            <a:srgbClr val="1B1C1D"/>
+                          </a:solidFill>
+                          <a:effectLst/>
+                          <a:latin typeface="Microsoft JhengHei UI" panose="020B0604030504040204" pitchFamily="34" charset="-120"/>
+                          <a:ea typeface="Microsoft JhengHei UI" panose="020B0604030504040204" pitchFamily="34" charset="-120"/>
+                        </a:rPr>
+                        <a:t>無訂金、不可退訂金、可退訂金</a:t>
+                      </a:r>
+                    </a:p>
+                  </a:txBody>
+                  <a:tcPr marL="139190" marR="139190" marT="92793" marB="92793" anchor="ctr"/>
+                </a:tc>
+                <a:extLst>
+                  <a:ext uri="{0D108BD9-81ED-4DB2-BD59-A6C34878D82A}">
+                    <a16:rowId xmlns:a16="http://schemas.microsoft.com/office/drawing/2014/main" val="2222049307"/>
+                  </a:ext>
+                </a:extLst>
+              </a:tr>
+              <a:tr h="519643">
+                <a:tc>
+                  <a:txBody>
+                    <a:bodyPr/>
+                    <a:lstStyle/>
+                    <a:p>
+                      <a:pPr rtl="0">
+                        <a:buNone/>
+                      </a:pPr>
+                      <a:r>
+                        <a:rPr lang="zh-TW" altLang="en-US" sz="2200" b="0">
+                          <a:solidFill>
+                            <a:srgbClr val="1B1C1D"/>
+                          </a:solidFill>
+                          <a:effectLst/>
+                          <a:latin typeface="Microsoft JhengHei UI" panose="020B0604030504040204" pitchFamily="34" charset="-120"/>
+                          <a:ea typeface="Microsoft JhengHei UI" panose="020B0604030504040204" pitchFamily="34" charset="-120"/>
+                        </a:rPr>
+                        <a:t>回頭客</a:t>
+                      </a:r>
+                    </a:p>
+                  </a:txBody>
+                  <a:tcPr marL="139190" marR="139190" marT="92793" marB="92793" anchor="ctr"/>
+                </a:tc>
+                <a:tc>
+                  <a:txBody>
+                    <a:bodyPr/>
+                    <a:lstStyle/>
+                    <a:p>
+                      <a:pPr rtl="0">
+                        <a:buNone/>
+                      </a:pPr>
+                      <a:r>
+                        <a:rPr lang="zh-TW" altLang="en-US" sz="2200" b="0">
+                          <a:solidFill>
+                            <a:srgbClr val="1B1C1D"/>
+                          </a:solidFill>
+                          <a:effectLst/>
+                          <a:latin typeface="Microsoft JhengHei UI" panose="020B0604030504040204" pitchFamily="34" charset="-120"/>
+                          <a:ea typeface="Microsoft JhengHei UI" panose="020B0604030504040204" pitchFamily="34" charset="-120"/>
+                        </a:rPr>
+                        <a:t>新客、回頭客</a:t>
+                      </a:r>
+                    </a:p>
+                  </a:txBody>
+                  <a:tcPr marL="139190" marR="139190" marT="92793" marB="92793" anchor="ctr"/>
+                </a:tc>
+                <a:extLst>
+                  <a:ext uri="{0D108BD9-81ED-4DB2-BD59-A6C34878D82A}">
+                    <a16:rowId xmlns:a16="http://schemas.microsoft.com/office/drawing/2014/main" val="680341425"/>
+                  </a:ext>
+                </a:extLst>
+              </a:tr>
+              <a:tr h="853699">
+                <a:tc>
+                  <a:txBody>
+                    <a:bodyPr/>
+                    <a:lstStyle/>
+                    <a:p>
+                      <a:pPr rtl="0">
+                        <a:buNone/>
+                      </a:pPr>
+                      <a:r>
+                        <a:rPr lang="en-US" sz="2200" b="0" dirty="0">
+                          <a:solidFill>
+                            <a:srgbClr val="1B1C1D"/>
+                          </a:solidFill>
+                          <a:effectLst/>
+                          <a:latin typeface="Microsoft JhengHei UI" panose="020B0604030504040204" pitchFamily="34" charset="-120"/>
+                          <a:ea typeface="Microsoft JhengHei UI" panose="020B0604030504040204" pitchFamily="34" charset="-120"/>
+                        </a:rPr>
+                        <a:t>K-means Clustering</a:t>
+                      </a:r>
+                    </a:p>
+                  </a:txBody>
+                  <a:tcPr marL="139190" marR="139190" marT="92793" marB="92793" anchor="ctr"/>
+                </a:tc>
+                <a:tc>
+                  <a:txBody>
+                    <a:bodyPr/>
+                    <a:lstStyle/>
+                    <a:p>
+                      <a:pPr rtl="0">
+                        <a:buNone/>
+                      </a:pPr>
+                      <a:r>
+                        <a:rPr lang="zh-TW" altLang="en-US" sz="2200" b="0" dirty="0">
+                          <a:solidFill>
+                            <a:srgbClr val="1B1C1D"/>
+                          </a:solidFill>
+                          <a:effectLst/>
+                          <a:latin typeface="Microsoft JhengHei UI" panose="020B0604030504040204" pitchFamily="34" charset="-120"/>
+                          <a:ea typeface="Microsoft JhengHei UI" panose="020B0604030504040204" pitchFamily="34" charset="-120"/>
+                        </a:rPr>
+                        <a:t>商務短住、家庭旅遊、高價常住、週末短住</a:t>
+                      </a:r>
+                    </a:p>
+                  </a:txBody>
+                  <a:tcPr marL="139190" marR="139190" marT="92793" marB="92793" anchor="ctr"/>
+                </a:tc>
+                <a:extLst>
+                  <a:ext uri="{0D108BD9-81ED-4DB2-BD59-A6C34878D82A}">
+                    <a16:rowId xmlns:a16="http://schemas.microsoft.com/office/drawing/2014/main" val="3894474268"/>
+                  </a:ext>
+                </a:extLst>
+              </a:tr>
+            </a:tbl>
+          </a:graphicData>
+        </a:graphic>
+      </p:graphicFrame>
     </p:spTree>
     <p:extLst>
       <p:ext uri="{BB962C8B-B14F-4D97-AF65-F5344CB8AC3E}">
-        <p14:creationId xmlns:p14="http://schemas.microsoft.com/office/powerpoint/2010/main" val="465473449"/>
+        <p14:creationId xmlns:p14="http://schemas.microsoft.com/office/powerpoint/2010/main" val="4277374414"/>
       </p:ext>
     </p:extLst>
   </p:cSld>
